--- a/1. 일정/1. Weekly Plan/보고자료/프로젝트/연구소_주간업무_오세영_250910.pptx
+++ b/1. 일정/1. Weekly Plan/보고자료/프로젝트/연구소_주간업무_오세영_250910.pptx
@@ -27,24 +27,24 @@
   <p:notesSz cx="6802438" cy="9934575"/>
   <p:embeddedFontLst>
     <p:embeddedFont>
-      <p:font typeface="굴림" panose="020B0600000101010101" pitchFamily="34" charset="-127"/>
+      <p:font typeface="굴림" panose="020B0600000101010101" pitchFamily="50" charset="-127"/>
       <p:regular r:id="rId15"/>
     </p:embeddedFont>
     <p:embeddedFont>
-      <p:font typeface="Verdana" panose="020B0604030504040204" pitchFamily="34" charset="0"/>
+      <p:font typeface="Lucida Sans Unicode" panose="020B0602030504020204" pitchFamily="34" charset="0"/>
       <p:regular r:id="rId16"/>
-      <p:bold r:id="rId17"/>
-      <p:italic r:id="rId18"/>
-      <p:boldItalic r:id="rId19"/>
     </p:embeddedFont>
     <p:embeddedFont>
-      <p:font typeface="맑은 고딕" panose="020B0503020000020004" pitchFamily="34" charset="-127"/>
-      <p:regular r:id="rId20"/>
-      <p:bold r:id="rId21"/>
+      <p:font typeface="Verdana" panose="020B0604030504040204" pitchFamily="34" charset="0"/>
+      <p:regular r:id="rId17"/>
+      <p:bold r:id="rId18"/>
+      <p:italic r:id="rId19"/>
+      <p:boldItalic r:id="rId20"/>
     </p:embeddedFont>
     <p:embeddedFont>
-      <p:font typeface="Lucida Sans Unicode" panose="020B0602030504020204" pitchFamily="34" charset="0"/>
-      <p:regular r:id="rId22"/>
+      <p:font typeface="맑은 고딕" panose="020B0503020000020004" pitchFamily="50" charset="-127"/>
+      <p:regular r:id="rId21"/>
+      <p:bold r:id="rId22"/>
     </p:embeddedFont>
   </p:embeddedFontLst>
   <p:defaultTextStyle>
@@ -6001,7 +6001,7 @@
                         <a:defRPr/>
                       </a:pPr>
                       <a:r>
-                        <a:rPr lang="en-US" altLang="ko-KR" sz="1000" b="0" kern="1200" smtClean="0">
+                        <a:rPr lang="en-US" altLang="ko-KR" sz="1000" b="0" kern="1200" dirty="0" smtClean="0">
                           <a:solidFill>
                             <a:schemeClr val="tx1"/>
                           </a:solidFill>
@@ -6012,7 +6012,7 @@
                         <a:t>QV </a:t>
                       </a:r>
                       <a:r>
-                        <a:rPr lang="ko-KR" altLang="en-US" sz="1000" b="0" kern="1200" smtClean="0">
+                        <a:rPr lang="ko-KR" altLang="en-US" sz="1000" b="0" kern="1200" dirty="0" smtClean="0">
                           <a:solidFill>
                             <a:schemeClr val="tx1"/>
                           </a:solidFill>
@@ -6103,7 +6103,7 @@
                         <a:defRPr/>
                       </a:pPr>
                       <a:r>
-                        <a:rPr kumimoji="1" lang="en-US" altLang="ko-KR" sz="1000" b="0" i="0" u="none" strike="noStrike" kern="1200" cap="none" normalizeH="0" baseline="0" smtClean="0">
+                        <a:rPr kumimoji="1" lang="en-US" altLang="ko-KR" sz="1000" b="0" i="0" u="none" strike="noStrike" kern="1200" cap="none" normalizeH="0" baseline="0" dirty="0" smtClean="0">
                           <a:ln>
                             <a:noFill/>
                           </a:ln>
@@ -6118,7 +6118,7 @@
                         <a:t>- </a:t>
                       </a:r>
                       <a:r>
-                        <a:rPr kumimoji="1" lang="ko-KR" altLang="en-US" sz="1000" b="0" i="0" u="none" strike="noStrike" kern="1200" cap="none" normalizeH="0" baseline="0" smtClean="0">
+                        <a:rPr kumimoji="1" lang="ko-KR" altLang="en-US" sz="1000" b="0" i="0" u="none" strike="noStrike" kern="1200" cap="none" normalizeH="0" baseline="0" dirty="0" smtClean="0">
                           <a:ln>
                             <a:noFill/>
                           </a:ln>
@@ -6133,7 +6133,7 @@
                         <a:t>사이버 보안 적용 시 </a:t>
                       </a:r>
                       <a:r>
-                        <a:rPr kumimoji="1" lang="en-US" altLang="ko-KR" sz="1000" b="0" i="0" u="none" strike="noStrike" kern="1200" cap="none" normalizeH="0" baseline="0" smtClean="0">
+                        <a:rPr kumimoji="1" lang="en-US" altLang="ko-KR" sz="1000" b="0" i="0" u="none" strike="noStrike" kern="1200" cap="none" normalizeH="0" baseline="0" dirty="0" smtClean="0">
                           <a:ln>
                             <a:noFill/>
                           </a:ln>
@@ -6148,7 +6148,7 @@
                         <a:t>UPDATE </a:t>
                       </a:r>
                       <a:r>
-                        <a:rPr kumimoji="1" lang="ko-KR" altLang="en-US" sz="1000" b="0" i="0" u="none" strike="noStrike" kern="1200" cap="none" normalizeH="0" baseline="0" smtClean="0">
+                        <a:rPr kumimoji="1" lang="ko-KR" altLang="en-US" sz="1000" b="0" i="0" u="none" strike="noStrike" kern="1200" cap="none" normalizeH="0" baseline="0" dirty="0" smtClean="0">
                           <a:ln>
                             <a:noFill/>
                           </a:ln>
@@ -6160,9 +6160,39 @@
                           <a:ea typeface="+mn-ea"/>
                           <a:cs typeface="+mn-cs"/>
                         </a:rPr>
-                        <a:t>안되는 부분 공조 설계팀으로 이슈 </a:t>
-                      </a:r>
-                      <a:endParaRPr kumimoji="1" lang="en-US" altLang="ko-KR" sz="1000" b="0" i="0" u="none" strike="noStrike" kern="1200" cap="none" normalizeH="0" baseline="0" smtClean="0">
+                        <a:t>안되는 부분 공조 </a:t>
+                      </a:r>
+                      <a:r>
+                        <a:rPr kumimoji="1" lang="ko-KR" altLang="en-US" sz="1000" b="0" i="0" u="none" strike="noStrike" kern="1200" cap="none" normalizeH="0" baseline="0" dirty="0" err="1" smtClean="0">
+                          <a:ln>
+                            <a:noFill/>
+                          </a:ln>
+                          <a:solidFill>
+                            <a:schemeClr val="tx1"/>
+                          </a:solidFill>
+                          <a:effectLst/>
+                          <a:latin typeface="+mn-lt"/>
+                          <a:ea typeface="+mn-ea"/>
+                          <a:cs typeface="+mn-cs"/>
+                        </a:rPr>
+                        <a:t>설계팀으로</a:t>
+                      </a:r>
+                      <a:r>
+                        <a:rPr kumimoji="1" lang="ko-KR" altLang="en-US" sz="1000" b="0" i="0" u="none" strike="noStrike" kern="1200" cap="none" normalizeH="0" baseline="0" dirty="0" smtClean="0">
+                          <a:ln>
+                            <a:noFill/>
+                          </a:ln>
+                          <a:solidFill>
+                            <a:schemeClr val="tx1"/>
+                          </a:solidFill>
+                          <a:effectLst/>
+                          <a:latin typeface="+mn-lt"/>
+                          <a:ea typeface="+mn-ea"/>
+                          <a:cs typeface="+mn-cs"/>
+                        </a:rPr>
+                        <a:t> 이슈 </a:t>
+                      </a:r>
+                      <a:endParaRPr kumimoji="1" lang="en-US" altLang="ko-KR" sz="1000" b="0" i="0" u="none" strike="noStrike" kern="1200" cap="none" normalizeH="0" baseline="0" dirty="0" smtClean="0">
                         <a:ln>
                           <a:noFill/>
                         </a:ln>
@@ -6196,7 +6226,7 @@
                         <a:defRPr/>
                       </a:pPr>
                       <a:r>
-                        <a:rPr kumimoji="1" lang="en-US" altLang="ko-KR" sz="1000" b="0" i="0" u="none" strike="noStrike" kern="1200" cap="none" normalizeH="0" baseline="0" smtClean="0">
+                        <a:rPr kumimoji="1" lang="en-US" altLang="ko-KR" sz="1000" b="0" i="0" u="none" strike="noStrike" kern="1200" cap="none" normalizeH="0" baseline="0" dirty="0" smtClean="0">
                           <a:ln>
                             <a:noFill/>
                           </a:ln>
@@ -6211,7 +6241,7 @@
                         <a:t>  </a:t>
                       </a:r>
                       <a:r>
-                        <a:rPr kumimoji="1" lang="ko-KR" altLang="en-US" sz="1000" b="0" i="0" u="none" strike="noStrike" kern="1200" cap="none" normalizeH="0" baseline="0" smtClean="0">
+                        <a:rPr kumimoji="1" lang="ko-KR" altLang="en-US" sz="1000" b="0" i="0" u="none" strike="noStrike" kern="1200" cap="none" normalizeH="0" baseline="0" dirty="0" smtClean="0">
                           <a:ln>
                             <a:noFill/>
                           </a:ln>
@@ -6225,7 +6255,7 @@
                         </a:rPr>
                         <a:t>제기</a:t>
                       </a:r>
-                      <a:endParaRPr kumimoji="1" lang="en-US" altLang="ko-KR" sz="1000" b="0" i="0" u="none" strike="noStrike" kern="1200" cap="none" normalizeH="0" baseline="0" smtClean="0">
+                      <a:endParaRPr kumimoji="1" lang="en-US" altLang="ko-KR" sz="1000" b="0" i="0" u="none" strike="noStrike" kern="1200" cap="none" normalizeH="0" baseline="0" dirty="0" smtClean="0">
                         <a:ln>
                           <a:noFill/>
                         </a:ln>
@@ -6259,7 +6289,7 @@
                         <a:defRPr/>
                       </a:pPr>
                       <a:r>
-                        <a:rPr kumimoji="1" lang="en-US" altLang="ko-KR" sz="1000" b="0" i="0" u="none" strike="noStrike" kern="1200" cap="none" normalizeH="0" baseline="0" smtClean="0">
+                        <a:rPr kumimoji="1" lang="en-US" altLang="ko-KR" sz="1000" b="0" i="0" u="none" strike="noStrike" kern="1200" cap="none" normalizeH="0" baseline="0" dirty="0" smtClean="0">
                           <a:ln>
                             <a:noFill/>
                           </a:ln>
@@ -6274,7 +6304,7 @@
                         <a:t>  : </a:t>
                       </a:r>
                       <a:r>
-                        <a:rPr kumimoji="1" lang="ko-KR" altLang="en-US" sz="1000" b="0" i="0" u="none" strike="noStrike" kern="1200" cap="none" normalizeH="0" baseline="0" smtClean="0">
+                        <a:rPr kumimoji="1" lang="ko-KR" altLang="en-US" sz="1000" b="0" i="0" u="none" strike="noStrike" kern="1200" cap="none" normalizeH="0" baseline="0" dirty="0" smtClean="0">
                           <a:ln>
                             <a:noFill/>
                           </a:ln>
@@ -6289,7 +6319,7 @@
                         <a:t>정식 </a:t>
                       </a:r>
                       <a:r>
-                        <a:rPr kumimoji="1" lang="en-US" altLang="ko-KR" sz="1000" b="0" i="0" u="none" strike="noStrike" kern="1200" cap="none" normalizeH="0" baseline="0" smtClean="0">
+                        <a:rPr kumimoji="1" lang="en-US" altLang="ko-KR" sz="1000" b="0" i="0" u="none" strike="noStrike" kern="1200" cap="none" normalizeH="0" baseline="0" dirty="0" smtClean="0">
                           <a:ln>
                             <a:noFill/>
                           </a:ln>
@@ -6304,7 +6334,7 @@
                         <a:t>OTA </a:t>
                       </a:r>
                       <a:r>
-                        <a:rPr kumimoji="1" lang="ko-KR" altLang="en-US" sz="1000" b="0" i="0" u="none" strike="noStrike" kern="1200" cap="none" normalizeH="0" baseline="0" smtClean="0">
+                        <a:rPr kumimoji="1" lang="ko-KR" altLang="en-US" sz="1000" b="0" i="0" u="none" strike="noStrike" kern="1200" cap="none" normalizeH="0" baseline="0" dirty="0" smtClean="0">
                           <a:ln>
                             <a:noFill/>
                           </a:ln>
@@ -6319,7 +6349,7 @@
                         <a:t>적용 시 </a:t>
                       </a:r>
                       <a:r>
-                        <a:rPr kumimoji="1" lang="en-US" altLang="ko-KR" sz="1000" b="0" i="0" u="none" strike="noStrike" kern="1200" cap="none" normalizeH="0" baseline="0" smtClean="0">
+                        <a:rPr kumimoji="1" lang="en-US" altLang="ko-KR" sz="1000" b="0" i="0" u="none" strike="noStrike" kern="1200" cap="none" normalizeH="0" baseline="0" dirty="0" err="1" smtClean="0">
                           <a:ln>
                             <a:noFill/>
                           </a:ln>
@@ -6331,10 +6361,10 @@
                           <a:ea typeface="+mn-ea"/>
                           <a:cs typeface="+mn-cs"/>
                         </a:rPr>
-                        <a:t>AutoSar </a:t>
-                      </a:r>
-                      <a:r>
-                        <a:rPr kumimoji="1" lang="ko-KR" altLang="en-US" sz="1000" b="0" i="0" u="none" strike="noStrike" kern="1200" cap="none" normalizeH="0" baseline="0" smtClean="0">
+                        <a:t>AutoSar</a:t>
+                      </a:r>
+                      <a:r>
+                        <a:rPr kumimoji="1" lang="en-US" altLang="ko-KR" sz="1000" b="0" i="0" u="none" strike="noStrike" kern="1200" cap="none" normalizeH="0" baseline="0" dirty="0" smtClean="0">
                           <a:ln>
                             <a:noFill/>
                           </a:ln>
@@ -6346,10 +6376,10 @@
                           <a:ea typeface="+mn-ea"/>
                           <a:cs typeface="+mn-cs"/>
                         </a:rPr>
-                        <a:t>적용 및 그에따른 개발 기간</a:t>
-                      </a:r>
-                      <a:r>
-                        <a:rPr kumimoji="1" lang="en-US" altLang="ko-KR" sz="1000" b="0" i="0" u="none" strike="noStrike" kern="1200" cap="none" normalizeH="0" baseline="0" smtClean="0">
+                        <a:t> </a:t>
+                      </a:r>
+                      <a:r>
+                        <a:rPr kumimoji="1" lang="ko-KR" altLang="en-US" sz="1000" b="0" i="0" u="none" strike="noStrike" kern="1200" cap="none" normalizeH="0" baseline="0" dirty="0" smtClean="0">
                           <a:ln>
                             <a:noFill/>
                           </a:ln>
@@ -6361,10 +6391,10 @@
                           <a:ea typeface="+mn-ea"/>
                           <a:cs typeface="+mn-cs"/>
                         </a:rPr>
-                        <a:t>/</a:t>
-                      </a:r>
-                      <a:r>
-                        <a:rPr kumimoji="1" lang="ko-KR" altLang="en-US" sz="1000" b="0" i="0" u="none" strike="noStrike" kern="1200" cap="none" normalizeH="0" baseline="0" smtClean="0">
+                        <a:t>적용 및 </a:t>
+                      </a:r>
+                      <a:r>
+                        <a:rPr kumimoji="1" lang="ko-KR" altLang="en-US" sz="1000" b="0" i="0" u="none" strike="noStrike" kern="1200" cap="none" normalizeH="0" baseline="0" dirty="0" err="1" smtClean="0">
                           <a:ln>
                             <a:noFill/>
                           </a:ln>
@@ -6376,9 +6406,54 @@
                           <a:ea typeface="+mn-ea"/>
                           <a:cs typeface="+mn-cs"/>
                         </a:rPr>
+                        <a:t>그에따른</a:t>
+                      </a:r>
+                      <a:r>
+                        <a:rPr kumimoji="1" lang="ko-KR" altLang="en-US" sz="1000" b="0" i="0" u="none" strike="noStrike" kern="1200" cap="none" normalizeH="0" baseline="0" dirty="0" smtClean="0">
+                          <a:ln>
+                            <a:noFill/>
+                          </a:ln>
+                          <a:solidFill>
+                            <a:schemeClr val="tx1"/>
+                          </a:solidFill>
+                          <a:effectLst/>
+                          <a:latin typeface="+mn-lt"/>
+                          <a:ea typeface="+mn-ea"/>
+                          <a:cs typeface="+mn-cs"/>
+                        </a:rPr>
+                        <a:t> 개발 기간</a:t>
+                      </a:r>
+                      <a:r>
+                        <a:rPr kumimoji="1" lang="en-US" altLang="ko-KR" sz="1000" b="0" i="0" u="none" strike="noStrike" kern="1200" cap="none" normalizeH="0" baseline="0" dirty="0" smtClean="0">
+                          <a:ln>
+                            <a:noFill/>
+                          </a:ln>
+                          <a:solidFill>
+                            <a:schemeClr val="tx1"/>
+                          </a:solidFill>
+                          <a:effectLst/>
+                          <a:latin typeface="+mn-lt"/>
+                          <a:ea typeface="+mn-ea"/>
+                          <a:cs typeface="+mn-cs"/>
+                        </a:rPr>
+                        <a:t>/</a:t>
+                      </a:r>
+                      <a:r>
+                        <a:rPr kumimoji="1" lang="ko-KR" altLang="en-US" sz="1000" b="0" i="0" u="none" strike="noStrike" kern="1200" cap="none" normalizeH="0" baseline="0" dirty="0" smtClean="0">
+                          <a:ln>
+                            <a:noFill/>
+                          </a:ln>
+                          <a:solidFill>
+                            <a:schemeClr val="tx1"/>
+                          </a:solidFill>
+                          <a:effectLst/>
+                          <a:latin typeface="+mn-lt"/>
+                          <a:ea typeface="+mn-ea"/>
+                          <a:cs typeface="+mn-cs"/>
+                        </a:rPr>
                         <a:t>투자비 </a:t>
                       </a:r>
-                      <a:endParaRPr kumimoji="1" lang="en-US" altLang="ko-KR" sz="1000" b="0" i="0" u="none" strike="noStrike" kern="1200" cap="none" normalizeH="0" baseline="0" smtClean="0">
+                      <a:endParaRPr kumimoji="1" lang="en-US" altLang="ko-KR" sz="1000" b="0" i="0" u="none" strike="noStrike" kern="1200" cap="none" normalizeH="0" baseline="0" dirty="0" smtClean="0">
                         <a:ln>
                           <a:noFill/>
                         </a:ln>
@@ -6412,7 +6487,7 @@
                         <a:defRPr/>
                       </a:pPr>
                       <a:r>
-                        <a:rPr kumimoji="1" lang="en-US" altLang="ko-KR" sz="1000" b="0" i="0" u="none" strike="noStrike" kern="1200" cap="none" normalizeH="0" baseline="0" smtClean="0">
+                        <a:rPr kumimoji="1" lang="en-US" altLang="ko-KR" sz="1000" b="0" i="0" u="none" strike="noStrike" kern="1200" cap="none" normalizeH="0" baseline="0" dirty="0" smtClean="0">
                           <a:ln>
                             <a:noFill/>
                           </a:ln>
@@ -6427,7 +6502,7 @@
                         <a:t>    </a:t>
                       </a:r>
                       <a:r>
-                        <a:rPr kumimoji="1" lang="ko-KR" altLang="en-US" sz="1000" b="0" i="0" u="none" strike="noStrike" kern="1200" cap="none" normalizeH="0" baseline="0" smtClean="0">
+                        <a:rPr kumimoji="1" lang="ko-KR" altLang="en-US" sz="1000" b="0" i="0" u="none" strike="noStrike" kern="1200" cap="none" normalizeH="0" baseline="0" dirty="0" smtClean="0">
                           <a:ln>
                             <a:noFill/>
                           </a:ln>
@@ -6441,7 +6516,7 @@
                         </a:rPr>
                         <a:t>발생 내용 공유 完</a:t>
                       </a:r>
-                      <a:endParaRPr kumimoji="1" lang="en-US" altLang="ko-KR" sz="1000" b="0" i="0" u="none" strike="noStrike" kern="1200" cap="none" normalizeH="0" baseline="0" smtClean="0">
+                      <a:endParaRPr kumimoji="1" lang="en-US" altLang="ko-KR" sz="1000" b="0" i="0" u="none" strike="noStrike" kern="1200" cap="none" normalizeH="0" baseline="0" dirty="0" smtClean="0">
                         <a:ln>
                           <a:noFill/>
                         </a:ln>
@@ -6475,7 +6550,7 @@
                         <a:defRPr/>
                       </a:pPr>
                       <a:r>
-                        <a:rPr kumimoji="1" lang="en-US" altLang="ko-KR" sz="1000" b="0" i="0" u="none" strike="noStrike" kern="1200" cap="none" normalizeH="0" baseline="0" smtClean="0">
+                        <a:rPr kumimoji="1" lang="en-US" altLang="ko-KR" sz="1000" b="0" i="0" u="none" strike="noStrike" kern="1200" cap="none" normalizeH="0" baseline="0" dirty="0" smtClean="0">
                           <a:ln>
                             <a:noFill/>
                           </a:ln>
@@ -6490,7 +6565,7 @@
                         <a:t>  : </a:t>
                       </a:r>
                       <a:r>
-                        <a:rPr kumimoji="1" lang="ko-KR" altLang="en-US" sz="1000" b="0" i="0" u="none" strike="noStrike" kern="1200" cap="none" normalizeH="0" baseline="0" smtClean="0">
+                        <a:rPr kumimoji="1" lang="ko-KR" altLang="en-US" sz="1000" b="0" i="0" u="none" strike="noStrike" kern="1200" cap="none" normalizeH="0" baseline="0" dirty="0" smtClean="0">
                           <a:ln>
                             <a:noFill/>
                           </a:ln>
@@ -6505,7 +6580,7 @@
                         <a:t>정식 </a:t>
                       </a:r>
                       <a:r>
-                        <a:rPr kumimoji="1" lang="en-US" altLang="ko-KR" sz="1000" b="0" i="0" u="none" strike="noStrike" kern="1200" cap="none" normalizeH="0" baseline="0" smtClean="0">
+                        <a:rPr kumimoji="1" lang="en-US" altLang="ko-KR" sz="1000" b="0" i="0" u="none" strike="noStrike" kern="1200" cap="none" normalizeH="0" baseline="0" dirty="0" smtClean="0">
                           <a:ln>
                             <a:noFill/>
                           </a:ln>
@@ -6520,7 +6595,7 @@
                         <a:t>OTA </a:t>
                       </a:r>
                       <a:r>
-                        <a:rPr kumimoji="1" lang="ko-KR" altLang="en-US" sz="1000" b="0" i="0" u="none" strike="noStrike" kern="1200" cap="none" normalizeH="0" baseline="0" smtClean="0">
+                        <a:rPr kumimoji="1" lang="ko-KR" altLang="en-US" sz="1000" b="0" i="0" u="none" strike="noStrike" kern="1200" cap="none" normalizeH="0" baseline="0" dirty="0" smtClean="0">
                           <a:ln>
                             <a:noFill/>
                           </a:ln>
@@ -6535,7 +6610,7 @@
                         <a:t>적용 안하나</a:t>
                       </a:r>
                       <a:r>
-                        <a:rPr kumimoji="1" lang="en-US" altLang="ko-KR" sz="1000" b="0" i="0" u="none" strike="noStrike" kern="1200" cap="none" normalizeH="0" baseline="0" smtClean="0">
+                        <a:rPr kumimoji="1" lang="en-US" altLang="ko-KR" sz="1000" b="0" i="0" u="none" strike="noStrike" kern="1200" cap="none" normalizeH="0" baseline="0" dirty="0" smtClean="0">
                           <a:ln>
                             <a:noFill/>
                           </a:ln>
@@ -6550,7 +6625,7 @@
                         <a:t>, Secure Flash 1.0 rule </a:t>
                       </a:r>
                       <a:r>
-                        <a:rPr kumimoji="1" lang="ko-KR" altLang="en-US" sz="1000" b="0" i="0" u="none" strike="noStrike" kern="1200" cap="none" normalizeH="0" baseline="0" smtClean="0">
+                        <a:rPr kumimoji="1" lang="ko-KR" altLang="en-US" sz="1000" b="0" i="0" u="none" strike="noStrike" kern="1200" cap="none" normalizeH="0" baseline="0" dirty="0" smtClean="0">
                           <a:ln>
                             <a:noFill/>
                           </a:ln>
@@ -6564,7 +6639,7 @@
                         </a:rPr>
                         <a:t>기반 업데이트 가능 </a:t>
                       </a:r>
-                      <a:endParaRPr kumimoji="1" lang="en-US" altLang="ko-KR" sz="1000" b="0" i="0" u="none" strike="noStrike" kern="1200" cap="none" normalizeH="0" baseline="0" smtClean="0">
+                      <a:endParaRPr kumimoji="1" lang="en-US" altLang="ko-KR" sz="1000" b="0" i="0" u="none" strike="noStrike" kern="1200" cap="none" normalizeH="0" baseline="0" dirty="0" smtClean="0">
                         <a:ln>
                           <a:noFill/>
                         </a:ln>
@@ -6598,7 +6673,7 @@
                         <a:defRPr/>
                       </a:pPr>
                       <a:r>
-                        <a:rPr kumimoji="1" lang="en-US" altLang="ko-KR" sz="1000" b="0" i="0" u="none" strike="noStrike" kern="1200" cap="none" normalizeH="0" baseline="0" smtClean="0">
+                        <a:rPr kumimoji="1" lang="en-US" altLang="ko-KR" sz="1000" b="0" i="0" u="none" strike="noStrike" kern="1200" cap="none" normalizeH="0" baseline="0" dirty="0" smtClean="0">
                           <a:ln>
                             <a:noFill/>
                           </a:ln>
@@ -6613,7 +6688,7 @@
                         <a:t>    </a:t>
                       </a:r>
                       <a:r>
-                        <a:rPr kumimoji="1" lang="ko-KR" altLang="en-US" sz="1000" b="0" i="0" u="none" strike="noStrike" kern="1200" cap="none" normalizeH="0" baseline="0" smtClean="0">
+                        <a:rPr kumimoji="1" lang="ko-KR" altLang="en-US" sz="1000" b="0" i="0" u="none" strike="noStrike" kern="1200" cap="none" normalizeH="0" baseline="0" dirty="0" err="1" smtClean="0">
                           <a:ln>
                             <a:noFill/>
                           </a:ln>
@@ -6625,9 +6700,24 @@
                           <a:ea typeface="+mn-ea"/>
                           <a:cs typeface="+mn-cs"/>
                         </a:rPr>
-                        <a:t>토록 제안 完</a:t>
-                      </a:r>
-                      <a:endParaRPr kumimoji="1" lang="en-US" altLang="ko-KR" sz="1000" b="0" i="0" u="none" strike="noStrike" kern="1200" cap="none" normalizeH="0" baseline="0" smtClean="0">
+                        <a:t>토록</a:t>
+                      </a:r>
+                      <a:r>
+                        <a:rPr kumimoji="1" lang="ko-KR" altLang="en-US" sz="1000" b="0" i="0" u="none" strike="noStrike" kern="1200" cap="none" normalizeH="0" baseline="0" dirty="0" smtClean="0">
+                          <a:ln>
+                            <a:noFill/>
+                          </a:ln>
+                          <a:solidFill>
+                            <a:schemeClr val="tx1"/>
+                          </a:solidFill>
+                          <a:effectLst/>
+                          <a:latin typeface="+mn-lt"/>
+                          <a:ea typeface="+mn-ea"/>
+                          <a:cs typeface="+mn-cs"/>
+                        </a:rPr>
+                        <a:t> 제안 完</a:t>
+                      </a:r>
+                      <a:endParaRPr kumimoji="1" lang="en-US" altLang="ko-KR" sz="1000" b="0" i="0" u="none" strike="noStrike" kern="1200" cap="none" normalizeH="0" baseline="0" dirty="0" smtClean="0">
                         <a:ln>
                           <a:noFill/>
                         </a:ln>
@@ -6661,7 +6751,7 @@
                         <a:defRPr/>
                       </a:pPr>
                       <a:r>
-                        <a:rPr kumimoji="1" lang="en-US" altLang="ko-KR" sz="1000" b="0" i="0" u="none" strike="noStrike" kern="1200" cap="none" normalizeH="0" baseline="0" smtClean="0">
+                        <a:rPr kumimoji="1" lang="en-US" altLang="ko-KR" sz="1000" b="0" i="0" u="none" strike="noStrike" kern="1200" cap="none" normalizeH="0" baseline="0" dirty="0" smtClean="0">
                           <a:ln>
                             <a:noFill/>
                           </a:ln>
@@ -6676,7 +6766,7 @@
                         <a:t>  </a:t>
                       </a:r>
                       <a:r>
-                        <a:rPr kumimoji="1" lang="en-US" altLang="ko-KR" sz="1000" b="0" i="0" u="none" strike="noStrike" kern="1200" cap="none" normalizeH="0" baseline="0" smtClean="0">
+                        <a:rPr kumimoji="1" lang="en-US" altLang="ko-KR" sz="1000" b="0" i="0" u="none" strike="noStrike" kern="1200" cap="none" normalizeH="0" baseline="0" dirty="0" smtClean="0">
                           <a:ln>
                             <a:noFill/>
                           </a:ln>
@@ -6692,7 +6782,7 @@
                         <a:t> QV </a:t>
                       </a:r>
                       <a:r>
-                        <a:rPr kumimoji="1" lang="ko-KR" altLang="en-US" sz="1000" b="0" i="0" u="none" strike="noStrike" kern="1200" cap="none" normalizeH="0" baseline="0" smtClean="0">
+                        <a:rPr kumimoji="1" lang="ko-KR" altLang="en-US" sz="1000" b="0" i="0" u="none" strike="noStrike" kern="1200" cap="none" normalizeH="0" baseline="0" dirty="0" smtClean="0">
                           <a:ln>
                             <a:noFill/>
                           </a:ln>
@@ -6705,10 +6795,42 @@
                           <a:cs typeface="+mn-cs"/>
                           <a:sym typeface="Wingdings" panose="05000000000000000000" pitchFamily="2" charset="2"/>
                         </a:rPr>
-                        <a:t>프로젝트의 일정 긴급함에 따라 빠른 회신 요청 하였으며</a:t>
-                      </a:r>
-                      <a:r>
-                        <a:rPr kumimoji="1" lang="en-US" altLang="ko-KR" sz="1000" b="0" i="0" u="none" strike="noStrike" kern="1200" cap="none" normalizeH="0" baseline="0" smtClean="0">
+                        <a:t>프로젝트의 일정 </a:t>
+                      </a:r>
+                      <a:r>
+                        <a:rPr kumimoji="1" lang="ko-KR" altLang="en-US" sz="1000" b="0" i="0" u="none" strike="noStrike" kern="1200" cap="none" normalizeH="0" baseline="0" dirty="0" err="1" smtClean="0">
+                          <a:ln>
+                            <a:noFill/>
+                          </a:ln>
+                          <a:solidFill>
+                            <a:schemeClr val="tx1"/>
+                          </a:solidFill>
+                          <a:effectLst/>
+                          <a:latin typeface="+mn-lt"/>
+                          <a:ea typeface="+mn-ea"/>
+                          <a:cs typeface="+mn-cs"/>
+                          <a:sym typeface="Wingdings" panose="05000000000000000000" pitchFamily="2" charset="2"/>
+                        </a:rPr>
+                        <a:t>긴급함에</a:t>
+                      </a:r>
+                      <a:r>
+                        <a:rPr kumimoji="1" lang="ko-KR" altLang="en-US" sz="1000" b="0" i="0" u="none" strike="noStrike" kern="1200" cap="none" normalizeH="0" baseline="0" dirty="0" smtClean="0">
+                          <a:ln>
+                            <a:noFill/>
+                          </a:ln>
+                          <a:solidFill>
+                            <a:schemeClr val="tx1"/>
+                          </a:solidFill>
+                          <a:effectLst/>
+                          <a:latin typeface="+mn-lt"/>
+                          <a:ea typeface="+mn-ea"/>
+                          <a:cs typeface="+mn-cs"/>
+                          <a:sym typeface="Wingdings" panose="05000000000000000000" pitchFamily="2" charset="2"/>
+                        </a:rPr>
+                        <a:t> 따라 빠른 회신 요청 하였으며</a:t>
+                      </a:r>
+                      <a:r>
+                        <a:rPr kumimoji="1" lang="en-US" altLang="ko-KR" sz="1000" b="0" i="0" u="none" strike="noStrike" kern="1200" cap="none" normalizeH="0" baseline="0" dirty="0" smtClean="0">
                           <a:ln>
                             <a:noFill/>
                           </a:ln>
@@ -6745,7 +6867,7 @@
                         <a:defRPr/>
                       </a:pPr>
                       <a:r>
-                        <a:rPr kumimoji="1" lang="en-US" altLang="ko-KR" sz="1000" b="0" i="0" u="none" strike="noStrike" kern="1200" cap="none" normalizeH="0" baseline="0" smtClean="0">
+                        <a:rPr kumimoji="1" lang="en-US" altLang="ko-KR" sz="1000" b="0" i="0" u="none" strike="noStrike" kern="1200" cap="none" normalizeH="0" baseline="0" dirty="0" smtClean="0">
                           <a:ln>
                             <a:noFill/>
                           </a:ln>
@@ -6761,7 +6883,7 @@
                         <a:t>      </a:t>
                       </a:r>
                       <a:r>
-                        <a:rPr kumimoji="1" lang="ko-KR" altLang="en-US" sz="1000" b="0" i="0" u="none" strike="noStrike" kern="1200" cap="none" normalizeH="0" baseline="0" smtClean="0">
+                        <a:rPr kumimoji="1" lang="ko-KR" altLang="en-US" sz="1000" b="0" i="0" u="none" strike="noStrike" kern="1200" cap="none" normalizeH="0" baseline="0" dirty="0" smtClean="0">
                           <a:ln>
                             <a:noFill/>
                           </a:ln>
@@ -6774,10 +6896,10 @@
                           <a:cs typeface="+mn-cs"/>
                           <a:sym typeface="Wingdings" panose="05000000000000000000" pitchFamily="2" charset="2"/>
                         </a:rPr>
-                        <a:t>금주 중 확정 하여 회신준다고 함 </a:t>
-                      </a:r>
-                      <a:r>
-                        <a:rPr kumimoji="1" lang="en-US" altLang="ko-KR" sz="1000" b="0" i="0" u="none" strike="noStrike" kern="1200" cap="none" normalizeH="0" baseline="0" smtClean="0">
+                        <a:t>금주 중 확정 하여 </a:t>
+                      </a:r>
+                      <a:r>
+                        <a:rPr kumimoji="1" lang="ko-KR" altLang="en-US" sz="1000" b="0" i="0" u="none" strike="noStrike" kern="1200" cap="none" normalizeH="0" baseline="0" dirty="0" err="1" smtClean="0">
                           <a:ln>
                             <a:noFill/>
                           </a:ln>
@@ -6790,10 +6912,10 @@
                           <a:cs typeface="+mn-cs"/>
                           <a:sym typeface="Wingdings" panose="05000000000000000000" pitchFamily="2" charset="2"/>
                         </a:rPr>
-                        <a:t>(</a:t>
-                      </a:r>
-                      <a:r>
-                        <a:rPr kumimoji="1" lang="ko-KR" altLang="en-US" sz="1000" b="0" i="0" u="none" strike="noStrike" kern="1200" cap="none" normalizeH="0" baseline="0" smtClean="0">
+                        <a:t>회신준다고</a:t>
+                      </a:r>
+                      <a:r>
+                        <a:rPr kumimoji="1" lang="ko-KR" altLang="en-US" sz="1000" b="0" i="0" u="none" strike="noStrike" kern="1200" cap="none" normalizeH="0" baseline="0" dirty="0" smtClean="0">
                           <a:ln>
                             <a:noFill/>
                           </a:ln>
@@ -6806,10 +6928,10 @@
                           <a:cs typeface="+mn-cs"/>
                           <a:sym typeface="Wingdings" panose="05000000000000000000" pitchFamily="2" charset="2"/>
                         </a:rPr>
-                        <a:t>공조시스템 한별 책임</a:t>
-                      </a:r>
-                      <a:r>
-                        <a:rPr kumimoji="1" lang="en-US" altLang="ko-KR" sz="1000" b="0" i="0" u="none" strike="noStrike" kern="1200" cap="none" normalizeH="0" baseline="0" smtClean="0">
+                        <a:t> 함 </a:t>
+                      </a:r>
+                      <a:r>
+                        <a:rPr kumimoji="1" lang="en-US" altLang="ko-KR" sz="1000" b="0" i="0" u="none" strike="noStrike" kern="1200" cap="none" normalizeH="0" baseline="0" dirty="0" smtClean="0">
                           <a:ln>
                             <a:noFill/>
                           </a:ln>
@@ -6822,9 +6944,41 @@
                           <a:cs typeface="+mn-cs"/>
                           <a:sym typeface="Wingdings" panose="05000000000000000000" pitchFamily="2" charset="2"/>
                         </a:rPr>
+                        <a:t>(</a:t>
+                      </a:r>
+                      <a:r>
+                        <a:rPr kumimoji="1" lang="ko-KR" altLang="en-US" sz="1000" b="0" i="0" u="none" strike="noStrike" kern="1200" cap="none" normalizeH="0" baseline="0" dirty="0" smtClean="0">
+                          <a:ln>
+                            <a:noFill/>
+                          </a:ln>
+                          <a:solidFill>
+                            <a:schemeClr val="tx1"/>
+                          </a:solidFill>
+                          <a:effectLst/>
+                          <a:latin typeface="+mn-lt"/>
+                          <a:ea typeface="+mn-ea"/>
+                          <a:cs typeface="+mn-cs"/>
+                          <a:sym typeface="Wingdings" panose="05000000000000000000" pitchFamily="2" charset="2"/>
+                        </a:rPr>
+                        <a:t>공조시스템 한별 책임</a:t>
+                      </a:r>
+                      <a:r>
+                        <a:rPr kumimoji="1" lang="en-US" altLang="ko-KR" sz="1000" b="0" i="0" u="none" strike="noStrike" kern="1200" cap="none" normalizeH="0" baseline="0" dirty="0" smtClean="0">
+                          <a:ln>
+                            <a:noFill/>
+                          </a:ln>
+                          <a:solidFill>
+                            <a:schemeClr val="tx1"/>
+                          </a:solidFill>
+                          <a:effectLst/>
+                          <a:latin typeface="+mn-lt"/>
+                          <a:ea typeface="+mn-ea"/>
+                          <a:cs typeface="+mn-cs"/>
+                          <a:sym typeface="Wingdings" panose="05000000000000000000" pitchFamily="2" charset="2"/>
+                        </a:rPr>
                         <a:t>)</a:t>
                       </a:r>
-                      <a:endParaRPr kumimoji="1" lang="en-US" altLang="ko-KR" sz="1000" b="0" i="0" u="none" strike="noStrike" kern="1200" cap="none" normalizeH="0" baseline="0" smtClean="0">
+                      <a:endParaRPr kumimoji="1" lang="en-US" altLang="ko-KR" sz="1000" b="0" i="0" u="none" strike="noStrike" kern="1200" cap="none" normalizeH="0" baseline="0" dirty="0" smtClean="0">
                         <a:ln>
                           <a:noFill/>
                         </a:ln>
@@ -6905,7 +7059,7 @@
                         <a:defRPr/>
                       </a:pPr>
                       <a:r>
-                        <a:rPr lang="en-US" altLang="ko-KR" sz="1000" b="0" kern="1200" smtClean="0">
+                        <a:rPr lang="en-US" altLang="ko-KR" sz="1000" b="0" kern="1200" dirty="0" smtClean="0">
                           <a:solidFill>
                             <a:schemeClr val="tx1"/>
                           </a:solidFill>
@@ -6916,7 +7070,7 @@
                         <a:t>25/9/10</a:t>
                       </a:r>
                       <a:r>
-                        <a:rPr lang="en-US" altLang="ko-KR" sz="1000" b="0" kern="1200" baseline="0" smtClean="0">
+                        <a:rPr lang="en-US" altLang="ko-KR" sz="1000" b="0" kern="1200" baseline="0" dirty="0" smtClean="0">
                           <a:solidFill>
                             <a:schemeClr val="tx1"/>
                           </a:solidFill>
@@ -6924,18 +7078,7 @@
                           <a:ea typeface="맑은 고딕"/>
                           <a:cs typeface="+mn-cs"/>
                         </a:rPr>
-                        <a:t> </a:t>
-                      </a:r>
-                      <a:r>
-                        <a:rPr lang="en-US" altLang="ko-KR" sz="1000" b="0" kern="1200" baseline="0" smtClean="0">
-                          <a:solidFill>
-                            <a:schemeClr val="tx1"/>
-                          </a:solidFill>
-                          <a:latin typeface="맑은 고딕"/>
-                          <a:ea typeface="맑은 고딕"/>
-                          <a:cs typeface="+mn-cs"/>
-                        </a:rPr>
-                        <a:t>~</a:t>
+                        <a:t> ~</a:t>
                       </a:r>
                       <a:endParaRPr lang="ko-KR" altLang="en-US" sz="1000" b="0" kern="1200" dirty="0">
                         <a:solidFill>
@@ -7248,7 +7391,7 @@
                         <a:defRPr/>
                       </a:pPr>
                       <a:r>
-                        <a:rPr lang="en-US" altLang="ko-KR" sz="1000" b="0" kern="1200" smtClean="0">
+                        <a:rPr lang="en-US" altLang="ko-KR" sz="1000" b="0" kern="1200" dirty="0" err="1" smtClean="0">
                           <a:solidFill>
                             <a:schemeClr val="tx1"/>
                           </a:solidFill>
@@ -7259,7 +7402,7 @@
                         <a:t>SVm</a:t>
                       </a:r>
                       <a:r>
-                        <a:rPr lang="en-US" altLang="ko-KR" sz="1000" b="0" kern="1200" baseline="0" smtClean="0">
+                        <a:rPr lang="en-US" altLang="ko-KR" sz="1000" b="0" kern="1200" baseline="0" dirty="0" smtClean="0">
                           <a:solidFill>
                             <a:schemeClr val="tx1"/>
                           </a:solidFill>
@@ -7270,7 +7413,7 @@
                         <a:t> </a:t>
                       </a:r>
                       <a:r>
-                        <a:rPr lang="ko-KR" altLang="en-US" sz="1000" b="0" kern="1200" smtClean="0">
+                        <a:rPr lang="ko-KR" altLang="en-US" sz="1000" b="0" kern="1200" dirty="0" smtClean="0">
                           <a:solidFill>
                             <a:schemeClr val="tx1"/>
                           </a:solidFill>
@@ -7281,7 +7424,7 @@
                         <a:t>좌우 온도 편차 및 최대 난방 평가 </a:t>
                       </a:r>
                       <a:r>
-                        <a:rPr lang="en-US" altLang="ko-KR" sz="1000" b="0" kern="1200" baseline="0" smtClean="0">
+                        <a:rPr lang="en-US" altLang="ko-KR" sz="1000" b="0" kern="1200" baseline="0" dirty="0" smtClean="0">
                           <a:solidFill>
                             <a:schemeClr val="tx1"/>
                           </a:solidFill>
@@ -7292,7 +7435,7 @@
                         <a:t>SPEC </a:t>
                       </a:r>
                       <a:r>
-                        <a:rPr lang="ko-KR" altLang="en-US" sz="1000" b="0" kern="1200" baseline="0" smtClean="0">
+                        <a:rPr lang="ko-KR" altLang="en-US" sz="1000" b="0" kern="1200" baseline="0" dirty="0" smtClean="0">
                           <a:solidFill>
                             <a:schemeClr val="tx1"/>
                           </a:solidFill>
@@ -7302,7 +7445,7 @@
                         </a:rPr>
                         <a:t>미달</a:t>
                       </a:r>
-                      <a:endParaRPr lang="ko-KR" altLang="en-US" sz="1000" b="0" kern="1200" smtClean="0">
+                      <a:endParaRPr lang="ko-KR" altLang="en-US" sz="1000" b="0" kern="1200" dirty="0" smtClean="0">
                         <a:solidFill>
                           <a:schemeClr val="tx1"/>
                         </a:solidFill>
@@ -7383,7 +7526,7 @@
                         <a:defRPr/>
                       </a:pPr>
                       <a:r>
-                        <a:rPr kumimoji="1" lang="en-US" altLang="ko-KR" sz="1000" b="0" i="0" u="none" strike="noStrike" kern="1200" cap="none" normalizeH="0" baseline="0" smtClean="0">
+                        <a:rPr kumimoji="1" lang="en-US" altLang="ko-KR" sz="1000" b="0" i="0" u="none" strike="noStrike" kern="1200" cap="none" normalizeH="0" baseline="0" dirty="0" smtClean="0">
                           <a:ln>
                             <a:noFill/>
                           </a:ln>
@@ -7398,7 +7541,7 @@
                         <a:t>1. </a:t>
                       </a:r>
                       <a:r>
-                        <a:rPr kumimoji="1" lang="ko-KR" altLang="en-US" sz="1000" b="0" i="0" u="none" strike="noStrike" kern="1200" cap="none" normalizeH="0" baseline="0" smtClean="0">
+                        <a:rPr kumimoji="1" lang="ko-KR" altLang="en-US" sz="1000" b="0" i="0" u="none" strike="noStrike" kern="1200" cap="none" normalizeH="0" baseline="0" dirty="0" smtClean="0">
                           <a:ln>
                             <a:noFill/>
                           </a:ln>
@@ -7412,7 +7555,7 @@
                         </a:rPr>
                         <a:t>최대 난방 및 좌우 편차 대응</a:t>
                       </a:r>
-                      <a:endParaRPr kumimoji="1" lang="en-US" altLang="ko-KR" sz="1000" b="0" i="0" u="none" strike="noStrike" kern="1200" cap="none" normalizeH="0" baseline="0" smtClean="0">
+                      <a:endParaRPr kumimoji="1" lang="en-US" altLang="ko-KR" sz="1000" b="0" i="0" u="none" strike="noStrike" kern="1200" cap="none" normalizeH="0" baseline="0" dirty="0" smtClean="0">
                         <a:ln>
                           <a:noFill/>
                         </a:ln>
@@ -7446,7 +7589,7 @@
                         <a:defRPr/>
                       </a:pPr>
                       <a:r>
-                        <a:rPr kumimoji="1" lang="en-US" altLang="ko-KR" sz="1000" b="0" i="0" u="none" strike="noStrike" kern="1200" cap="none" normalizeH="0" baseline="0" smtClean="0">
+                        <a:rPr kumimoji="1" lang="en-US" altLang="ko-KR" sz="1000" b="0" i="0" u="none" strike="noStrike" kern="1200" cap="none" normalizeH="0" baseline="0" dirty="0" smtClean="0">
                           <a:ln>
                             <a:noFill/>
                           </a:ln>
@@ -7458,10 +7601,10 @@
                           <a:ea typeface="+mn-ea"/>
                           <a:cs typeface="+mn-cs"/>
                         </a:rPr>
-                        <a:t>   - SVm </a:t>
-                      </a:r>
-                      <a:r>
-                        <a:rPr kumimoji="1" lang="ko-KR" altLang="en-US" sz="1000" b="0" i="0" u="none" strike="noStrike" kern="1200" cap="none" normalizeH="0" baseline="0" smtClean="0">
+                        <a:t>   - </a:t>
+                      </a:r>
+                      <a:r>
+                        <a:rPr kumimoji="1" lang="en-US" altLang="ko-KR" sz="1000" b="0" i="0" u="none" strike="noStrike" kern="1200" cap="none" normalizeH="0" baseline="0" dirty="0" err="1" smtClean="0">
                           <a:ln>
                             <a:noFill/>
                           </a:ln>
@@ -7473,10 +7616,10 @@
                           <a:ea typeface="+mn-ea"/>
                           <a:cs typeface="+mn-cs"/>
                         </a:rPr>
-                        <a:t>최대 난방 평가 </a:t>
-                      </a:r>
-                      <a:r>
-                        <a:rPr kumimoji="1" lang="en-US" altLang="ko-KR" sz="1000" b="0" i="0" u="none" strike="noStrike" kern="1200" cap="none" normalizeH="0" baseline="0" smtClean="0">
+                        <a:t>SVm</a:t>
+                      </a:r>
+                      <a:r>
+                        <a:rPr kumimoji="1" lang="en-US" altLang="ko-KR" sz="1000" b="0" i="0" u="none" strike="noStrike" kern="1200" cap="none" normalizeH="0" baseline="0" dirty="0" smtClean="0">
                           <a:ln>
                             <a:noFill/>
                           </a:ln>
@@ -7488,10 +7631,10 @@
                           <a:ea typeface="+mn-ea"/>
                           <a:cs typeface="+mn-cs"/>
                         </a:rPr>
-                        <a:t>PASS (S/W </a:t>
-                      </a:r>
-                      <a:r>
-                        <a:rPr kumimoji="1" lang="ko-KR" altLang="en-US" sz="1000" b="0" i="0" u="none" strike="noStrike" kern="1200" cap="none" normalizeH="0" baseline="0" smtClean="0">
+                        <a:t> </a:t>
+                      </a:r>
+                      <a:r>
+                        <a:rPr kumimoji="1" lang="ko-KR" altLang="en-US" sz="1000" b="0" i="0" u="none" strike="noStrike" kern="1200" cap="none" normalizeH="0" baseline="0" dirty="0" smtClean="0">
                           <a:ln>
                             <a:noFill/>
                           </a:ln>
@@ -7503,10 +7646,10 @@
                           <a:ea typeface="+mn-ea"/>
                           <a:cs typeface="+mn-cs"/>
                         </a:rPr>
-                        <a:t>전력 </a:t>
-                      </a:r>
-                      <a:r>
-                        <a:rPr kumimoji="1" lang="en-US" altLang="ko-KR" sz="1000" b="0" i="0" u="none" strike="noStrike" kern="1200" cap="none" normalizeH="0" baseline="0" smtClean="0">
+                        <a:t>최대 난방 평가 </a:t>
+                      </a:r>
+                      <a:r>
+                        <a:rPr kumimoji="1" lang="en-US" altLang="ko-KR" sz="1000" b="0" i="0" u="none" strike="noStrike" kern="1200" cap="none" normalizeH="0" baseline="0" dirty="0" smtClean="0">
                           <a:ln>
                             <a:noFill/>
                           </a:ln>
@@ -7518,10 +7661,10 @@
                           <a:ea typeface="+mn-ea"/>
                           <a:cs typeface="+mn-cs"/>
                         </a:rPr>
-                        <a:t>LIMIT </a:t>
-                      </a:r>
-                      <a:r>
-                        <a:rPr kumimoji="1" lang="ko-KR" altLang="en-US" sz="1000" b="0" i="0" u="none" strike="noStrike" kern="1200" cap="none" normalizeH="0" baseline="0" smtClean="0">
+                        <a:t>PASS (S/W </a:t>
+                      </a:r>
+                      <a:r>
+                        <a:rPr kumimoji="1" lang="ko-KR" altLang="en-US" sz="1000" b="0" i="0" u="none" strike="noStrike" kern="1200" cap="none" normalizeH="0" baseline="0" dirty="0" smtClean="0">
                           <a:ln>
                             <a:noFill/>
                           </a:ln>
@@ -7533,10 +7676,40 @@
                           <a:ea typeface="+mn-ea"/>
                           <a:cs typeface="+mn-cs"/>
                         </a:rPr>
+                        <a:t>전력 </a:t>
+                      </a:r>
+                      <a:r>
+                        <a:rPr kumimoji="1" lang="en-US" altLang="ko-KR" sz="1000" b="0" i="0" u="none" strike="noStrike" kern="1200" cap="none" normalizeH="0" baseline="0" dirty="0" smtClean="0">
+                          <a:ln>
+                            <a:noFill/>
+                          </a:ln>
+                          <a:solidFill>
+                            <a:schemeClr val="tx1"/>
+                          </a:solidFill>
+                          <a:effectLst/>
+                          <a:latin typeface="+mn-lt"/>
+                          <a:ea typeface="+mn-ea"/>
+                          <a:cs typeface="+mn-cs"/>
+                        </a:rPr>
+                        <a:t>LIMIT </a:t>
+                      </a:r>
+                      <a:r>
+                        <a:rPr kumimoji="1" lang="ko-KR" altLang="en-US" sz="1000" b="0" i="0" u="none" strike="noStrike" kern="1200" cap="none" normalizeH="0" baseline="0" dirty="0" smtClean="0">
+                          <a:ln>
+                            <a:noFill/>
+                          </a:ln>
+                          <a:solidFill>
+                            <a:schemeClr val="tx1"/>
+                          </a:solidFill>
+                          <a:effectLst/>
+                          <a:latin typeface="+mn-lt"/>
+                          <a:ea typeface="+mn-ea"/>
+                          <a:cs typeface="+mn-cs"/>
+                        </a:rPr>
                         <a:t>해제</a:t>
                       </a:r>
                       <a:r>
-                        <a:rPr kumimoji="1" lang="en-US" altLang="ko-KR" sz="1000" b="0" i="0" u="none" strike="noStrike" kern="1200" cap="none" normalizeH="0" baseline="0" smtClean="0">
+                        <a:rPr kumimoji="1" lang="en-US" altLang="ko-KR" sz="1000" b="0" i="0" u="none" strike="noStrike" kern="1200" cap="none" normalizeH="0" baseline="0" dirty="0" smtClean="0">
                           <a:ln>
                             <a:noFill/>
                           </a:ln>
@@ -7572,7 +7745,7 @@
                         <a:defRPr/>
                       </a:pPr>
                       <a:r>
-                        <a:rPr kumimoji="1" lang="en-US" altLang="ko-KR" sz="1000" b="0" i="0" u="none" strike="noStrike" kern="1200" cap="none" normalizeH="0" baseline="0" smtClean="0">
+                        <a:rPr kumimoji="1" lang="en-US" altLang="ko-KR" sz="1000" b="0" i="0" u="none" strike="noStrike" kern="1200" cap="none" normalizeH="0" baseline="0" dirty="0" smtClean="0">
                           <a:ln>
                             <a:noFill/>
                           </a:ln>
@@ -7587,7 +7760,7 @@
                         <a:t>     </a:t>
                       </a:r>
                       <a:r>
-                        <a:rPr kumimoji="1" lang="ko-KR" altLang="en-US" sz="1000" b="0" i="0" u="none" strike="noStrike" kern="1200" cap="none" normalizeH="0" baseline="0" smtClean="0">
+                        <a:rPr kumimoji="1" lang="ko-KR" altLang="en-US" sz="1000" b="0" i="0" u="none" strike="noStrike" kern="1200" cap="none" normalizeH="0" baseline="0" dirty="0" err="1" smtClean="0">
                           <a:ln>
                             <a:noFill/>
                           </a:ln>
@@ -7599,10 +7772,10 @@
                           <a:ea typeface="+mn-ea"/>
                           <a:cs typeface="+mn-cs"/>
                         </a:rPr>
-                        <a:t>평가시료 </a:t>
-                      </a:r>
-                      <a:r>
-                        <a:rPr kumimoji="1" lang="en-US" altLang="ko-KR" sz="1000" b="0" i="0" u="none" strike="noStrike" kern="1200" cap="none" normalizeH="0" baseline="0" smtClean="0">
+                        <a:t>평가시료</a:t>
+                      </a:r>
+                      <a:r>
+                        <a:rPr kumimoji="1" lang="ko-KR" altLang="en-US" sz="1000" b="0" i="0" u="none" strike="noStrike" kern="1200" cap="none" normalizeH="0" baseline="0" dirty="0" smtClean="0">
                           <a:ln>
                             <a:noFill/>
                           </a:ln>
@@ -7614,10 +7787,10 @@
                           <a:ea typeface="+mn-ea"/>
                           <a:cs typeface="+mn-cs"/>
                         </a:rPr>
-                        <a:t>: </a:t>
-                      </a:r>
-                      <a:r>
-                        <a:rPr kumimoji="1" lang="ko-KR" altLang="en-US" sz="1000" b="0" i="0" u="none" strike="noStrike" kern="1200" cap="none" normalizeH="0" baseline="0" smtClean="0">
+                        <a:t> </a:t>
+                      </a:r>
+                      <a:r>
+                        <a:rPr kumimoji="1" lang="en-US" altLang="ko-KR" sz="1000" b="0" i="0" u="none" strike="noStrike" kern="1200" cap="none" normalizeH="0" baseline="0" dirty="0" smtClean="0">
                           <a:ln>
                             <a:noFill/>
                           </a:ln>
@@ -7629,10 +7802,10 @@
                           <a:ea typeface="+mn-ea"/>
                           <a:cs typeface="+mn-cs"/>
                         </a:rPr>
-                        <a:t>핀 </a:t>
-                      </a:r>
-                      <a:r>
-                        <a:rPr kumimoji="1" lang="en-US" altLang="ko-KR" sz="1000" b="0" i="0" u="none" strike="noStrike" kern="1200" cap="none" normalizeH="0" baseline="0" smtClean="0">
+                        <a:t>: </a:t>
+                      </a:r>
+                      <a:r>
+                        <a:rPr kumimoji="1" lang="ko-KR" altLang="en-US" sz="1000" b="0" i="0" u="none" strike="noStrike" kern="1200" cap="none" normalizeH="0" baseline="0" dirty="0" smtClean="0">
                           <a:ln>
                             <a:noFill/>
                           </a:ln>
@@ -7644,10 +7817,10 @@
                           <a:ea typeface="+mn-ea"/>
                           <a:cs typeface="+mn-cs"/>
                         </a:rPr>
-                        <a:t>24mm, TC165</a:t>
-                      </a:r>
-                      <a:r>
-                        <a:rPr kumimoji="1" lang="ko-KR" altLang="en-US" sz="1000" b="0" i="0" u="none" strike="noStrike" kern="1200" cap="none" normalizeH="0" baseline="0" smtClean="0">
+                        <a:t>핀 </a:t>
+                      </a:r>
+                      <a:r>
+                        <a:rPr kumimoji="1" lang="en-US" altLang="ko-KR" sz="1000" b="0" i="0" u="none" strike="noStrike" kern="1200" cap="none" normalizeH="0" baseline="0" dirty="0" smtClean="0">
                           <a:ln>
                             <a:noFill/>
                           </a:ln>
@@ -7659,9 +7832,24 @@
                           <a:ea typeface="+mn-ea"/>
                           <a:cs typeface="+mn-cs"/>
                         </a:rPr>
+                        <a:t>24mm, TC165</a:t>
+                      </a:r>
+                      <a:r>
+                        <a:rPr kumimoji="1" lang="ko-KR" altLang="en-US" sz="1000" b="0" i="0" u="none" strike="noStrike" kern="1200" cap="none" normalizeH="0" baseline="0" dirty="0" smtClean="0">
+                          <a:ln>
+                            <a:noFill/>
+                          </a:ln>
+                          <a:solidFill>
+                            <a:schemeClr val="tx1"/>
+                          </a:solidFill>
+                          <a:effectLst/>
+                          <a:latin typeface="+mn-lt"/>
+                          <a:ea typeface="+mn-ea"/>
+                          <a:cs typeface="+mn-cs"/>
+                        </a:rPr>
                         <a:t>℃</a:t>
                       </a:r>
-                      <a:endParaRPr kumimoji="1" lang="en-US" altLang="ko-KR" sz="1000" b="0" i="0" u="none" strike="noStrike" kern="1200" cap="none" normalizeH="0" baseline="0" smtClean="0">
+                      <a:endParaRPr kumimoji="1" lang="en-US" altLang="ko-KR" sz="1000" b="0" i="0" u="none" strike="noStrike" kern="1200" cap="none" normalizeH="0" baseline="0" dirty="0" smtClean="0">
                         <a:ln>
                           <a:noFill/>
                         </a:ln>
@@ -7694,7 +7882,7 @@
                         <a:tabLst/>
                         <a:defRPr/>
                       </a:pPr>
-                      <a:endParaRPr kumimoji="1" lang="en-US" altLang="ko-KR" sz="1000" b="0" i="0" u="none" strike="noStrike" kern="1200" cap="none" normalizeH="0" baseline="0" smtClean="0">
+                      <a:endParaRPr kumimoji="1" lang="en-US" altLang="ko-KR" sz="1000" b="0" i="0" u="none" strike="noStrike" kern="1200" cap="none" normalizeH="0" baseline="0" dirty="0" smtClean="0">
                         <a:ln>
                           <a:noFill/>
                         </a:ln>
@@ -7728,7 +7916,7 @@
                         <a:defRPr/>
                       </a:pPr>
                       <a:r>
-                        <a:rPr kumimoji="1" lang="en-US" altLang="ko-KR" sz="1000" b="0" i="0" u="none" strike="noStrike" kern="1200" cap="none" normalizeH="0" baseline="0" smtClean="0">
+                        <a:rPr kumimoji="1" lang="en-US" altLang="ko-KR" sz="1000" b="0" i="0" u="none" strike="noStrike" kern="1200" cap="none" normalizeH="0" baseline="0" dirty="0" smtClean="0">
                           <a:ln>
                             <a:noFill/>
                           </a:ln>
@@ -7743,7 +7931,7 @@
                         <a:t>   - S/W </a:t>
                       </a:r>
                       <a:r>
-                        <a:rPr kumimoji="1" lang="ko-KR" altLang="en-US" sz="1000" b="0" i="0" u="none" strike="noStrike" kern="1200" cap="none" normalizeH="0" baseline="0" smtClean="0">
+                        <a:rPr kumimoji="1" lang="ko-KR" altLang="en-US" sz="1000" b="0" i="0" u="none" strike="noStrike" kern="1200" cap="none" normalizeH="0" baseline="0" dirty="0" smtClean="0">
                           <a:ln>
                             <a:noFill/>
                           </a:ln>
@@ -7758,7 +7946,7 @@
                         <a:t>전력 </a:t>
                       </a:r>
                       <a:r>
-                        <a:rPr kumimoji="1" lang="en-US" altLang="ko-KR" sz="1000" b="0" i="0" u="none" strike="noStrike" kern="1200" cap="none" normalizeH="0" baseline="0" smtClean="0">
+                        <a:rPr kumimoji="1" lang="en-US" altLang="ko-KR" sz="1000" b="0" i="0" u="none" strike="noStrike" kern="1200" cap="none" normalizeH="0" baseline="0" dirty="0" smtClean="0">
                           <a:ln>
                             <a:noFill/>
                           </a:ln>
@@ -7773,7 +7961,7 @@
                         <a:t>LIMIT </a:t>
                       </a:r>
                       <a:r>
-                        <a:rPr kumimoji="1" lang="ko-KR" altLang="en-US" sz="1000" b="0" i="0" u="none" strike="noStrike" kern="1200" cap="none" normalizeH="0" baseline="0" smtClean="0">
+                        <a:rPr kumimoji="1" lang="ko-KR" altLang="en-US" sz="1000" b="0" i="0" u="none" strike="noStrike" kern="1200" cap="none" normalizeH="0" baseline="0" dirty="0" smtClean="0">
                           <a:ln>
                             <a:noFill/>
                           </a:ln>
@@ -7788,7 +7976,7 @@
                         <a:t>및 선형 구간 재정립 하기 위한 문의 </a:t>
                       </a:r>
                       <a:r>
-                        <a:rPr kumimoji="1" lang="en-US" altLang="ko-KR" sz="1000" b="0" i="0" u="none" strike="noStrike" kern="1200" cap="none" normalizeH="0" baseline="0" smtClean="0">
+                        <a:rPr kumimoji="1" lang="en-US" altLang="ko-KR" sz="1000" b="0" i="0" u="none" strike="noStrike" kern="1200" cap="none" normalizeH="0" baseline="0" dirty="0" smtClean="0">
                           <a:ln>
                             <a:noFill/>
                           </a:ln>
@@ -7803,7 +7991,7 @@
                         <a:t>(</a:t>
                       </a:r>
                       <a:r>
-                        <a:rPr kumimoji="1" lang="ko-KR" altLang="en-US" sz="1000" b="0" i="0" u="none" strike="noStrike" kern="1200" cap="none" normalizeH="0" baseline="0" smtClean="0">
+                        <a:rPr kumimoji="1" lang="ko-KR" altLang="en-US" sz="1000" b="0" i="0" u="none" strike="noStrike" kern="1200" cap="none" normalizeH="0" baseline="0" dirty="0" err="1" smtClean="0">
                           <a:ln>
                             <a:noFill/>
                           </a:ln>
@@ -7818,7 +8006,7 @@
                         <a:t>공조설계</a:t>
                       </a:r>
                       <a:r>
-                        <a:rPr kumimoji="1" lang="en-US" altLang="ko-KR" sz="1000" b="0" i="0" u="none" strike="noStrike" kern="1200" cap="none" normalizeH="0" baseline="0" smtClean="0">
+                        <a:rPr kumimoji="1" lang="en-US" altLang="ko-KR" sz="1000" b="0" i="0" u="none" strike="noStrike" kern="1200" cap="none" normalizeH="0" baseline="0" dirty="0" smtClean="0">
                           <a:ln>
                             <a:noFill/>
                           </a:ln>
@@ -7854,7 +8042,7 @@
                         <a:defRPr/>
                       </a:pPr>
                       <a:r>
-                        <a:rPr kumimoji="1" lang="en-US" altLang="ko-KR" sz="1000" b="0" i="0" u="none" strike="noStrike" kern="1200" cap="none" normalizeH="0" baseline="0" smtClean="0">
+                        <a:rPr kumimoji="1" lang="en-US" altLang="ko-KR" sz="1000" b="0" i="0" u="none" strike="noStrike" kern="1200" cap="none" normalizeH="0" baseline="0" dirty="0" smtClean="0">
                           <a:ln>
                             <a:noFill/>
                           </a:ln>
@@ -7869,7 +8057,7 @@
                         <a:t>     : </a:t>
                       </a:r>
                       <a:r>
-                        <a:rPr kumimoji="1" lang="ko-KR" altLang="en-US" sz="1000" b="0" i="0" u="none" strike="noStrike" kern="1200" cap="none" normalizeH="0" baseline="0" smtClean="0">
+                        <a:rPr kumimoji="1" lang="ko-KR" altLang="en-US" sz="1000" b="0" i="0" u="none" strike="noStrike" kern="1200" cap="none" normalizeH="0" baseline="0" dirty="0" smtClean="0">
                           <a:ln>
                             <a:noFill/>
                           </a:ln>
@@ -7884,7 +8072,7 @@
                         <a:t>전력 </a:t>
                       </a:r>
                       <a:r>
-                        <a:rPr kumimoji="1" lang="en-US" altLang="ko-KR" sz="1000" b="0" i="0" u="none" strike="noStrike" kern="1200" cap="none" normalizeH="0" baseline="0" smtClean="0">
+                        <a:rPr kumimoji="1" lang="en-US" altLang="ko-KR" sz="1000" b="0" i="0" u="none" strike="noStrike" kern="1200" cap="none" normalizeH="0" baseline="0" dirty="0" smtClean="0">
                           <a:ln>
                             <a:noFill/>
                           </a:ln>
@@ -7899,7 +8087,7 @@
                         <a:t>LIMIT </a:t>
                       </a:r>
                       <a:r>
-                        <a:rPr kumimoji="1" lang="ko-KR" altLang="en-US" sz="1000" b="0" i="0" u="none" strike="noStrike" kern="1200" cap="none" normalizeH="0" baseline="0" smtClean="0">
+                        <a:rPr kumimoji="1" lang="ko-KR" altLang="en-US" sz="1000" b="0" i="0" u="none" strike="noStrike" kern="1200" cap="none" normalizeH="0" baseline="0" dirty="0" smtClean="0">
                           <a:ln>
                             <a:noFill/>
                           </a:ln>
@@ -7914,7 +8102,7 @@
                         <a:t>및 선형 구간 정립 시 실차조건에서 좌</a:t>
                       </a:r>
                       <a:r>
-                        <a:rPr kumimoji="1" lang="en-US" altLang="ko-KR" sz="1000" b="0" i="0" u="none" strike="noStrike" kern="1200" cap="none" normalizeH="0" baseline="0" smtClean="0">
+                        <a:rPr kumimoji="1" lang="en-US" altLang="ko-KR" sz="1000" b="0" i="0" u="none" strike="noStrike" kern="1200" cap="none" normalizeH="0" baseline="0" dirty="0" smtClean="0">
                           <a:ln>
                             <a:noFill/>
                           </a:ln>
@@ -7929,7 +8117,7 @@
                         <a:t>/</a:t>
                       </a:r>
                       <a:r>
-                        <a:rPr kumimoji="1" lang="ko-KR" altLang="en-US" sz="1000" b="0" i="0" u="none" strike="noStrike" kern="1200" cap="none" normalizeH="0" baseline="0" smtClean="0">
+                        <a:rPr kumimoji="1" lang="ko-KR" altLang="en-US" sz="1000" b="0" i="0" u="none" strike="noStrike" kern="1200" cap="none" normalizeH="0" baseline="0" dirty="0" smtClean="0">
                           <a:ln>
                             <a:noFill/>
                           </a:ln>
@@ -7943,7 +8131,7 @@
                         </a:rPr>
                         <a:t>우 편차</a:t>
                       </a:r>
-                      <a:endParaRPr kumimoji="1" lang="en-US" altLang="ko-KR" sz="1000" b="0" i="0" u="none" strike="noStrike" kern="1200" cap="none" normalizeH="0" baseline="0" smtClean="0">
+                      <a:endParaRPr kumimoji="1" lang="en-US" altLang="ko-KR" sz="1000" b="0" i="0" u="none" strike="noStrike" kern="1200" cap="none" normalizeH="0" baseline="0" dirty="0" smtClean="0">
                         <a:ln>
                           <a:noFill/>
                         </a:ln>
@@ -7977,7 +8165,7 @@
                         <a:defRPr/>
                       </a:pPr>
                       <a:r>
-                        <a:rPr kumimoji="1" lang="en-US" altLang="ko-KR" sz="1000" b="0" i="0" u="none" strike="noStrike" kern="1200" cap="none" normalizeH="0" baseline="0" smtClean="0">
+                        <a:rPr kumimoji="1" lang="en-US" altLang="ko-KR" sz="1000" b="0" i="0" u="none" strike="noStrike" kern="1200" cap="none" normalizeH="0" baseline="0" dirty="0" smtClean="0">
                           <a:ln>
                             <a:noFill/>
                           </a:ln>
@@ -7992,7 +8180,7 @@
                         <a:t>       </a:t>
                       </a:r>
                       <a:r>
-                        <a:rPr kumimoji="1" lang="ko-KR" altLang="en-US" sz="1000" b="0" i="0" u="none" strike="noStrike" kern="1200" cap="none" normalizeH="0" baseline="0" smtClean="0">
+                        <a:rPr kumimoji="1" lang="ko-KR" altLang="en-US" sz="1000" b="0" i="0" u="none" strike="noStrike" kern="1200" cap="none" normalizeH="0" baseline="0" dirty="0" smtClean="0">
                           <a:ln>
                             <a:noFill/>
                           </a:ln>
@@ -8007,7 +8195,7 @@
                         <a:t>튜닝 진행 필요 </a:t>
                       </a:r>
                       <a:r>
-                        <a:rPr kumimoji="1" lang="en-US" altLang="ko-KR" sz="1000" b="0" i="0" u="none" strike="noStrike" kern="1200" cap="none" normalizeH="0" baseline="0" smtClean="0">
+                        <a:rPr kumimoji="1" lang="en-US" altLang="ko-KR" sz="1000" b="0" i="0" u="none" strike="noStrike" kern="1200" cap="none" normalizeH="0" baseline="0" dirty="0" smtClean="0">
                           <a:ln>
                             <a:noFill/>
                           </a:ln>
@@ -8022,7 +8210,7 @@
                         <a:t>(</a:t>
                       </a:r>
                       <a:r>
-                        <a:rPr kumimoji="1" lang="ko-KR" altLang="en-US" sz="1000" b="0" i="0" u="none" strike="noStrike" kern="1200" cap="none" normalizeH="0" baseline="0" smtClean="0">
+                        <a:rPr kumimoji="1" lang="ko-KR" altLang="en-US" sz="1000" b="0" i="0" u="none" strike="noStrike" kern="1200" cap="none" normalizeH="0" baseline="0" dirty="0" err="1" smtClean="0">
                           <a:ln>
                             <a:noFill/>
                           </a:ln>
@@ -8034,10 +8222,10 @@
                           <a:ea typeface="+mn-ea"/>
                           <a:cs typeface="+mn-cs"/>
                         </a:rPr>
-                        <a:t>고객사에 챔버 일정 요청 중</a:t>
-                      </a:r>
-                      <a:r>
-                        <a:rPr kumimoji="1" lang="en-US" altLang="ko-KR" sz="1000" b="0" i="0" u="none" strike="noStrike" kern="1200" cap="none" normalizeH="0" baseline="0" smtClean="0">
+                        <a:t>고객사에</a:t>
+                      </a:r>
+                      <a:r>
+                        <a:rPr kumimoji="1" lang="ko-KR" altLang="en-US" sz="1000" b="0" i="0" u="none" strike="noStrike" kern="1200" cap="none" normalizeH="0" baseline="0" dirty="0" smtClean="0">
                           <a:ln>
                             <a:noFill/>
                           </a:ln>
@@ -8049,20 +8237,53 @@
                           <a:ea typeface="+mn-ea"/>
                           <a:cs typeface="+mn-cs"/>
                         </a:rPr>
+                        <a:t> </a:t>
+                      </a:r>
+                      <a:r>
+                        <a:rPr kumimoji="1" lang="ko-KR" altLang="en-US" sz="1000" b="0" i="0" u="none" strike="noStrike" kern="1200" cap="none" normalizeH="0" baseline="0" dirty="0" err="1" smtClean="0">
+                          <a:ln>
+                            <a:noFill/>
+                          </a:ln>
+                          <a:solidFill>
+                            <a:schemeClr val="tx1"/>
+                          </a:solidFill>
+                          <a:effectLst/>
+                          <a:latin typeface="+mn-lt"/>
+                          <a:ea typeface="+mn-ea"/>
+                          <a:cs typeface="+mn-cs"/>
+                        </a:rPr>
+                        <a:t>챔버</a:t>
+                      </a:r>
+                      <a:r>
+                        <a:rPr kumimoji="1" lang="ko-KR" altLang="en-US" sz="1000" b="0" i="0" u="none" strike="noStrike" kern="1200" cap="none" normalizeH="0" baseline="0" dirty="0" smtClean="0">
+                          <a:ln>
+                            <a:noFill/>
+                          </a:ln>
+                          <a:solidFill>
+                            <a:schemeClr val="tx1"/>
+                          </a:solidFill>
+                          <a:effectLst/>
+                          <a:latin typeface="+mn-lt"/>
+                          <a:ea typeface="+mn-ea"/>
+                          <a:cs typeface="+mn-cs"/>
+                        </a:rPr>
+                        <a:t> 일정 요청 중</a:t>
+                      </a:r>
+                      <a:r>
+                        <a:rPr kumimoji="1" lang="en-US" altLang="ko-KR" sz="1000" b="0" i="0" u="none" strike="noStrike" kern="1200" cap="none" normalizeH="0" baseline="0" dirty="0" smtClean="0">
+                          <a:ln>
+                            <a:noFill/>
+                          </a:ln>
+                          <a:solidFill>
+                            <a:schemeClr val="tx1"/>
+                          </a:solidFill>
+                          <a:effectLst/>
+                          <a:latin typeface="+mn-lt"/>
+                          <a:ea typeface="+mn-ea"/>
+                          <a:cs typeface="+mn-cs"/>
+                        </a:rPr>
                         <a:t>)</a:t>
                       </a:r>
-                      <a:endParaRPr kumimoji="1" lang="en-US" altLang="ko-KR" sz="1000" b="0" i="0" u="none" strike="noStrike" kern="1200" cap="none" normalizeH="0" baseline="0" smtClean="0">
-                        <a:ln>
-                          <a:noFill/>
-                        </a:ln>
-                        <a:solidFill>
-                          <a:schemeClr val="tx1"/>
-                        </a:solidFill>
-                        <a:effectLst/>
-                        <a:latin typeface="+mn-lt"/>
-                        <a:ea typeface="+mn-ea"/>
-                        <a:cs typeface="+mn-cs"/>
-                      </a:endParaRPr>
                     </a:p>
                   </a:txBody>
                   <a:tcPr marL="86400" marR="86400" marT="43277" marB="43277" anchor="ctr" horzOverflow="overflow">
@@ -8134,7 +8355,7 @@
                         <a:defRPr/>
                       </a:pPr>
                       <a:r>
-                        <a:rPr lang="en-US" altLang="ko-KR" sz="1000" b="0" kern="1200" smtClean="0">
+                        <a:rPr lang="en-US" altLang="ko-KR" sz="1000" b="0" kern="1200" dirty="0" smtClean="0">
                           <a:solidFill>
                             <a:schemeClr val="tx1"/>
                           </a:solidFill>
@@ -8145,7 +8366,7 @@
                         <a:t>25/4/15</a:t>
                       </a:r>
                       <a:r>
-                        <a:rPr lang="en-US" altLang="ko-KR" sz="1000" b="0" kern="1200" baseline="0" smtClean="0">
+                        <a:rPr lang="en-US" altLang="ko-KR" sz="1000" b="0" kern="1200" baseline="0" dirty="0" smtClean="0">
                           <a:solidFill>
                             <a:schemeClr val="tx1"/>
                           </a:solidFill>
@@ -8155,7 +8376,7 @@
                         </a:rPr>
                         <a:t> ~</a:t>
                       </a:r>
-                      <a:endParaRPr lang="ko-KR" altLang="en-US" sz="1000" b="0" kern="1200" smtClean="0">
+                      <a:endParaRPr lang="ko-KR" altLang="en-US" sz="1000" b="0" kern="1200" dirty="0" smtClean="0">
                         <a:solidFill>
                           <a:schemeClr val="tx1"/>
                         </a:solidFill>
@@ -8234,7 +8455,7 @@
                         <a:defRPr/>
                       </a:pPr>
                       <a:r>
-                        <a:rPr lang="en-US" altLang="ko-KR" sz="1000" b="0" kern="1200" smtClean="0">
+                        <a:rPr lang="en-US" altLang="ko-KR" sz="1000" b="0" kern="1200" dirty="0" err="1" smtClean="0">
                           <a:solidFill>
                             <a:schemeClr val="tx1"/>
                           </a:solidFill>
@@ -8245,7 +8466,7 @@
                         <a:t>SVm</a:t>
                       </a:r>
                       <a:r>
-                        <a:rPr lang="en-US" altLang="ko-KR" sz="1000" b="0" kern="1200" baseline="0" smtClean="0">
+                        <a:rPr lang="en-US" altLang="ko-KR" sz="1000" b="0" kern="1200" baseline="0" dirty="0" smtClean="0">
                           <a:solidFill>
                             <a:schemeClr val="tx1"/>
                           </a:solidFill>
@@ -8256,7 +8477,7 @@
                         <a:t> </a:t>
                       </a:r>
                       <a:r>
-                        <a:rPr lang="ko-KR" altLang="en-US" sz="1000" b="0" kern="1200" smtClean="0">
+                        <a:rPr lang="ko-KR" altLang="en-US" sz="1000" b="0" kern="1200" dirty="0" smtClean="0">
                           <a:solidFill>
                             <a:schemeClr val="tx1"/>
                           </a:solidFill>
@@ -8266,7 +8487,7 @@
                         </a:rPr>
                         <a:t>차종 시험 평가 중 접수</a:t>
                       </a:r>
-                      <a:endParaRPr lang="en-US" altLang="ko-KR" sz="1000" b="0" kern="1200" smtClean="0">
+                      <a:endParaRPr lang="en-US" altLang="ko-KR" sz="1000" b="0" kern="1200" dirty="0" smtClean="0">
                         <a:solidFill>
                           <a:schemeClr val="tx1"/>
                         </a:solidFill>
@@ -8505,7 +8726,7 @@
                         <a:defRPr/>
                       </a:pPr>
                       <a:r>
-                        <a:rPr lang="en-US" altLang="ko-KR" sz="1000" b="0" kern="1200" smtClean="0">
+                        <a:rPr lang="en-US" altLang="ko-KR" sz="1000" b="0" kern="1200" dirty="0" smtClean="0">
                           <a:solidFill>
                             <a:schemeClr val="tx1"/>
                           </a:solidFill>
@@ -8516,7 +8737,7 @@
                         <a:t>BJ1</a:t>
                       </a:r>
                       <a:r>
-                        <a:rPr lang="en-US" altLang="ko-KR" sz="1000" b="0" kern="1200" baseline="0" smtClean="0">
+                        <a:rPr lang="en-US" altLang="ko-KR" sz="1000" b="0" kern="1200" baseline="0" dirty="0" smtClean="0">
                           <a:solidFill>
                             <a:schemeClr val="tx1"/>
                           </a:solidFill>
@@ -8527,7 +8748,7 @@
                         <a:t> </a:t>
                       </a:r>
                       <a:r>
-                        <a:rPr lang="ko-KR" altLang="en-US" sz="1000" b="0" kern="1200" baseline="0" smtClean="0">
+                        <a:rPr lang="ko-KR" altLang="en-US" sz="1000" b="0" kern="1200" baseline="0" dirty="0" smtClean="0">
                           <a:solidFill>
                             <a:schemeClr val="tx1"/>
                           </a:solidFill>
@@ -8538,7 +8759,7 @@
                         <a:t>최대 난방 및 </a:t>
                       </a:r>
                       <a:r>
-                        <a:rPr lang="ko-KR" altLang="en-US" sz="1000" b="0" kern="1200" smtClean="0">
+                        <a:rPr lang="ko-KR" altLang="en-US" sz="1000" b="0" kern="1200" dirty="0" smtClean="0">
                           <a:solidFill>
                             <a:schemeClr val="tx1"/>
                           </a:solidFill>
@@ -8549,7 +8770,7 @@
                         <a:t>좌우 온도 편차 </a:t>
                       </a:r>
                       <a:r>
-                        <a:rPr lang="en-US" altLang="ko-KR" sz="1000" b="0" kern="1200" baseline="0" smtClean="0">
+                        <a:rPr lang="en-US" altLang="ko-KR" sz="1000" b="0" kern="1200" baseline="0" dirty="0" smtClean="0">
                           <a:solidFill>
                             <a:schemeClr val="tx1"/>
                           </a:solidFill>
@@ -8560,7 +8781,7 @@
                         <a:t>SPEC </a:t>
                       </a:r>
                       <a:r>
-                        <a:rPr lang="ko-KR" altLang="en-US" sz="1000" b="0" kern="1200" baseline="0" smtClean="0">
+                        <a:rPr lang="ko-KR" altLang="en-US" sz="1000" b="0" kern="1200" baseline="0" dirty="0" smtClean="0">
                           <a:solidFill>
                             <a:schemeClr val="tx1"/>
                           </a:solidFill>
@@ -8570,7 +8791,7 @@
                         </a:rPr>
                         <a:t>미달</a:t>
                       </a:r>
-                      <a:endParaRPr lang="ko-KR" altLang="en-US" sz="1000" b="0" kern="1200" smtClean="0">
+                      <a:endParaRPr lang="ko-KR" altLang="en-US" sz="1000" b="0" kern="1200" dirty="0" smtClean="0">
                         <a:solidFill>
                           <a:schemeClr val="tx1"/>
                         </a:solidFill>
@@ -8651,7 +8872,7 @@
                         <a:defRPr/>
                       </a:pPr>
                       <a:r>
-                        <a:rPr kumimoji="1" lang="en-US" altLang="ko-KR" sz="1000" b="0" i="0" u="none" strike="noStrike" kern="1200" cap="none" normalizeH="0" baseline="0" smtClean="0">
+                        <a:rPr kumimoji="1" lang="en-US" altLang="ko-KR" sz="1000" b="0" i="0" u="none" strike="noStrike" kern="1200" cap="none" normalizeH="0" baseline="0" dirty="0" smtClean="0">
                           <a:ln>
                             <a:noFill/>
                           </a:ln>
@@ -8666,7 +8887,7 @@
                         <a:t>1. </a:t>
                       </a:r>
                       <a:r>
-                        <a:rPr kumimoji="1" lang="ko-KR" altLang="en-US" sz="1000" b="0" i="0" u="none" strike="noStrike" kern="1200" cap="none" normalizeH="0" baseline="0" smtClean="0">
+                        <a:rPr kumimoji="1" lang="ko-KR" altLang="en-US" sz="1000" b="0" i="0" u="none" strike="noStrike" kern="1200" cap="none" normalizeH="0" baseline="0" dirty="0" smtClean="0">
                           <a:ln>
                             <a:noFill/>
                           </a:ln>
@@ -8680,7 +8901,7 @@
                         </a:rPr>
                         <a:t>최대 난방 및 좌우 편차 대응</a:t>
                       </a:r>
-                      <a:endParaRPr kumimoji="1" lang="en-US" altLang="ko-KR" sz="1000" b="0" i="0" u="none" strike="noStrike" kern="1200" cap="none" normalizeH="0" baseline="0" smtClean="0">
+                      <a:endParaRPr kumimoji="1" lang="en-US" altLang="ko-KR" sz="1000" b="0" i="0" u="none" strike="noStrike" kern="1200" cap="none" normalizeH="0" baseline="0" dirty="0" smtClean="0">
                         <a:ln>
                           <a:noFill/>
                         </a:ln>
@@ -8714,7 +8935,7 @@
                         <a:defRPr/>
                       </a:pPr>
                       <a:r>
-                        <a:rPr kumimoji="1" lang="en-US" altLang="ko-KR" sz="1000" b="0" i="0" u="none" strike="noStrike" kern="1200" cap="none" normalizeH="0" baseline="0" smtClean="0">
+                        <a:rPr kumimoji="1" lang="en-US" altLang="ko-KR" sz="1000" b="0" i="0" u="none" strike="noStrike" kern="1200" cap="none" normalizeH="0" baseline="0" dirty="0" smtClean="0">
                           <a:ln>
                             <a:noFill/>
                           </a:ln>
@@ -8729,7 +8950,7 @@
                         <a:t>   - BJ1 </a:t>
                       </a:r>
                       <a:r>
-                        <a:rPr kumimoji="1" lang="ko-KR" altLang="en-US" sz="1000" b="0" i="0" u="none" strike="noStrike" kern="1200" cap="none" normalizeH="0" baseline="0" smtClean="0">
+                        <a:rPr kumimoji="1" lang="ko-KR" altLang="en-US" sz="1000" b="0" i="0" u="none" strike="noStrike" kern="1200" cap="none" normalizeH="0" baseline="0" dirty="0" smtClean="0">
                           <a:ln>
                             <a:noFill/>
                           </a:ln>
@@ -8744,7 +8965,7 @@
                         <a:t>최대 난방 평가 진행 </a:t>
                       </a:r>
                       <a:r>
-                        <a:rPr kumimoji="1" lang="en-US" altLang="ko-KR" sz="1000" b="0" i="0" u="none" strike="noStrike" kern="1200" cap="none" normalizeH="0" baseline="0" smtClean="0">
+                        <a:rPr kumimoji="1" lang="en-US" altLang="ko-KR" sz="1000" b="0" i="0" u="none" strike="noStrike" kern="1200" cap="none" normalizeH="0" baseline="0" dirty="0" smtClean="0">
                           <a:ln>
                             <a:noFill/>
                           </a:ln>
@@ -8780,7 +9001,7 @@
                         <a:defRPr/>
                       </a:pPr>
                       <a:r>
-                        <a:rPr kumimoji="1" lang="en-US" altLang="ko-KR" sz="1000" b="0" i="0" u="none" strike="noStrike" kern="1200" cap="none" normalizeH="0" baseline="0" smtClean="0">
+                        <a:rPr kumimoji="1" lang="en-US" altLang="ko-KR" sz="1000" b="0" i="0" u="none" strike="noStrike" kern="1200" cap="none" normalizeH="0" baseline="0" dirty="0" smtClean="0">
                           <a:ln>
                             <a:noFill/>
                           </a:ln>
@@ -8795,7 +9016,7 @@
                         <a:t>     : </a:t>
                       </a:r>
                       <a:r>
-                        <a:rPr kumimoji="1" lang="ko-KR" altLang="en-US" sz="1000" b="0" i="0" u="none" strike="noStrike" kern="1200" cap="none" normalizeH="0" baseline="0" smtClean="0">
+                        <a:rPr kumimoji="1" lang="ko-KR" altLang="en-US" sz="1000" b="0" i="0" u="none" strike="noStrike" kern="1200" cap="none" normalizeH="0" baseline="0" dirty="0" smtClean="0">
                           <a:ln>
                             <a:noFill/>
                           </a:ln>
@@ -8810,7 +9031,7 @@
                         <a:t>최대 난방 평가 </a:t>
                       </a:r>
                       <a:r>
-                        <a:rPr kumimoji="1" lang="en-US" altLang="ko-KR" sz="1000" b="0" i="0" u="none" strike="noStrike" kern="1200" cap="none" normalizeH="0" baseline="0" smtClean="0">
+                        <a:rPr kumimoji="1" lang="en-US" altLang="ko-KR" sz="1000" b="0" i="0" u="none" strike="noStrike" kern="1200" cap="none" normalizeH="0" baseline="0" dirty="0" smtClean="0">
                           <a:ln>
                             <a:noFill/>
                           </a:ln>
@@ -8846,7 +9067,7 @@
                         <a:defRPr/>
                       </a:pPr>
                       <a:r>
-                        <a:rPr kumimoji="1" lang="en-US" altLang="ko-KR" sz="1000" b="0" i="0" u="none" strike="noStrike" kern="1200" cap="none" normalizeH="0" baseline="0" smtClean="0">
+                        <a:rPr kumimoji="1" lang="en-US" altLang="ko-KR" sz="1000" b="0" i="0" u="none" strike="noStrike" kern="1200" cap="none" normalizeH="0" baseline="0" dirty="0" smtClean="0">
                           <a:ln>
                             <a:noFill/>
                           </a:ln>
@@ -8861,7 +9082,7 @@
                         <a:t>     : </a:t>
                       </a:r>
                       <a:r>
-                        <a:rPr kumimoji="1" lang="ko-KR" altLang="en-US" sz="1000" b="0" i="0" u="none" strike="noStrike" kern="1200" cap="none" normalizeH="0" baseline="0" smtClean="0">
+                        <a:rPr kumimoji="1" lang="ko-KR" altLang="en-US" sz="1000" b="0" i="0" u="none" strike="noStrike" kern="1200" cap="none" normalizeH="0" baseline="0" dirty="0" smtClean="0">
                           <a:ln>
                             <a:noFill/>
                           </a:ln>
@@ -8876,7 +9097,7 @@
                         <a:t>좌우 온도 편차 </a:t>
                       </a:r>
                       <a:r>
-                        <a:rPr kumimoji="1" lang="en-US" altLang="ko-KR" sz="1000" b="0" i="0" u="none" strike="noStrike" kern="1200" cap="none" normalizeH="0" baseline="0" smtClean="0">
+                        <a:rPr kumimoji="1" lang="en-US" altLang="ko-KR" sz="1000" b="0" i="0" u="none" strike="noStrike" kern="1200" cap="none" normalizeH="0" baseline="0" dirty="0" smtClean="0">
                           <a:ln>
                             <a:noFill/>
                           </a:ln>
@@ -8912,7 +9133,7 @@
                         <a:defRPr/>
                       </a:pPr>
                       <a:r>
-                        <a:rPr kumimoji="1" lang="en-US" altLang="ko-KR" sz="1000" b="0" i="0" u="none" strike="noStrike" kern="1200" cap="none" normalizeH="0" baseline="0" smtClean="0">
+                        <a:rPr kumimoji="1" lang="en-US" altLang="ko-KR" sz="1000" b="0" i="0" u="none" strike="noStrike" kern="1200" cap="none" normalizeH="0" baseline="0" dirty="0" smtClean="0">
                           <a:ln>
                             <a:noFill/>
                           </a:ln>
@@ -8927,7 +9148,7 @@
                         <a:t>   - </a:t>
                       </a:r>
                       <a:r>
-                        <a:rPr kumimoji="1" lang="ko-KR" altLang="en-US" sz="1000" b="0" i="0" u="none" strike="noStrike" kern="1200" cap="none" normalizeH="0" baseline="0" smtClean="0">
+                        <a:rPr kumimoji="1" lang="ko-KR" altLang="en-US" sz="1000" b="0" i="0" u="none" strike="noStrike" kern="1200" cap="none" normalizeH="0" baseline="0" dirty="0" smtClean="0">
                           <a:ln>
                             <a:noFill/>
                           </a:ln>
@@ -8939,9 +9160,39 @@
                           <a:ea typeface="+mn-ea"/>
                           <a:cs typeface="+mn-cs"/>
                         </a:rPr>
-                        <a:t>좌우 온도 편차 원인 분석 위한 한온 벤치 평가 진행 </a:t>
-                      </a:r>
-                      <a:endParaRPr kumimoji="1" lang="en-US" altLang="ko-KR" sz="1000" b="0" i="0" u="none" strike="noStrike" kern="1200" cap="none" normalizeH="0" baseline="0" smtClean="0">
+                        <a:t>좌우 온도 편차 원인 분석 위한 </a:t>
+                      </a:r>
+                      <a:r>
+                        <a:rPr kumimoji="1" lang="ko-KR" altLang="en-US" sz="1000" b="0" i="0" u="none" strike="noStrike" kern="1200" cap="none" normalizeH="0" baseline="0" dirty="0" err="1" smtClean="0">
+                          <a:ln>
+                            <a:noFill/>
+                          </a:ln>
+                          <a:solidFill>
+                            <a:schemeClr val="tx1"/>
+                          </a:solidFill>
+                          <a:effectLst/>
+                          <a:latin typeface="+mn-lt"/>
+                          <a:ea typeface="+mn-ea"/>
+                          <a:cs typeface="+mn-cs"/>
+                        </a:rPr>
+                        <a:t>한온</a:t>
+                      </a:r>
+                      <a:r>
+                        <a:rPr kumimoji="1" lang="ko-KR" altLang="en-US" sz="1000" b="0" i="0" u="none" strike="noStrike" kern="1200" cap="none" normalizeH="0" baseline="0" dirty="0" smtClean="0">
+                          <a:ln>
+                            <a:noFill/>
+                          </a:ln>
+                          <a:solidFill>
+                            <a:schemeClr val="tx1"/>
+                          </a:solidFill>
+                          <a:effectLst/>
+                          <a:latin typeface="+mn-lt"/>
+                          <a:ea typeface="+mn-ea"/>
+                          <a:cs typeface="+mn-cs"/>
+                        </a:rPr>
+                        <a:t> 벤치 평가 진행 </a:t>
+                      </a:r>
+                      <a:endParaRPr kumimoji="1" lang="en-US" altLang="ko-KR" sz="1000" b="0" i="0" u="none" strike="noStrike" kern="1200" cap="none" normalizeH="0" baseline="0" dirty="0" smtClean="0">
                         <a:ln>
                           <a:noFill/>
                         </a:ln>
@@ -8975,7 +9226,7 @@
                         <a:defRPr/>
                       </a:pPr>
                       <a:r>
-                        <a:rPr kumimoji="1" lang="en-US" altLang="ko-KR" sz="1000" b="0" i="0" u="none" strike="noStrike" kern="1200" cap="none" normalizeH="0" baseline="0" smtClean="0">
+                        <a:rPr kumimoji="1" lang="en-US" altLang="ko-KR" sz="1000" b="0" i="0" u="none" strike="noStrike" kern="1200" cap="none" normalizeH="0" baseline="0" dirty="0" smtClean="0">
                           <a:ln>
                             <a:noFill/>
                           </a:ln>
@@ -8990,7 +9241,7 @@
                         <a:t>     : </a:t>
                       </a:r>
                       <a:r>
-                        <a:rPr kumimoji="1" lang="ko-KR" altLang="en-US" sz="1000" b="0" i="0" u="none" strike="noStrike" kern="1200" cap="none" normalizeH="0" baseline="0" smtClean="0">
+                        <a:rPr kumimoji="1" lang="ko-KR" altLang="en-US" sz="1000" b="0" i="0" u="none" strike="noStrike" kern="1200" cap="none" normalizeH="0" baseline="0" dirty="0" smtClean="0">
                           <a:ln>
                             <a:noFill/>
                           </a:ln>
@@ -9004,7 +9255,7 @@
                         </a:rPr>
                         <a:t>일정 협의 진행 중</a:t>
                       </a:r>
-                      <a:endParaRPr kumimoji="1" lang="en-US" altLang="ko-KR" sz="1000" b="0" i="0" u="none" strike="noStrike" kern="1200" cap="none" normalizeH="0" baseline="0" smtClean="0">
+                      <a:endParaRPr kumimoji="1" lang="en-US" altLang="ko-KR" sz="1000" b="0" i="0" u="none" strike="noStrike" kern="1200" cap="none" normalizeH="0" baseline="0" dirty="0" smtClean="0">
                         <a:ln>
                           <a:noFill/>
                         </a:ln>
@@ -9038,7 +9289,7 @@
                         <a:defRPr/>
                       </a:pPr>
                       <a:r>
-                        <a:rPr kumimoji="1" lang="en-US" altLang="ko-KR" sz="1000" b="0" i="0" u="none" strike="noStrike" kern="1200" cap="none" normalizeH="0" baseline="0" smtClean="0">
+                        <a:rPr kumimoji="1" lang="en-US" altLang="ko-KR" sz="1000" b="0" i="0" u="none" strike="noStrike" kern="1200" cap="none" normalizeH="0" baseline="0" dirty="0" smtClean="0">
                           <a:ln>
                             <a:noFill/>
                           </a:ln>
@@ -9053,7 +9304,7 @@
                         <a:t>   - </a:t>
                       </a:r>
                       <a:r>
-                        <a:rPr kumimoji="1" lang="ko-KR" altLang="en-US" sz="1000" b="0" i="0" u="none" strike="noStrike" kern="1200" cap="none" normalizeH="0" baseline="0" smtClean="0">
+                        <a:rPr kumimoji="1" lang="ko-KR" altLang="en-US" sz="1000" b="0" i="0" u="none" strike="noStrike" kern="1200" cap="none" normalizeH="0" baseline="0" dirty="0" smtClean="0">
                           <a:ln>
                             <a:noFill/>
                           </a:ln>
@@ -9068,7 +9319,7 @@
                         <a:t>좌우 온도 편차 원인 분석 완료 후 </a:t>
                       </a:r>
                       <a:r>
-                        <a:rPr kumimoji="1" lang="en-US" altLang="ko-KR" sz="1000" b="0" i="0" u="none" strike="noStrike" kern="1200" cap="none" normalizeH="0" baseline="0" smtClean="0">
+                        <a:rPr kumimoji="1" lang="en-US" altLang="ko-KR" sz="1000" b="0" i="0" u="none" strike="noStrike" kern="1200" cap="none" normalizeH="0" baseline="0" dirty="0" smtClean="0">
                           <a:ln>
                             <a:noFill/>
                           </a:ln>
@@ -9083,7 +9334,7 @@
                         <a:t>S/W </a:t>
                       </a:r>
                       <a:r>
-                        <a:rPr kumimoji="1" lang="ko-KR" altLang="en-US" sz="1000" b="0" i="0" u="none" strike="noStrike" kern="1200" cap="none" normalizeH="0" baseline="0" smtClean="0">
+                        <a:rPr kumimoji="1" lang="ko-KR" altLang="en-US" sz="1000" b="0" i="0" u="none" strike="noStrike" kern="1200" cap="none" normalizeH="0" baseline="0" dirty="0" smtClean="0">
                           <a:ln>
                             <a:noFill/>
                           </a:ln>
@@ -9097,7 +9348,7 @@
                         </a:rPr>
                         <a:t>튜닝 예정</a:t>
                       </a:r>
-                      <a:endParaRPr kumimoji="1" lang="en-US" altLang="ko-KR" sz="1000" b="0" i="0" u="none" strike="noStrike" kern="1200" cap="none" normalizeH="0" baseline="0" smtClean="0">
+                      <a:endParaRPr kumimoji="1" lang="en-US" altLang="ko-KR" sz="1000" b="0" i="0" u="none" strike="noStrike" kern="1200" cap="none" normalizeH="0" baseline="0" dirty="0" smtClean="0">
                         <a:ln>
                           <a:noFill/>
                         </a:ln>
@@ -9180,7 +9431,7 @@
                         <a:defRPr/>
                       </a:pPr>
                       <a:r>
-                        <a:rPr lang="en-US" altLang="ko-KR" sz="1000" b="0" kern="1200" smtClean="0">
+                        <a:rPr lang="en-US" altLang="ko-KR" sz="1000" b="0" kern="1200" dirty="0" smtClean="0">
                           <a:solidFill>
                             <a:schemeClr val="tx1"/>
                           </a:solidFill>
@@ -9190,7 +9441,7 @@
                         </a:rPr>
                         <a:t>25/7/15 ~</a:t>
                       </a:r>
-                      <a:endParaRPr lang="ko-KR" altLang="en-US" sz="1000" b="0" kern="1200" smtClean="0">
+                      <a:endParaRPr lang="ko-KR" altLang="en-US" sz="1000" b="0" kern="1200" dirty="0" smtClean="0">
                         <a:solidFill>
                           <a:schemeClr val="tx1"/>
                         </a:solidFill>
@@ -10387,7 +10638,7 @@
                         <a:defRPr/>
                       </a:pPr>
                       <a:r>
-                        <a:rPr kumimoji="1" lang="en-US" altLang="ko-KR" sz="1000" b="0" i="0" u="none" strike="noStrike" kern="1200" cap="none" normalizeH="0" baseline="0" smtClean="0">
+                        <a:rPr kumimoji="1" lang="en-US" altLang="ko-KR" sz="1000" b="0" i="0" u="none" strike="noStrike" kern="1200" cap="none" normalizeH="0" baseline="0" dirty="0" smtClean="0">
                           <a:ln>
                             <a:noFill/>
                           </a:ln>
@@ -10402,7 +10653,7 @@
                         <a:t>1. </a:t>
                       </a:r>
                       <a:r>
-                        <a:rPr kumimoji="1" lang="ko-KR" altLang="en-US" sz="1000" b="0" i="0" u="none" strike="noStrike" kern="1200" cap="none" normalizeH="0" baseline="0" smtClean="0">
+                        <a:rPr kumimoji="1" lang="ko-KR" altLang="en-US" sz="1000" b="0" i="0" u="none" strike="noStrike" kern="1200" cap="none" normalizeH="0" baseline="0" dirty="0" err="1" smtClean="0">
                           <a:ln>
                             <a:noFill/>
                           </a:ln>
@@ -10414,9 +10665,24 @@
                           <a:ea typeface="+mn-ea"/>
                           <a:cs typeface="+mn-cs"/>
                         </a:rPr>
-                        <a:t>고객사 요청 대응</a:t>
-                      </a:r>
-                      <a:endParaRPr kumimoji="1" lang="en-US" altLang="ko-KR" sz="1000" b="0" i="0" u="none" strike="noStrike" kern="1200" cap="none" normalizeH="0" baseline="0" smtClean="0">
+                        <a:t>고객사</a:t>
+                      </a:r>
+                      <a:r>
+                        <a:rPr kumimoji="1" lang="ko-KR" altLang="en-US" sz="1000" b="0" i="0" u="none" strike="noStrike" kern="1200" cap="none" normalizeH="0" baseline="0" dirty="0" smtClean="0">
+                          <a:ln>
+                            <a:noFill/>
+                          </a:ln>
+                          <a:solidFill>
+                            <a:schemeClr val="tx1"/>
+                          </a:solidFill>
+                          <a:effectLst/>
+                          <a:latin typeface="+mn-lt"/>
+                          <a:ea typeface="+mn-ea"/>
+                          <a:cs typeface="+mn-cs"/>
+                        </a:rPr>
+                        <a:t> 요청 대응</a:t>
+                      </a:r>
+                      <a:endParaRPr kumimoji="1" lang="en-US" altLang="ko-KR" sz="1000" b="0" i="0" u="none" strike="noStrike" kern="1200" cap="none" normalizeH="0" baseline="0" dirty="0" smtClean="0">
                         <a:ln>
                           <a:noFill/>
                         </a:ln>
@@ -10450,7 +10716,7 @@
                         <a:defRPr/>
                       </a:pPr>
                       <a:r>
-                        <a:rPr kumimoji="1" lang="en-US" altLang="ko-KR" sz="1000" b="0" i="0" u="none" strike="noStrike" kern="1200" cap="none" normalizeH="0" baseline="0" smtClean="0">
+                        <a:rPr kumimoji="1" lang="en-US" altLang="ko-KR" sz="1000" b="0" i="0" u="none" strike="noStrike" kern="1200" cap="none" normalizeH="0" baseline="0" dirty="0" smtClean="0">
                           <a:ln>
                             <a:noFill/>
                           </a:ln>
@@ -10465,7 +10731,7 @@
                         <a:t>   : </a:t>
                       </a:r>
                       <a:r>
-                        <a:rPr kumimoji="1" lang="ko-KR" altLang="en-US" sz="1000" b="0" i="0" u="none" strike="noStrike" kern="1200" cap="none" normalizeH="0" baseline="0" smtClean="0">
+                        <a:rPr kumimoji="1" lang="ko-KR" altLang="en-US" sz="1000" b="0" i="0" u="none" strike="noStrike" kern="1200" cap="none" normalizeH="0" baseline="0" dirty="0" smtClean="0">
                           <a:ln>
                             <a:noFill/>
                           </a:ln>
@@ -10480,7 +10746,7 @@
                         <a:t>현지 공정 설비 제작 시 </a:t>
                       </a:r>
                       <a:r>
-                        <a:rPr kumimoji="1" lang="en-US" altLang="ko-KR" sz="1000" b="0" i="0" u="none" strike="noStrike" kern="1200" cap="none" normalizeH="0" baseline="0" smtClean="0">
+                        <a:rPr kumimoji="1" lang="en-US" altLang="ko-KR" sz="1000" b="0" i="0" u="none" strike="noStrike" kern="1200" cap="none" normalizeH="0" baseline="0" dirty="0" smtClean="0">
                           <a:ln>
                             <a:noFill/>
                           </a:ln>
@@ -10495,7 +10761,7 @@
                         <a:t>S/W</a:t>
                       </a:r>
                       <a:r>
-                        <a:rPr kumimoji="1" lang="ko-KR" altLang="en-US" sz="1000" b="0" i="0" u="none" strike="noStrike" kern="1200" cap="none" normalizeH="0" baseline="0" smtClean="0">
+                        <a:rPr kumimoji="1" lang="ko-KR" altLang="en-US" sz="1000" b="0" i="0" u="none" strike="noStrike" kern="1200" cap="none" normalizeH="0" baseline="0" dirty="0" smtClean="0">
                           <a:ln>
                             <a:noFill/>
                           </a:ln>
@@ -10509,7 +10775,7 @@
                         </a:rPr>
                         <a:t> 교육 계획 송부</a:t>
                       </a:r>
-                      <a:endParaRPr kumimoji="1" lang="en-US" altLang="ko-KR" sz="1000" b="0" i="0" u="none" strike="noStrike" kern="1200" cap="none" normalizeH="0" baseline="0" smtClean="0">
+                      <a:endParaRPr kumimoji="1" lang="en-US" altLang="ko-KR" sz="1000" b="0" i="0" u="none" strike="noStrike" kern="1200" cap="none" normalizeH="0" baseline="0" dirty="0" smtClean="0">
                         <a:ln>
                           <a:noFill/>
                         </a:ln>
@@ -10543,7 +10809,7 @@
                         <a:defRPr/>
                       </a:pPr>
                       <a:r>
-                        <a:rPr kumimoji="1" lang="en-US" altLang="ko-KR" sz="1000" b="0" i="0" u="none" strike="noStrike" kern="1200" cap="none" normalizeH="0" baseline="0" smtClean="0">
+                        <a:rPr kumimoji="1" lang="en-US" altLang="ko-KR" sz="1000" b="0" i="0" u="none" strike="noStrike" kern="1200" cap="none" normalizeH="0" baseline="0" dirty="0" smtClean="0">
                           <a:ln>
                             <a:noFill/>
                           </a:ln>
@@ -13029,7 +13295,7 @@
           <a:graphicData uri="http://schemas.openxmlformats.org/presentationml/2006/ole">
             <mc:AlternateContent xmlns:mc="http://schemas.openxmlformats.org/markup-compatibility/2006">
               <mc:Choice xmlns:v="urn:schemas-microsoft-com:vml" Requires="v">
-                <p:oleObj spid="_x0000_s2053" name="프레젠테이션" showAsIcon="1" r:id="rId4" imgW="380880" imgH="771480" progId="PowerPoint.Show.12">
+                <p:oleObj spid="_x0000_s2057" name="프레젠테이션" showAsIcon="1" r:id="rId4" imgW="380880" imgH="771480" progId="PowerPoint.Show.12">
                   <p:embed/>
                 </p:oleObj>
               </mc:Choice>
@@ -13809,7 +14075,7 @@
                         <a:defRPr/>
                       </a:pPr>
                       <a:r>
-                        <a:rPr kumimoji="1" lang="en-US" altLang="ko-KR" sz="1000" b="0" i="0" u="none" strike="noStrike" kern="1200" cap="none" normalizeH="0" baseline="0" smtClean="0">
+                        <a:rPr kumimoji="1" lang="en-US" altLang="ko-KR" sz="1000" b="0" i="0" u="none" strike="noStrike" kern="1200" cap="none" normalizeH="0" baseline="0" dirty="0" smtClean="0">
                           <a:ln>
                             <a:noFill/>
                           </a:ln>
@@ -13824,7 +14090,7 @@
                         <a:t>1. </a:t>
                       </a:r>
                       <a:r>
-                        <a:rPr kumimoji="1" lang="ko-KR" altLang="en-US" sz="1000" b="0" i="0" u="none" strike="noStrike" kern="1200" cap="none" normalizeH="0" baseline="0" smtClean="0">
+                        <a:rPr kumimoji="1" lang="ko-KR" altLang="en-US" sz="1000" b="0" i="0" u="none" strike="noStrike" kern="1200" cap="none" normalizeH="0" baseline="0" dirty="0" smtClean="0">
                           <a:ln>
                             <a:noFill/>
                           </a:ln>
@@ -13838,7 +14104,7 @@
                         </a:rPr>
                         <a:t>담당자 선정</a:t>
                       </a:r>
-                      <a:endParaRPr kumimoji="1" lang="en-US" altLang="ko-KR" sz="1000" b="0" i="0" u="none" strike="noStrike" kern="1200" cap="none" normalizeH="0" baseline="0" smtClean="0">
+                      <a:endParaRPr kumimoji="1" lang="en-US" altLang="ko-KR" sz="1000" b="0" i="0" u="none" strike="noStrike" kern="1200" cap="none" normalizeH="0" baseline="0" dirty="0" smtClean="0">
                         <a:ln>
                           <a:noFill/>
                         </a:ln>
@@ -13872,7 +14138,7 @@
                         <a:defRPr/>
                       </a:pPr>
                       <a:r>
-                        <a:rPr kumimoji="1" lang="en-US" altLang="ko-KR" sz="1000" b="0" i="0" u="none" strike="noStrike" kern="1200" cap="none" normalizeH="0" baseline="0" smtClean="0">
+                        <a:rPr kumimoji="1" lang="en-US" altLang="ko-KR" sz="1000" b="0" i="0" u="none" strike="noStrike" kern="1200" cap="none" normalizeH="0" baseline="0" dirty="0" smtClean="0">
                           <a:ln>
                             <a:noFill/>
                           </a:ln>
@@ -13887,7 +14153,7 @@
                         <a:t>   : </a:t>
                       </a:r>
                       <a:r>
-                        <a:rPr kumimoji="1" lang="ko-KR" altLang="en-US" sz="1000" b="0" i="0" u="none" strike="noStrike" kern="1200" cap="none" normalizeH="0" baseline="0" smtClean="0">
+                        <a:rPr kumimoji="1" lang="ko-KR" altLang="en-US" sz="1000" b="0" i="0" u="none" strike="noStrike" kern="1200" cap="none" normalizeH="0" baseline="0" dirty="0" err="1" smtClean="0">
                           <a:ln>
                             <a:noFill/>
                           </a:ln>
@@ -13899,7 +14165,22 @@
                           <a:ea typeface="+mn-ea"/>
                           <a:cs typeface="+mn-cs"/>
                         </a:rPr>
-                        <a:t>조현진 전임</a:t>
+                        <a:t>조현진</a:t>
+                      </a:r>
+                      <a:r>
+                        <a:rPr kumimoji="1" lang="ko-KR" altLang="en-US" sz="1000" b="0" i="0" u="none" strike="noStrike" kern="1200" cap="none" normalizeH="0" baseline="0" dirty="0" smtClean="0">
+                          <a:ln>
+                            <a:noFill/>
+                          </a:ln>
+                          <a:solidFill>
+                            <a:schemeClr val="tx1"/>
+                          </a:solidFill>
+                          <a:effectLst/>
+                          <a:latin typeface="+mn-lt"/>
+                          <a:ea typeface="+mn-ea"/>
+                          <a:cs typeface="+mn-cs"/>
+                        </a:rPr>
+                        <a:t> 전임</a:t>
                       </a:r>
                       <a:endParaRPr kumimoji="1" lang="en-US" altLang="ko-KR" sz="1000" b="0" i="0" u="none" strike="noStrike" kern="1200" cap="none" normalizeH="0" baseline="0" dirty="0">
                         <a:ln>
@@ -16404,14 +16685,14 @@
           <p:nvPr>
             <p:extLst>
               <p:ext uri="{D42A27DB-BD31-4B8C-83A1-F6EECF244321}">
-                <p14:modId xmlns:p14="http://schemas.microsoft.com/office/powerpoint/2010/main" val="3534206487"/>
+                <p14:modId xmlns:p14="http://schemas.microsoft.com/office/powerpoint/2010/main" val="83516246"/>
               </p:ext>
             </p:extLst>
           </p:nvPr>
         </p:nvGraphicFramePr>
         <p:xfrm>
           <a:off x="47211" y="536957"/>
-          <a:ext cx="9073008" cy="5979246"/>
+          <a:ext cx="9073008" cy="5948766"/>
         </p:xfrm>
         <a:graphic>
           <a:graphicData uri="http://schemas.openxmlformats.org/drawingml/2006/table">
@@ -16870,21 +17151,7 @@
                           <a:latin typeface="+mn-ea"/>
                           <a:ea typeface="+mn-ea"/>
                         </a:rPr>
-                        <a:t>(</a:t>
-                      </a:r>
-                      <a:r>
-                        <a:rPr kumimoji="1" lang="en-US" altLang="ko-KR" sz="1400" b="1" i="0" u="none" strike="noStrike" cap="none" normalizeH="0" baseline="0" smtClean="0">
-                          <a:ln>
-                            <a:noFill/>
-                          </a:ln>
-                          <a:solidFill>
-                            <a:schemeClr val="bg1"/>
-                          </a:solidFill>
-                          <a:effectLst/>
-                          <a:latin typeface="+mn-ea"/>
-                          <a:ea typeface="+mn-ea"/>
-                        </a:rPr>
-                        <a:t>9/12~9/18)</a:t>
+                        <a:t>(9/12~9/18)</a:t>
                       </a:r>
                       <a:endParaRPr kumimoji="1" lang="ko-KR" altLang="en-US" sz="1400" b="1" i="0" u="none" strike="noStrike" cap="none" normalizeH="0" baseline="0" dirty="0">
                         <a:ln>
@@ -17116,7 +17383,7 @@
                         <a:defRPr/>
                       </a:pPr>
                       <a:r>
-                        <a:rPr kumimoji="1" lang="en-US" altLang="ko-KR" sz="1000" b="0" i="0" u="none" strike="noStrike" kern="1200" cap="none" normalizeH="0" baseline="0" smtClean="0">
+                        <a:rPr kumimoji="1" lang="en-US" altLang="ko-KR" sz="1000" b="0" i="0" u="none" strike="noStrike" kern="1200" cap="none" normalizeH="0" baseline="0" dirty="0" smtClean="0">
                           <a:ln>
                             <a:noFill/>
                           </a:ln>
@@ -17131,7 +17398,7 @@
                         <a:t>1. </a:t>
                       </a:r>
                       <a:r>
-                        <a:rPr kumimoji="1" lang="ko-KR" altLang="en-US" sz="1000" b="0" i="0" u="none" strike="noStrike" kern="1200" cap="none" normalizeH="0" baseline="0" smtClean="0">
+                        <a:rPr kumimoji="1" lang="ko-KR" altLang="en-US" sz="1000" b="0" i="0" u="none" strike="noStrike" kern="1200" cap="none" normalizeH="0" baseline="0" dirty="0" smtClean="0">
                           <a:ln>
                             <a:noFill/>
                           </a:ln>
@@ -17146,7 +17413,7 @@
                         <a:t>기본형 </a:t>
                       </a:r>
                       <a:r>
-                        <a:rPr kumimoji="1" lang="en-US" altLang="ko-KR" sz="1000" b="0" i="0" u="none" strike="noStrike" kern="1200" cap="none" normalizeH="0" baseline="0" smtClean="0">
+                        <a:rPr kumimoji="1" lang="en-US" altLang="ko-KR" sz="1000" b="0" i="0" u="none" strike="noStrike" kern="1200" cap="none" normalizeH="0" baseline="0" dirty="0" smtClean="0">
                           <a:ln>
                             <a:noFill/>
                           </a:ln>
@@ -17161,7 +17428,7 @@
                         <a:t>LP2 </a:t>
                       </a:r>
                       <a:r>
-                        <a:rPr kumimoji="1" lang="ko-KR" altLang="en-US" sz="1000" b="0" i="0" u="none" strike="noStrike" kern="1200" cap="none" normalizeH="0" baseline="0" smtClean="0">
+                        <a:rPr kumimoji="1" lang="ko-KR" altLang="en-US" sz="1000" b="0" i="0" u="none" strike="noStrike" kern="1200" cap="none" normalizeH="0" baseline="0" dirty="0" smtClean="0">
                           <a:ln>
                             <a:noFill/>
                           </a:ln>
@@ -17176,7 +17443,7 @@
                         <a:t>대응 위한 </a:t>
                       </a:r>
                       <a:r>
-                        <a:rPr kumimoji="1" lang="en-US" altLang="ko-KR" sz="1000" b="0" i="0" u="none" strike="noStrike" kern="1200" cap="none" normalizeH="0" baseline="0" smtClean="0">
+                        <a:rPr kumimoji="1" lang="en-US" altLang="ko-KR" sz="1000" b="0" i="0" u="none" strike="noStrike" kern="1200" cap="none" normalizeH="0" baseline="0" dirty="0" smtClean="0">
                           <a:ln>
                             <a:noFill/>
                           </a:ln>
@@ -17191,7 +17458,7 @@
                         <a:t>S/W </a:t>
                       </a:r>
                       <a:r>
-                        <a:rPr kumimoji="1" lang="ko-KR" altLang="en-US" sz="1000" b="0" i="0" u="none" strike="noStrike" kern="1200" cap="none" normalizeH="0" baseline="0" smtClean="0">
+                        <a:rPr kumimoji="1" lang="ko-KR" altLang="en-US" sz="1000" b="0" i="0" u="none" strike="noStrike" kern="1200" cap="none" normalizeH="0" baseline="0" dirty="0" smtClean="0">
                           <a:ln>
                             <a:noFill/>
                           </a:ln>
@@ -17206,7 +17473,7 @@
                         <a:t>시험 진행 완료 </a:t>
                       </a:r>
                       <a:r>
-                        <a:rPr kumimoji="1" lang="en-US" altLang="ko-KR" sz="1000" b="0" i="0" u="none" strike="noStrike" kern="1200" cap="none" normalizeH="0" baseline="0" smtClean="0">
+                        <a:rPr kumimoji="1" lang="en-US" altLang="ko-KR" sz="1000" b="0" i="0" u="none" strike="noStrike" kern="1200" cap="none" normalizeH="0" baseline="0" dirty="0" smtClean="0">
                           <a:ln>
                             <a:noFill/>
                           </a:ln>
@@ -17242,7 +17509,7 @@
                         <a:defRPr/>
                       </a:pPr>
                       <a:r>
-                        <a:rPr kumimoji="1" lang="en-US" altLang="ko-KR" sz="1000" b="0" i="0" u="none" strike="noStrike" kern="1200" cap="none" normalizeH="0" baseline="0" smtClean="0">
+                        <a:rPr kumimoji="1" lang="en-US" altLang="ko-KR" sz="1000" b="0" i="0" u="none" strike="noStrike" kern="1200" cap="none" normalizeH="0" baseline="0" dirty="0" smtClean="0">
                           <a:ln>
                             <a:noFill/>
                           </a:ln>
@@ -17257,7 +17524,7 @@
                         <a:t>   - R</a:t>
                       </a:r>
                       <a:r>
-                        <a:rPr kumimoji="1" lang="ko-KR" altLang="en-US" sz="1000" b="0" i="0" u="none" strike="noStrike" kern="1200" cap="none" normalizeH="0" baseline="0" smtClean="0">
+                        <a:rPr kumimoji="1" lang="ko-KR" altLang="en-US" sz="1000" b="0" i="0" u="none" strike="noStrike" kern="1200" cap="none" normalizeH="0" baseline="0" dirty="0" err="1" smtClean="0">
                           <a:ln>
                             <a:noFill/>
                           </a:ln>
@@ -17269,43 +17536,10 @@
                           <a:ea typeface="+mn-ea"/>
                           <a:cs typeface="+mn-cs"/>
                         </a:rPr>
-                        <a:t>로직 튜닝 진행 완료</a:t>
-                      </a:r>
-                      <a:endParaRPr kumimoji="1" lang="en-US" altLang="ko-KR" sz="1000" b="0" i="0" u="none" strike="noStrike" kern="1200" cap="none" normalizeH="0" baseline="0" smtClean="0">
-                        <a:ln>
-                          <a:noFill/>
-                        </a:ln>
-                        <a:solidFill>
-                          <a:schemeClr val="tx1"/>
-                        </a:solidFill>
-                        <a:effectLst/>
-                        <a:latin typeface="+mn-lt"/>
-                        <a:ea typeface="+mn-ea"/>
-                        <a:cs typeface="+mn-cs"/>
-                      </a:endParaRPr>
-                    </a:p>
-                    <a:p>
-                      <a:pPr marL="0" marR="0" lvl="0" indent="0" algn="l" defTabSz="914400" rtl="0" eaLnBrk="1" fontAlgn="base" latinLnBrk="1" hangingPunct="1">
-                        <a:lnSpc>
-                          <a:spcPct val="100000"/>
-                        </a:lnSpc>
-                        <a:spcBef>
-                          <a:spcPct val="20000"/>
-                        </a:spcBef>
-                        <a:spcAft>
-                          <a:spcPct val="0"/>
-                        </a:spcAft>
-                        <a:buClr>
-                          <a:srgbClr val="FF0000"/>
-                        </a:buClr>
-                        <a:buSzTx/>
-                        <a:buFont typeface="Wingdings" pitchFamily="2" charset="2"/>
-                        <a:buNone/>
-                        <a:tabLst/>
-                        <a:defRPr/>
-                      </a:pPr>
-                      <a:r>
-                        <a:rPr kumimoji="1" lang="en-US" altLang="ko-KR" sz="1000" b="0" i="0" u="none" strike="noStrike" kern="1200" cap="none" normalizeH="0" baseline="0" smtClean="0">
+                        <a:t>로직</a:t>
+                      </a:r>
+                      <a:r>
+                        <a:rPr kumimoji="1" lang="ko-KR" altLang="en-US" sz="1000" b="0" i="0" u="none" strike="noStrike" kern="1200" cap="none" normalizeH="0" baseline="0" dirty="0" smtClean="0">
                           <a:ln>
                             <a:noFill/>
                           </a:ln>
@@ -17317,1113 +17551,7 @@
                           <a:ea typeface="+mn-ea"/>
                           <a:cs typeface="+mn-cs"/>
                         </a:rPr>
-                        <a:t>   - </a:t>
-                      </a:r>
-                      <a:r>
-                        <a:rPr kumimoji="1" lang="ko-KR" altLang="en-US" sz="1000" b="0" i="0" u="none" strike="noStrike" kern="1200" cap="none" normalizeH="0" baseline="0" smtClean="0">
-                          <a:ln>
-                            <a:noFill/>
-                          </a:ln>
-                          <a:solidFill>
-                            <a:schemeClr val="tx1"/>
-                          </a:solidFill>
-                          <a:effectLst/>
-                          <a:latin typeface="+mn-lt"/>
-                          <a:ea typeface="+mn-ea"/>
-                          <a:cs typeface="+mn-cs"/>
-                        </a:rPr>
-                        <a:t>로직 체크리스트에 따른 시험 진행</a:t>
-                      </a:r>
-                      <a:r>
-                        <a:rPr kumimoji="1" lang="en-US" altLang="ko-KR" sz="1000" b="0" i="0" u="none" strike="noStrike" kern="1200" cap="none" normalizeH="0" baseline="0" smtClean="0">
-                          <a:ln>
-                            <a:noFill/>
-                          </a:ln>
-                          <a:solidFill>
-                            <a:schemeClr val="tx1"/>
-                          </a:solidFill>
-                          <a:effectLst/>
-                          <a:latin typeface="+mn-lt"/>
-                          <a:ea typeface="+mn-ea"/>
-                          <a:cs typeface="+mn-cs"/>
-                        </a:rPr>
-                        <a:t> </a:t>
-                      </a:r>
-                      <a:r>
-                        <a:rPr kumimoji="1" lang="ko-KR" altLang="en-US" sz="1000" b="0" i="0" u="none" strike="noStrike" kern="1200" cap="none" normalizeH="0" baseline="0" smtClean="0">
-                          <a:ln>
-                            <a:noFill/>
-                          </a:ln>
-                          <a:solidFill>
-                            <a:schemeClr val="tx1"/>
-                          </a:solidFill>
-                          <a:effectLst/>
-                          <a:latin typeface="+mn-lt"/>
-                          <a:ea typeface="+mn-ea"/>
-                          <a:cs typeface="+mn-cs"/>
-                        </a:rPr>
-                        <a:t>완료</a:t>
-                      </a:r>
-                      <a:endParaRPr kumimoji="1" lang="en-US" altLang="ko-KR" sz="1000" b="0" i="0" u="none" strike="noStrike" kern="1200" cap="none" normalizeH="0" baseline="0" smtClean="0">
-                        <a:ln>
-                          <a:noFill/>
-                        </a:ln>
-                        <a:solidFill>
-                          <a:schemeClr val="tx1"/>
-                        </a:solidFill>
-                        <a:effectLst/>
-                        <a:latin typeface="+mn-lt"/>
-                        <a:ea typeface="+mn-ea"/>
-                        <a:cs typeface="+mn-cs"/>
-                      </a:endParaRPr>
-                    </a:p>
-                    <a:p>
-                      <a:pPr marL="0" marR="0" lvl="0" indent="0" algn="l" defTabSz="914400" rtl="0" eaLnBrk="1" fontAlgn="base" latinLnBrk="1" hangingPunct="1">
-                        <a:lnSpc>
-                          <a:spcPct val="100000"/>
-                        </a:lnSpc>
-                        <a:spcBef>
-                          <a:spcPct val="20000"/>
-                        </a:spcBef>
-                        <a:spcAft>
-                          <a:spcPct val="0"/>
-                        </a:spcAft>
-                        <a:buClr>
-                          <a:srgbClr val="FF0000"/>
-                        </a:buClr>
-                        <a:buSzTx/>
-                        <a:buFont typeface="Wingdings" pitchFamily="2" charset="2"/>
-                        <a:buNone/>
-                        <a:tabLst/>
-                        <a:defRPr/>
-                      </a:pPr>
-                      <a:r>
-                        <a:rPr kumimoji="1" lang="en-US" altLang="ko-KR" sz="1000" b="0" i="0" u="none" strike="noStrike" kern="1200" cap="none" normalizeH="0" baseline="0" smtClean="0">
-                          <a:ln>
-                            <a:noFill/>
-                          </a:ln>
-                          <a:solidFill>
-                            <a:schemeClr val="tx1"/>
-                          </a:solidFill>
-                          <a:effectLst/>
-                          <a:latin typeface="+mn-lt"/>
-                          <a:ea typeface="+mn-ea"/>
-                          <a:cs typeface="+mn-cs"/>
-                        </a:rPr>
-                        <a:t>   - </a:t>
-                      </a:r>
-                      <a:r>
-                        <a:rPr kumimoji="1" lang="ko-KR" altLang="en-US" sz="1000" b="0" i="0" u="none" strike="noStrike" kern="1200" cap="none" normalizeH="0" baseline="0" smtClean="0">
-                          <a:ln>
-                            <a:noFill/>
-                          </a:ln>
-                          <a:solidFill>
-                            <a:schemeClr val="tx1"/>
-                          </a:solidFill>
-                          <a:effectLst/>
-                          <a:latin typeface="+mn-lt"/>
-                          <a:ea typeface="+mn-ea"/>
-                          <a:cs typeface="+mn-cs"/>
-                        </a:rPr>
-                        <a:t>설계변경 진행 </a:t>
-                      </a:r>
-                      <a:r>
-                        <a:rPr kumimoji="1" lang="en-US" altLang="ko-KR" sz="1000" b="0" i="0" u="none" strike="noStrike" kern="1200" cap="none" normalizeH="0" baseline="0" smtClean="0">
-                          <a:ln>
-                            <a:noFill/>
-                          </a:ln>
-                          <a:solidFill>
-                            <a:schemeClr val="tx1"/>
-                          </a:solidFill>
-                          <a:effectLst/>
-                          <a:latin typeface="+mn-lt"/>
-                          <a:ea typeface="+mn-ea"/>
-                          <a:cs typeface="+mn-cs"/>
-                        </a:rPr>
-                        <a:t>(9/10</a:t>
-                      </a:r>
-                      <a:r>
-                        <a:rPr kumimoji="1" lang="ko-KR" altLang="en-US" sz="1000" b="0" i="0" u="none" strike="noStrike" kern="1200" cap="none" normalizeH="0" baseline="0" smtClean="0">
-                          <a:ln>
-                            <a:noFill/>
-                          </a:ln>
-                          <a:solidFill>
-                            <a:schemeClr val="tx1"/>
-                          </a:solidFill>
-                          <a:effectLst/>
-                          <a:latin typeface="+mn-lt"/>
-                          <a:ea typeface="+mn-ea"/>
-                          <a:cs typeface="+mn-cs"/>
-                        </a:rPr>
-                        <a:t>일</a:t>
-                      </a:r>
-                      <a:r>
-                        <a:rPr kumimoji="1" lang="en-US" altLang="ko-KR" sz="1000" b="0" i="0" u="none" strike="noStrike" kern="1200" cap="none" normalizeH="0" baseline="0" smtClean="0">
-                          <a:ln>
-                            <a:noFill/>
-                          </a:ln>
-                          <a:solidFill>
-                            <a:schemeClr val="tx1"/>
-                          </a:solidFill>
-                          <a:effectLst/>
-                          <a:latin typeface="+mn-lt"/>
-                          <a:ea typeface="+mn-ea"/>
-                          <a:cs typeface="+mn-cs"/>
-                        </a:rPr>
-                        <a:t>)</a:t>
-                      </a:r>
-                    </a:p>
-                    <a:p>
-                      <a:pPr marL="0" marR="0" lvl="0" indent="0" algn="l" defTabSz="914400" rtl="0" eaLnBrk="1" fontAlgn="base" latinLnBrk="1" hangingPunct="1">
-                        <a:lnSpc>
-                          <a:spcPct val="100000"/>
-                        </a:lnSpc>
-                        <a:spcBef>
-                          <a:spcPct val="20000"/>
-                        </a:spcBef>
-                        <a:spcAft>
-                          <a:spcPct val="0"/>
-                        </a:spcAft>
-                        <a:buClr>
-                          <a:srgbClr val="FF0000"/>
-                        </a:buClr>
-                        <a:buSzTx/>
-                        <a:buFont typeface="Wingdings" pitchFamily="2" charset="2"/>
-                        <a:buNone/>
-                        <a:tabLst/>
-                        <a:defRPr/>
-                      </a:pPr>
-                      <a:r>
-                        <a:rPr kumimoji="1" lang="en-US" altLang="ko-KR" sz="1000" b="0" i="0" u="none" strike="noStrike" kern="1200" cap="none" normalizeH="0" baseline="0" smtClean="0">
-                          <a:ln>
-                            <a:noFill/>
-                          </a:ln>
-                          <a:solidFill>
-                            <a:schemeClr val="tx1"/>
-                          </a:solidFill>
-                          <a:effectLst/>
-                          <a:latin typeface="+mn-lt"/>
-                          <a:ea typeface="+mn-ea"/>
-                          <a:cs typeface="+mn-cs"/>
-                        </a:rPr>
-                        <a:t>  : </a:t>
-                      </a:r>
-                      <a:r>
-                        <a:rPr kumimoji="1" lang="ko-KR" altLang="en-US" sz="1000" b="0" i="0" u="none" strike="noStrike" kern="1200" cap="none" normalizeH="0" baseline="0" smtClean="0">
-                          <a:ln>
-                            <a:noFill/>
-                          </a:ln>
-                          <a:solidFill>
-                            <a:schemeClr val="tx1"/>
-                          </a:solidFill>
-                          <a:effectLst/>
-                          <a:latin typeface="+mn-lt"/>
-                          <a:ea typeface="+mn-ea"/>
-                          <a:cs typeface="+mn-cs"/>
-                        </a:rPr>
-                        <a:t>슬로바키아 법인 재고 파악 및 재고 처리 방안 수립 후 결재 상신</a:t>
-                      </a:r>
-                      <a:endParaRPr kumimoji="1" lang="en-US" altLang="ko-KR" sz="1000" b="0" i="0" u="none" strike="noStrike" kern="1200" cap="none" normalizeH="0" baseline="0" smtClean="0">
-                        <a:ln>
-                          <a:noFill/>
-                        </a:ln>
-                        <a:solidFill>
-                          <a:schemeClr val="tx1"/>
-                        </a:solidFill>
-                        <a:effectLst/>
-                        <a:latin typeface="+mn-lt"/>
-                        <a:ea typeface="+mn-ea"/>
-                        <a:cs typeface="+mn-cs"/>
-                      </a:endParaRPr>
-                    </a:p>
-                    <a:p>
-                      <a:pPr marL="0" marR="0" lvl="0" indent="0" algn="l" defTabSz="914400" rtl="0" eaLnBrk="1" fontAlgn="base" latinLnBrk="1" hangingPunct="1">
-                        <a:lnSpc>
-                          <a:spcPct val="100000"/>
-                        </a:lnSpc>
-                        <a:spcBef>
-                          <a:spcPct val="20000"/>
-                        </a:spcBef>
-                        <a:spcAft>
-                          <a:spcPct val="0"/>
-                        </a:spcAft>
-                        <a:buClr>
-                          <a:srgbClr val="FF0000"/>
-                        </a:buClr>
-                        <a:buSzTx/>
-                        <a:buFont typeface="Wingdings" pitchFamily="2" charset="2"/>
-                        <a:buNone/>
-                        <a:tabLst/>
-                        <a:defRPr/>
-                      </a:pPr>
-                      <a:r>
-                        <a:rPr kumimoji="1" lang="en-US" altLang="ko-KR" sz="1000" b="0" i="0" u="none" strike="noStrike" kern="1200" cap="none" normalizeH="0" baseline="0" smtClean="0">
-                          <a:ln>
-                            <a:noFill/>
-                          </a:ln>
-                          <a:solidFill>
-                            <a:schemeClr val="tx1"/>
-                          </a:solidFill>
-                          <a:effectLst/>
-                          <a:latin typeface="+mn-lt"/>
-                          <a:ea typeface="+mn-ea"/>
-                          <a:cs typeface="+mn-cs"/>
-                        </a:rPr>
-                        <a:t>  </a:t>
-                      </a:r>
-                    </a:p>
-                    <a:p>
-                      <a:pPr marL="0" marR="0" lvl="0" indent="0" algn="l" defTabSz="914400" rtl="0" eaLnBrk="1" fontAlgn="base" latinLnBrk="1" hangingPunct="1">
-                        <a:lnSpc>
-                          <a:spcPct val="100000"/>
-                        </a:lnSpc>
-                        <a:spcBef>
-                          <a:spcPct val="20000"/>
-                        </a:spcBef>
-                        <a:spcAft>
-                          <a:spcPct val="0"/>
-                        </a:spcAft>
-                        <a:buClr>
-                          <a:srgbClr val="FF0000"/>
-                        </a:buClr>
-                        <a:buSzTx/>
-                        <a:buFont typeface="Wingdings" pitchFamily="2" charset="2"/>
-                        <a:buNone/>
-                        <a:tabLst/>
-                        <a:defRPr/>
-                      </a:pPr>
-                      <a:r>
-                        <a:rPr kumimoji="1" lang="en-US" altLang="ko-KR" sz="1000" b="0" i="0" u="none" strike="noStrike" kern="1200" cap="none" normalizeH="0" baseline="0" smtClean="0">
-                          <a:ln>
-                            <a:noFill/>
-                          </a:ln>
-                          <a:solidFill>
-                            <a:schemeClr val="tx1"/>
-                          </a:solidFill>
-                          <a:effectLst/>
-                          <a:latin typeface="+mn-lt"/>
-                          <a:ea typeface="+mn-ea"/>
-                          <a:cs typeface="+mn-cs"/>
-                        </a:rPr>
-                        <a:t>2. </a:t>
-                      </a:r>
-                      <a:r>
-                        <a:rPr kumimoji="1" lang="ko-KR" altLang="en-US" sz="1000" b="0" i="0" u="none" strike="noStrike" kern="1200" cap="none" normalizeH="0" baseline="0" smtClean="0">
-                          <a:ln>
-                            <a:noFill/>
-                          </a:ln>
-                          <a:solidFill>
-                            <a:schemeClr val="tx1"/>
-                          </a:solidFill>
-                          <a:effectLst/>
-                          <a:latin typeface="+mn-lt"/>
-                          <a:ea typeface="+mn-ea"/>
-                          <a:cs typeface="+mn-cs"/>
-                        </a:rPr>
-                        <a:t>사이버 보안</a:t>
-                      </a:r>
-                      <a:endParaRPr kumimoji="1" lang="en-US" altLang="ko-KR" sz="1000" b="0" i="0" u="none" strike="noStrike" kern="1200" cap="none" normalizeH="0" baseline="0" smtClean="0">
-                        <a:ln>
-                          <a:noFill/>
-                        </a:ln>
-                        <a:solidFill>
-                          <a:schemeClr val="tx1"/>
-                        </a:solidFill>
-                        <a:effectLst/>
-                        <a:latin typeface="+mn-lt"/>
-                        <a:ea typeface="+mn-ea"/>
-                        <a:cs typeface="+mn-cs"/>
-                      </a:endParaRPr>
-                    </a:p>
-                    <a:p>
-                      <a:pPr marL="0" marR="0" lvl="0" indent="0" algn="l" defTabSz="914400" rtl="0" eaLnBrk="1" fontAlgn="base" latinLnBrk="1" hangingPunct="1">
-                        <a:lnSpc>
-                          <a:spcPct val="100000"/>
-                        </a:lnSpc>
-                        <a:spcBef>
-                          <a:spcPct val="20000"/>
-                        </a:spcBef>
-                        <a:spcAft>
-                          <a:spcPct val="0"/>
-                        </a:spcAft>
-                        <a:buClr>
-                          <a:srgbClr val="FF0000"/>
-                        </a:buClr>
-                        <a:buSzTx/>
-                        <a:buFont typeface="Wingdings" pitchFamily="2" charset="2"/>
-                        <a:buNone/>
-                        <a:tabLst/>
-                        <a:defRPr/>
-                      </a:pPr>
-                      <a:r>
-                        <a:rPr kumimoji="1" lang="en-US" altLang="ko-KR" sz="1000" b="0" i="0" u="none" strike="noStrike" kern="1200" cap="none" normalizeH="0" baseline="0" smtClean="0">
-                          <a:ln>
-                            <a:noFill/>
-                          </a:ln>
-                          <a:solidFill>
-                            <a:schemeClr val="tx1"/>
-                          </a:solidFill>
-                          <a:effectLst/>
-                          <a:latin typeface="+mn-lt"/>
-                          <a:ea typeface="+mn-ea"/>
-                          <a:cs typeface="+mn-cs"/>
-                        </a:rPr>
-                        <a:t>   - </a:t>
-                      </a:r>
-                      <a:r>
-                        <a:rPr kumimoji="1" lang="ko-KR" altLang="en-US" sz="1000" b="0" i="0" u="none" strike="noStrike" kern="1200" cap="none" normalizeH="0" baseline="0" smtClean="0">
-                          <a:ln>
-                            <a:noFill/>
-                          </a:ln>
-                          <a:solidFill>
-                            <a:schemeClr val="tx1"/>
-                          </a:solidFill>
-                          <a:effectLst/>
-                          <a:latin typeface="+mn-lt"/>
-                          <a:ea typeface="+mn-ea"/>
-                          <a:cs typeface="+mn-cs"/>
-                        </a:rPr>
-                        <a:t>사이버 보안 적용 시 </a:t>
-                      </a:r>
-                      <a:r>
-                        <a:rPr kumimoji="1" lang="en-US" altLang="ko-KR" sz="1000" b="0" i="0" u="none" strike="noStrike" kern="1200" cap="none" normalizeH="0" baseline="0" smtClean="0">
-                          <a:ln>
-                            <a:noFill/>
-                          </a:ln>
-                          <a:solidFill>
-                            <a:schemeClr val="tx1"/>
-                          </a:solidFill>
-                          <a:effectLst/>
-                          <a:latin typeface="+mn-lt"/>
-                          <a:ea typeface="+mn-ea"/>
-                          <a:cs typeface="+mn-cs"/>
-                        </a:rPr>
-                        <a:t>UPDATE </a:t>
-                      </a:r>
-                      <a:r>
-                        <a:rPr kumimoji="1" lang="ko-KR" altLang="en-US" sz="1000" b="0" i="0" u="none" strike="noStrike" kern="1200" cap="none" normalizeH="0" baseline="0" smtClean="0">
-                          <a:ln>
-                            <a:noFill/>
-                          </a:ln>
-                          <a:solidFill>
-                            <a:schemeClr val="tx1"/>
-                          </a:solidFill>
-                          <a:effectLst/>
-                          <a:latin typeface="+mn-lt"/>
-                          <a:ea typeface="+mn-ea"/>
-                          <a:cs typeface="+mn-cs"/>
-                        </a:rPr>
-                        <a:t>안되는 부분 공조 설계팀으로 </a:t>
-                      </a:r>
-                      <a:endParaRPr kumimoji="1" lang="en-US" altLang="ko-KR" sz="1000" b="0" i="0" u="none" strike="noStrike" kern="1200" cap="none" normalizeH="0" baseline="0" smtClean="0">
-                        <a:ln>
-                          <a:noFill/>
-                        </a:ln>
-                        <a:solidFill>
-                          <a:schemeClr val="tx1"/>
-                        </a:solidFill>
-                        <a:effectLst/>
-                        <a:latin typeface="+mn-lt"/>
-                        <a:ea typeface="+mn-ea"/>
-                        <a:cs typeface="+mn-cs"/>
-                      </a:endParaRPr>
-                    </a:p>
-                    <a:p>
-                      <a:pPr marL="0" marR="0" lvl="0" indent="0" algn="l" defTabSz="914400" rtl="0" eaLnBrk="1" fontAlgn="base" latinLnBrk="1" hangingPunct="1">
-                        <a:lnSpc>
-                          <a:spcPct val="100000"/>
-                        </a:lnSpc>
-                        <a:spcBef>
-                          <a:spcPct val="20000"/>
-                        </a:spcBef>
-                        <a:spcAft>
-                          <a:spcPct val="0"/>
-                        </a:spcAft>
-                        <a:buClr>
-                          <a:srgbClr val="FF0000"/>
-                        </a:buClr>
-                        <a:buSzTx/>
-                        <a:buFont typeface="Wingdings" pitchFamily="2" charset="2"/>
-                        <a:buNone/>
-                        <a:tabLst/>
-                        <a:defRPr/>
-                      </a:pPr>
-                      <a:r>
-                        <a:rPr kumimoji="1" lang="en-US" altLang="ko-KR" sz="1000" b="0" i="0" u="none" strike="noStrike" kern="1200" cap="none" normalizeH="0" baseline="0" smtClean="0">
-                          <a:ln>
-                            <a:noFill/>
-                          </a:ln>
-                          <a:solidFill>
-                            <a:schemeClr val="tx1"/>
-                          </a:solidFill>
-                          <a:effectLst/>
-                          <a:latin typeface="+mn-lt"/>
-                          <a:ea typeface="+mn-ea"/>
-                          <a:cs typeface="+mn-cs"/>
-                        </a:rPr>
-                        <a:t>     </a:t>
-                      </a:r>
-                      <a:r>
-                        <a:rPr kumimoji="1" lang="ko-KR" altLang="en-US" sz="1000" b="0" i="0" u="none" strike="noStrike" kern="1200" cap="none" normalizeH="0" baseline="0" smtClean="0">
-                          <a:ln>
-                            <a:noFill/>
-                          </a:ln>
-                          <a:solidFill>
-                            <a:schemeClr val="tx1"/>
-                          </a:solidFill>
-                          <a:effectLst/>
-                          <a:latin typeface="+mn-lt"/>
-                          <a:ea typeface="+mn-ea"/>
-                          <a:cs typeface="+mn-cs"/>
-                        </a:rPr>
-                        <a:t>이슈 제기</a:t>
-                      </a:r>
-                      <a:endParaRPr kumimoji="1" lang="en-US" altLang="ko-KR" sz="1000" b="0" i="0" u="none" strike="noStrike" kern="1200" cap="none" normalizeH="0" baseline="0" smtClean="0">
-                        <a:ln>
-                          <a:noFill/>
-                        </a:ln>
-                        <a:solidFill>
-                          <a:schemeClr val="tx1"/>
-                        </a:solidFill>
-                        <a:effectLst/>
-                        <a:latin typeface="+mn-lt"/>
-                        <a:ea typeface="+mn-ea"/>
-                        <a:cs typeface="+mn-cs"/>
-                      </a:endParaRPr>
-                    </a:p>
-                    <a:p>
-                      <a:pPr marL="0" marR="0" lvl="0" indent="0" algn="l" defTabSz="914400" rtl="0" eaLnBrk="1" fontAlgn="base" latinLnBrk="1" hangingPunct="1">
-                        <a:lnSpc>
-                          <a:spcPct val="100000"/>
-                        </a:lnSpc>
-                        <a:spcBef>
-                          <a:spcPct val="20000"/>
-                        </a:spcBef>
-                        <a:spcAft>
-                          <a:spcPct val="0"/>
-                        </a:spcAft>
-                        <a:buClr>
-                          <a:srgbClr val="FF0000"/>
-                        </a:buClr>
-                        <a:buSzTx/>
-                        <a:buFont typeface="Wingdings" pitchFamily="2" charset="2"/>
-                        <a:buNone/>
-                        <a:tabLst/>
-                        <a:defRPr/>
-                      </a:pPr>
-                      <a:r>
-                        <a:rPr kumimoji="1" lang="en-US" altLang="ko-KR" sz="1000" b="0" i="0" u="none" strike="noStrike" kern="1200" cap="none" normalizeH="0" baseline="0" smtClean="0">
-                          <a:ln>
-                            <a:noFill/>
-                          </a:ln>
-                          <a:solidFill>
-                            <a:schemeClr val="tx1"/>
-                          </a:solidFill>
-                          <a:effectLst/>
-                          <a:latin typeface="+mn-lt"/>
-                          <a:ea typeface="+mn-ea"/>
-                          <a:cs typeface="+mn-cs"/>
-                        </a:rPr>
-                        <a:t>     : </a:t>
-                      </a:r>
-                      <a:r>
-                        <a:rPr kumimoji="1" lang="ko-KR" altLang="en-US" sz="1000" b="0" i="0" u="none" strike="noStrike" kern="1200" cap="none" normalizeH="0" baseline="0" smtClean="0">
-                          <a:ln>
-                            <a:noFill/>
-                          </a:ln>
-                          <a:solidFill>
-                            <a:schemeClr val="tx1"/>
-                          </a:solidFill>
-                          <a:effectLst/>
-                          <a:latin typeface="+mn-lt"/>
-                          <a:ea typeface="+mn-ea"/>
-                          <a:cs typeface="+mn-cs"/>
-                        </a:rPr>
-                        <a:t>정식 </a:t>
-                      </a:r>
-                      <a:r>
-                        <a:rPr kumimoji="1" lang="en-US" altLang="ko-KR" sz="1000" b="0" i="0" u="none" strike="noStrike" kern="1200" cap="none" normalizeH="0" baseline="0" smtClean="0">
-                          <a:ln>
-                            <a:noFill/>
-                          </a:ln>
-                          <a:solidFill>
-                            <a:schemeClr val="tx1"/>
-                          </a:solidFill>
-                          <a:effectLst/>
-                          <a:latin typeface="+mn-lt"/>
-                          <a:ea typeface="+mn-ea"/>
-                          <a:cs typeface="+mn-cs"/>
-                        </a:rPr>
-                        <a:t>OTA </a:t>
-                      </a:r>
-                      <a:r>
-                        <a:rPr kumimoji="1" lang="ko-KR" altLang="en-US" sz="1000" b="0" i="0" u="none" strike="noStrike" kern="1200" cap="none" normalizeH="0" baseline="0" smtClean="0">
-                          <a:ln>
-                            <a:noFill/>
-                          </a:ln>
-                          <a:solidFill>
-                            <a:schemeClr val="tx1"/>
-                          </a:solidFill>
-                          <a:effectLst/>
-                          <a:latin typeface="+mn-lt"/>
-                          <a:ea typeface="+mn-ea"/>
-                          <a:cs typeface="+mn-cs"/>
-                        </a:rPr>
-                        <a:t>적용 시 </a:t>
-                      </a:r>
-                      <a:r>
-                        <a:rPr kumimoji="1" lang="en-US" altLang="ko-KR" sz="1000" b="0" i="0" u="none" strike="noStrike" kern="1200" cap="none" normalizeH="0" baseline="0" smtClean="0">
-                          <a:ln>
-                            <a:noFill/>
-                          </a:ln>
-                          <a:solidFill>
-                            <a:schemeClr val="tx1"/>
-                          </a:solidFill>
-                          <a:effectLst/>
-                          <a:latin typeface="+mn-lt"/>
-                          <a:ea typeface="+mn-ea"/>
-                          <a:cs typeface="+mn-cs"/>
-                        </a:rPr>
-                        <a:t>AutoSar </a:t>
-                      </a:r>
-                      <a:r>
-                        <a:rPr kumimoji="1" lang="ko-KR" altLang="en-US" sz="1000" b="0" i="0" u="none" strike="noStrike" kern="1200" cap="none" normalizeH="0" baseline="0" smtClean="0">
-                          <a:ln>
-                            <a:noFill/>
-                          </a:ln>
-                          <a:solidFill>
-                            <a:schemeClr val="tx1"/>
-                          </a:solidFill>
-                          <a:effectLst/>
-                          <a:latin typeface="+mn-lt"/>
-                          <a:ea typeface="+mn-ea"/>
-                          <a:cs typeface="+mn-cs"/>
-                        </a:rPr>
-                        <a:t>적용 및 그에따른 개발 기간</a:t>
-                      </a:r>
-                      <a:r>
-                        <a:rPr kumimoji="1" lang="en-US" altLang="ko-KR" sz="1000" b="0" i="0" u="none" strike="noStrike" kern="1200" cap="none" normalizeH="0" baseline="0" smtClean="0">
-                          <a:ln>
-                            <a:noFill/>
-                          </a:ln>
-                          <a:solidFill>
-                            <a:schemeClr val="tx1"/>
-                          </a:solidFill>
-                          <a:effectLst/>
-                          <a:latin typeface="+mn-lt"/>
-                          <a:ea typeface="+mn-ea"/>
-                          <a:cs typeface="+mn-cs"/>
-                        </a:rPr>
-                        <a:t>/</a:t>
-                      </a:r>
-                      <a:r>
-                        <a:rPr kumimoji="1" lang="ko-KR" altLang="en-US" sz="1000" b="0" i="0" u="none" strike="noStrike" kern="1200" cap="none" normalizeH="0" baseline="0" smtClean="0">
-                          <a:ln>
-                            <a:noFill/>
-                          </a:ln>
-                          <a:solidFill>
-                            <a:schemeClr val="tx1"/>
-                          </a:solidFill>
-                          <a:effectLst/>
-                          <a:latin typeface="+mn-lt"/>
-                          <a:ea typeface="+mn-ea"/>
-                          <a:cs typeface="+mn-cs"/>
-                        </a:rPr>
-                        <a:t>투자</a:t>
-                      </a:r>
-                      <a:endParaRPr kumimoji="1" lang="en-US" altLang="ko-KR" sz="1000" b="0" i="0" u="none" strike="noStrike" kern="1200" cap="none" normalizeH="0" baseline="0" smtClean="0">
-                        <a:ln>
-                          <a:noFill/>
-                        </a:ln>
-                        <a:solidFill>
-                          <a:schemeClr val="tx1"/>
-                        </a:solidFill>
-                        <a:effectLst/>
-                        <a:latin typeface="+mn-lt"/>
-                        <a:ea typeface="+mn-ea"/>
-                        <a:cs typeface="+mn-cs"/>
-                      </a:endParaRPr>
-                    </a:p>
-                    <a:p>
-                      <a:pPr marL="0" marR="0" lvl="0" indent="0" algn="l" defTabSz="914400" rtl="0" eaLnBrk="1" fontAlgn="base" latinLnBrk="1" hangingPunct="1">
-                        <a:lnSpc>
-                          <a:spcPct val="100000"/>
-                        </a:lnSpc>
-                        <a:spcBef>
-                          <a:spcPct val="20000"/>
-                        </a:spcBef>
-                        <a:spcAft>
-                          <a:spcPct val="0"/>
-                        </a:spcAft>
-                        <a:buClr>
-                          <a:srgbClr val="FF0000"/>
-                        </a:buClr>
-                        <a:buSzTx/>
-                        <a:buFont typeface="Wingdings" pitchFamily="2" charset="2"/>
-                        <a:buNone/>
-                        <a:tabLst/>
-                        <a:defRPr/>
-                      </a:pPr>
-                      <a:r>
-                        <a:rPr kumimoji="1" lang="en-US" altLang="ko-KR" sz="1000" b="0" i="0" u="none" strike="noStrike" kern="1200" cap="none" normalizeH="0" baseline="0" smtClean="0">
-                          <a:ln>
-                            <a:noFill/>
-                          </a:ln>
-                          <a:solidFill>
-                            <a:schemeClr val="tx1"/>
-                          </a:solidFill>
-                          <a:effectLst/>
-                          <a:latin typeface="+mn-lt"/>
-                          <a:ea typeface="+mn-ea"/>
-                          <a:cs typeface="+mn-cs"/>
-                        </a:rPr>
-                        <a:t>       </a:t>
-                      </a:r>
-                      <a:r>
-                        <a:rPr kumimoji="1" lang="ko-KR" altLang="en-US" sz="1000" b="0" i="0" u="none" strike="noStrike" kern="1200" cap="none" normalizeH="0" baseline="0" smtClean="0">
-                          <a:ln>
-                            <a:noFill/>
-                          </a:ln>
-                          <a:solidFill>
-                            <a:schemeClr val="tx1"/>
-                          </a:solidFill>
-                          <a:effectLst/>
-                          <a:latin typeface="+mn-lt"/>
-                          <a:ea typeface="+mn-ea"/>
-                          <a:cs typeface="+mn-cs"/>
-                        </a:rPr>
-                        <a:t>비 발생 내용 공유 完</a:t>
-                      </a:r>
-                      <a:endParaRPr kumimoji="1" lang="en-US" altLang="ko-KR" sz="1000" b="0" i="0" u="none" strike="noStrike" kern="1200" cap="none" normalizeH="0" baseline="0" smtClean="0">
-                        <a:ln>
-                          <a:noFill/>
-                        </a:ln>
-                        <a:solidFill>
-                          <a:schemeClr val="tx1"/>
-                        </a:solidFill>
-                        <a:effectLst/>
-                        <a:latin typeface="+mn-lt"/>
-                        <a:ea typeface="+mn-ea"/>
-                        <a:cs typeface="+mn-cs"/>
-                      </a:endParaRPr>
-                    </a:p>
-                    <a:p>
-                      <a:pPr marL="0" marR="0" lvl="0" indent="0" algn="l" defTabSz="914400" rtl="0" eaLnBrk="1" fontAlgn="base" latinLnBrk="1" hangingPunct="1">
-                        <a:lnSpc>
-                          <a:spcPct val="100000"/>
-                        </a:lnSpc>
-                        <a:spcBef>
-                          <a:spcPct val="20000"/>
-                        </a:spcBef>
-                        <a:spcAft>
-                          <a:spcPct val="0"/>
-                        </a:spcAft>
-                        <a:buClr>
-                          <a:srgbClr val="FF0000"/>
-                        </a:buClr>
-                        <a:buSzTx/>
-                        <a:buFont typeface="Wingdings" pitchFamily="2" charset="2"/>
-                        <a:buNone/>
-                        <a:tabLst/>
-                        <a:defRPr/>
-                      </a:pPr>
-                      <a:r>
-                        <a:rPr kumimoji="1" lang="en-US" altLang="ko-KR" sz="1000" b="0" i="0" u="none" strike="noStrike" kern="1200" cap="none" normalizeH="0" baseline="0" smtClean="0">
-                          <a:ln>
-                            <a:noFill/>
-                          </a:ln>
-                          <a:solidFill>
-                            <a:schemeClr val="tx1"/>
-                          </a:solidFill>
-                          <a:effectLst/>
-                          <a:latin typeface="+mn-lt"/>
-                          <a:ea typeface="+mn-ea"/>
-                          <a:cs typeface="+mn-cs"/>
-                        </a:rPr>
-                        <a:t>     : </a:t>
-                      </a:r>
-                      <a:r>
-                        <a:rPr kumimoji="1" lang="ko-KR" altLang="en-US" sz="1000" b="0" i="0" u="none" strike="noStrike" kern="1200" cap="none" normalizeH="0" baseline="0" smtClean="0">
-                          <a:ln>
-                            <a:noFill/>
-                          </a:ln>
-                          <a:solidFill>
-                            <a:schemeClr val="tx1"/>
-                          </a:solidFill>
-                          <a:effectLst/>
-                          <a:latin typeface="+mn-lt"/>
-                          <a:ea typeface="+mn-ea"/>
-                          <a:cs typeface="+mn-cs"/>
-                        </a:rPr>
-                        <a:t>정식 </a:t>
-                      </a:r>
-                      <a:r>
-                        <a:rPr kumimoji="1" lang="en-US" altLang="ko-KR" sz="1000" b="0" i="0" u="none" strike="noStrike" kern="1200" cap="none" normalizeH="0" baseline="0" smtClean="0">
-                          <a:ln>
-                            <a:noFill/>
-                          </a:ln>
-                          <a:solidFill>
-                            <a:schemeClr val="tx1"/>
-                          </a:solidFill>
-                          <a:effectLst/>
-                          <a:latin typeface="+mn-lt"/>
-                          <a:ea typeface="+mn-ea"/>
-                          <a:cs typeface="+mn-cs"/>
-                        </a:rPr>
-                        <a:t>OTA </a:t>
-                      </a:r>
-                      <a:r>
-                        <a:rPr kumimoji="1" lang="ko-KR" altLang="en-US" sz="1000" b="0" i="0" u="none" strike="noStrike" kern="1200" cap="none" normalizeH="0" baseline="0" smtClean="0">
-                          <a:ln>
-                            <a:noFill/>
-                          </a:ln>
-                          <a:solidFill>
-                            <a:schemeClr val="tx1"/>
-                          </a:solidFill>
-                          <a:effectLst/>
-                          <a:latin typeface="+mn-lt"/>
-                          <a:ea typeface="+mn-ea"/>
-                          <a:cs typeface="+mn-cs"/>
-                        </a:rPr>
-                        <a:t>적용 안하나</a:t>
-                      </a:r>
-                      <a:r>
-                        <a:rPr kumimoji="1" lang="en-US" altLang="ko-KR" sz="1000" b="0" i="0" u="none" strike="noStrike" kern="1200" cap="none" normalizeH="0" baseline="0" smtClean="0">
-                          <a:ln>
-                            <a:noFill/>
-                          </a:ln>
-                          <a:solidFill>
-                            <a:schemeClr val="tx1"/>
-                          </a:solidFill>
-                          <a:effectLst/>
-                          <a:latin typeface="+mn-lt"/>
-                          <a:ea typeface="+mn-ea"/>
-                          <a:cs typeface="+mn-cs"/>
-                        </a:rPr>
-                        <a:t>, Secure Flash 1.0 rule </a:t>
-                      </a:r>
-                      <a:r>
-                        <a:rPr kumimoji="1" lang="ko-KR" altLang="en-US" sz="1000" b="0" i="0" u="none" strike="noStrike" kern="1200" cap="none" normalizeH="0" baseline="0" smtClean="0">
-                          <a:ln>
-                            <a:noFill/>
-                          </a:ln>
-                          <a:solidFill>
-                            <a:schemeClr val="tx1"/>
-                          </a:solidFill>
-                          <a:effectLst/>
-                          <a:latin typeface="+mn-lt"/>
-                          <a:ea typeface="+mn-ea"/>
-                          <a:cs typeface="+mn-cs"/>
-                        </a:rPr>
-                        <a:t>기반 업데이트  </a:t>
-                      </a:r>
-                      <a:endParaRPr kumimoji="1" lang="en-US" altLang="ko-KR" sz="1000" b="0" i="0" u="none" strike="noStrike" kern="1200" cap="none" normalizeH="0" baseline="0" smtClean="0">
-                        <a:ln>
-                          <a:noFill/>
-                        </a:ln>
-                        <a:solidFill>
-                          <a:schemeClr val="tx1"/>
-                        </a:solidFill>
-                        <a:effectLst/>
-                        <a:latin typeface="+mn-lt"/>
-                        <a:ea typeface="+mn-ea"/>
-                        <a:cs typeface="+mn-cs"/>
-                      </a:endParaRPr>
-                    </a:p>
-                    <a:p>
-                      <a:pPr marL="0" marR="0" lvl="0" indent="0" algn="l" defTabSz="914400" rtl="0" eaLnBrk="1" fontAlgn="base" latinLnBrk="1" hangingPunct="1">
-                        <a:lnSpc>
-                          <a:spcPct val="100000"/>
-                        </a:lnSpc>
-                        <a:spcBef>
-                          <a:spcPct val="20000"/>
-                        </a:spcBef>
-                        <a:spcAft>
-                          <a:spcPct val="0"/>
-                        </a:spcAft>
-                        <a:buClr>
-                          <a:srgbClr val="FF0000"/>
-                        </a:buClr>
-                        <a:buSzTx/>
-                        <a:buFont typeface="Wingdings" pitchFamily="2" charset="2"/>
-                        <a:buNone/>
-                        <a:tabLst/>
-                        <a:defRPr/>
-                      </a:pPr>
-                      <a:r>
-                        <a:rPr kumimoji="1" lang="en-US" altLang="ko-KR" sz="1000" b="0" i="0" u="none" strike="noStrike" kern="1200" cap="none" normalizeH="0" baseline="0" smtClean="0">
-                          <a:ln>
-                            <a:noFill/>
-                          </a:ln>
-                          <a:solidFill>
-                            <a:schemeClr val="tx1"/>
-                          </a:solidFill>
-                          <a:effectLst/>
-                          <a:latin typeface="+mn-lt"/>
-                          <a:ea typeface="+mn-ea"/>
-                          <a:cs typeface="+mn-cs"/>
-                        </a:rPr>
-                        <a:t>       </a:t>
-                      </a:r>
-                      <a:r>
-                        <a:rPr kumimoji="1" lang="ko-KR" altLang="en-US" sz="1000" b="0" i="0" u="none" strike="noStrike" kern="1200" cap="none" normalizeH="0" baseline="0" smtClean="0">
-                          <a:ln>
-                            <a:noFill/>
-                          </a:ln>
-                          <a:solidFill>
-                            <a:schemeClr val="tx1"/>
-                          </a:solidFill>
-                          <a:effectLst/>
-                          <a:latin typeface="+mn-lt"/>
-                          <a:ea typeface="+mn-ea"/>
-                          <a:cs typeface="+mn-cs"/>
-                        </a:rPr>
-                        <a:t>가능 토록 제안 完</a:t>
-                      </a:r>
-                      <a:endParaRPr kumimoji="1" lang="en-US" altLang="ko-KR" sz="1000" b="0" i="0" u="none" strike="noStrike" kern="1200" cap="none" normalizeH="0" baseline="0" smtClean="0">
-                        <a:ln>
-                          <a:noFill/>
-                        </a:ln>
-                        <a:solidFill>
-                          <a:schemeClr val="tx1"/>
-                        </a:solidFill>
-                        <a:effectLst/>
-                        <a:latin typeface="+mn-lt"/>
-                        <a:ea typeface="+mn-ea"/>
-                        <a:cs typeface="+mn-cs"/>
-                      </a:endParaRPr>
-                    </a:p>
-                    <a:p>
-                      <a:pPr marL="0" marR="0" lvl="0" indent="0" algn="l" defTabSz="914400" rtl="0" eaLnBrk="1" fontAlgn="base" latinLnBrk="1" hangingPunct="1">
-                        <a:lnSpc>
-                          <a:spcPct val="100000"/>
-                        </a:lnSpc>
-                        <a:spcBef>
-                          <a:spcPct val="20000"/>
-                        </a:spcBef>
-                        <a:spcAft>
-                          <a:spcPct val="0"/>
-                        </a:spcAft>
-                        <a:buClr>
-                          <a:srgbClr val="FF0000"/>
-                        </a:buClr>
-                        <a:buSzTx/>
-                        <a:buFont typeface="Wingdings" pitchFamily="2" charset="2"/>
-                        <a:buNone/>
-                        <a:tabLst/>
-                        <a:defRPr/>
-                      </a:pPr>
-                      <a:r>
-                        <a:rPr kumimoji="1" lang="en-US" altLang="ko-KR" sz="1000" b="0" i="0" u="none" strike="noStrike" kern="1200" cap="none" normalizeH="0" baseline="0" smtClean="0">
-                          <a:ln>
-                            <a:noFill/>
-                          </a:ln>
-                          <a:solidFill>
-                            <a:schemeClr val="tx1"/>
-                          </a:solidFill>
-                          <a:effectLst/>
-                          <a:latin typeface="+mn-lt"/>
-                          <a:ea typeface="+mn-ea"/>
-                          <a:cs typeface="+mn-cs"/>
-                        </a:rPr>
-                        <a:t>    </a:t>
-                      </a:r>
-                      <a:r>
-                        <a:rPr kumimoji="1" lang="en-US" altLang="ko-KR" sz="1000" b="0" i="0" u="none" strike="noStrike" kern="1200" cap="none" normalizeH="0" baseline="0" smtClean="0">
-                          <a:ln>
-                            <a:noFill/>
-                          </a:ln>
-                          <a:solidFill>
-                            <a:schemeClr val="tx1"/>
-                          </a:solidFill>
-                          <a:effectLst/>
-                          <a:latin typeface="+mn-lt"/>
-                          <a:ea typeface="+mn-ea"/>
-                          <a:cs typeface="+mn-cs"/>
-                          <a:sym typeface="Wingdings" panose="05000000000000000000" pitchFamily="2" charset="2"/>
-                        </a:rPr>
-                        <a:t> QV </a:t>
-                      </a:r>
-                      <a:r>
-                        <a:rPr kumimoji="1" lang="ko-KR" altLang="en-US" sz="1000" b="0" i="0" u="none" strike="noStrike" kern="1200" cap="none" normalizeH="0" baseline="0" smtClean="0">
-                          <a:ln>
-                            <a:noFill/>
-                          </a:ln>
-                          <a:solidFill>
-                            <a:schemeClr val="tx1"/>
-                          </a:solidFill>
-                          <a:effectLst/>
-                          <a:latin typeface="+mn-lt"/>
-                          <a:ea typeface="+mn-ea"/>
-                          <a:cs typeface="+mn-cs"/>
-                          <a:sym typeface="Wingdings" panose="05000000000000000000" pitchFamily="2" charset="2"/>
-                        </a:rPr>
-                        <a:t>프로젝트의 일정 긴급함에 따라 빠른 회신 요청 하였으며</a:t>
-                      </a:r>
-                      <a:r>
-                        <a:rPr kumimoji="1" lang="en-US" altLang="ko-KR" sz="1000" b="0" i="0" u="none" strike="noStrike" kern="1200" cap="none" normalizeH="0" baseline="0" smtClean="0">
-                          <a:ln>
-                            <a:noFill/>
-                          </a:ln>
-                          <a:solidFill>
-                            <a:schemeClr val="tx1"/>
-                          </a:solidFill>
-                          <a:effectLst/>
-                          <a:latin typeface="+mn-lt"/>
-                          <a:ea typeface="+mn-ea"/>
-                          <a:cs typeface="+mn-cs"/>
-                          <a:sym typeface="Wingdings" panose="05000000000000000000" pitchFamily="2" charset="2"/>
-                        </a:rPr>
-                        <a:t>,</a:t>
-                      </a:r>
-                    </a:p>
-                    <a:p>
-                      <a:pPr marL="0" marR="0" lvl="0" indent="0" algn="l" defTabSz="914400" rtl="0" eaLnBrk="1" fontAlgn="base" latinLnBrk="1" hangingPunct="1">
-                        <a:lnSpc>
-                          <a:spcPct val="100000"/>
-                        </a:lnSpc>
-                        <a:spcBef>
-                          <a:spcPct val="20000"/>
-                        </a:spcBef>
-                        <a:spcAft>
-                          <a:spcPct val="0"/>
-                        </a:spcAft>
-                        <a:buClr>
-                          <a:srgbClr val="FF0000"/>
-                        </a:buClr>
-                        <a:buSzTx/>
-                        <a:buFont typeface="Wingdings" pitchFamily="2" charset="2"/>
-                        <a:buNone/>
-                        <a:tabLst/>
-                        <a:defRPr/>
-                      </a:pPr>
-                      <a:r>
-                        <a:rPr kumimoji="1" lang="en-US" altLang="ko-KR" sz="1000" b="0" i="0" u="none" strike="noStrike" kern="1200" cap="none" normalizeH="0" baseline="0" smtClean="0">
-                          <a:ln>
-                            <a:noFill/>
-                          </a:ln>
-                          <a:solidFill>
-                            <a:schemeClr val="tx1"/>
-                          </a:solidFill>
-                          <a:effectLst/>
-                          <a:latin typeface="+mn-lt"/>
-                          <a:ea typeface="+mn-ea"/>
-                          <a:cs typeface="+mn-cs"/>
-                          <a:sym typeface="Wingdings" panose="05000000000000000000" pitchFamily="2" charset="2"/>
-                        </a:rPr>
-                        <a:t>        </a:t>
-                      </a:r>
-                      <a:r>
-                        <a:rPr kumimoji="1" lang="ko-KR" altLang="en-US" sz="1000" b="0" i="0" u="none" strike="noStrike" kern="1200" cap="none" normalizeH="0" baseline="0" smtClean="0">
-                          <a:ln>
-                            <a:noFill/>
-                          </a:ln>
-                          <a:solidFill>
-                            <a:schemeClr val="tx1"/>
-                          </a:solidFill>
-                          <a:effectLst/>
-                          <a:latin typeface="+mn-lt"/>
-                          <a:ea typeface="+mn-ea"/>
-                          <a:cs typeface="+mn-cs"/>
-                          <a:sym typeface="Wingdings" panose="05000000000000000000" pitchFamily="2" charset="2"/>
-                        </a:rPr>
-                        <a:t>금주 중 확정 하여 회신준다고 함 </a:t>
-                      </a:r>
-                      <a:r>
-                        <a:rPr kumimoji="1" lang="en-US" altLang="ko-KR" sz="1000" b="0" i="0" u="none" strike="noStrike" kern="1200" cap="none" normalizeH="0" baseline="0" smtClean="0">
-                          <a:ln>
-                            <a:noFill/>
-                          </a:ln>
-                          <a:solidFill>
-                            <a:schemeClr val="tx1"/>
-                          </a:solidFill>
-                          <a:effectLst/>
-                          <a:latin typeface="+mn-lt"/>
-                          <a:ea typeface="+mn-ea"/>
-                          <a:cs typeface="+mn-cs"/>
-                          <a:sym typeface="Wingdings" panose="05000000000000000000" pitchFamily="2" charset="2"/>
-                        </a:rPr>
-                        <a:t>(</a:t>
-                      </a:r>
-                      <a:r>
-                        <a:rPr kumimoji="1" lang="ko-KR" altLang="en-US" sz="1000" b="0" i="0" u="none" strike="noStrike" kern="1200" cap="none" normalizeH="0" baseline="0" smtClean="0">
-                          <a:ln>
-                            <a:noFill/>
-                          </a:ln>
-                          <a:solidFill>
-                            <a:schemeClr val="tx1"/>
-                          </a:solidFill>
-                          <a:effectLst/>
-                          <a:latin typeface="+mn-lt"/>
-                          <a:ea typeface="+mn-ea"/>
-                          <a:cs typeface="+mn-cs"/>
-                          <a:sym typeface="Wingdings" panose="05000000000000000000" pitchFamily="2" charset="2"/>
-                        </a:rPr>
-                        <a:t>공조시스템 한별 책임</a:t>
-                      </a:r>
-                      <a:r>
-                        <a:rPr kumimoji="1" lang="en-US" altLang="ko-KR" sz="1000" b="0" i="0" u="none" strike="noStrike" kern="1200" cap="none" normalizeH="0" baseline="0" smtClean="0">
-                          <a:ln>
-                            <a:noFill/>
-                          </a:ln>
-                          <a:solidFill>
-                            <a:schemeClr val="tx1"/>
-                          </a:solidFill>
-                          <a:effectLst/>
-                          <a:latin typeface="+mn-lt"/>
-                          <a:ea typeface="+mn-ea"/>
-                          <a:cs typeface="+mn-cs"/>
-                          <a:sym typeface="Wingdings" panose="05000000000000000000" pitchFamily="2" charset="2"/>
-                        </a:rPr>
-                        <a:t>)</a:t>
-                      </a:r>
-                      <a:endParaRPr kumimoji="1" lang="en-US" altLang="ko-KR" sz="1000" b="0" i="0" u="none" strike="noStrike" kern="1200" cap="none" normalizeH="0" baseline="0" smtClean="0">
-                        <a:ln>
-                          <a:noFill/>
-                        </a:ln>
-                        <a:solidFill>
-                          <a:schemeClr val="tx1"/>
-                        </a:solidFill>
-                        <a:effectLst/>
-                        <a:latin typeface="+mn-lt"/>
-                        <a:ea typeface="+mn-ea"/>
-                        <a:cs typeface="+mn-cs"/>
-                      </a:endParaRPr>
-                    </a:p>
-                    <a:p>
-                      <a:pPr marL="0" marR="0" lvl="0" indent="0" algn="l" defTabSz="914400" rtl="0" eaLnBrk="1" fontAlgn="base" latinLnBrk="1" hangingPunct="1">
-                        <a:lnSpc>
-                          <a:spcPct val="100000"/>
-                        </a:lnSpc>
-                        <a:spcBef>
-                          <a:spcPct val="20000"/>
-                        </a:spcBef>
-                        <a:spcAft>
-                          <a:spcPct val="0"/>
-                        </a:spcAft>
-                        <a:buClr>
-                          <a:srgbClr val="FF0000"/>
-                        </a:buClr>
-                        <a:buSzTx/>
-                        <a:buFont typeface="Wingdings" pitchFamily="2" charset="2"/>
-                        <a:buNone/>
-                        <a:tabLst/>
-                        <a:defRPr/>
-                      </a:pPr>
-                      <a:r>
-                        <a:rPr kumimoji="1" lang="en-US" altLang="ko-KR" sz="1000" b="0" i="0" u="none" strike="noStrike" kern="1200" cap="none" normalizeH="0" baseline="0" smtClean="0">
-                          <a:ln>
-                            <a:noFill/>
-                          </a:ln>
-                          <a:solidFill>
-                            <a:schemeClr val="tx1"/>
-                          </a:solidFill>
-                          <a:effectLst/>
-                          <a:latin typeface="+mn-lt"/>
-                          <a:ea typeface="+mn-ea"/>
-                          <a:cs typeface="+mn-cs"/>
-                        </a:rPr>
-                        <a:t>     </a:t>
+                        <a:t> 튜닝 진행 완료</a:t>
                       </a:r>
                       <a:endParaRPr kumimoji="1" lang="en-US" altLang="ko-KR" sz="1000" b="0" i="0" u="none" strike="noStrike" kern="1200" cap="none" normalizeH="0" baseline="0" dirty="0" smtClean="0">
                         <a:ln>
@@ -18459,7 +17587,7 @@
                         <a:defRPr/>
                       </a:pPr>
                       <a:r>
-                        <a:rPr kumimoji="1" lang="en-US" altLang="ko-KR" sz="1000" b="0" i="0" u="none" strike="noStrike" kern="1200" cap="none" normalizeH="0" baseline="0" smtClean="0">
+                        <a:rPr kumimoji="1" lang="en-US" altLang="ko-KR" sz="1000" b="0" i="0" u="none" strike="noStrike" kern="1200" cap="none" normalizeH="0" baseline="0" dirty="0" smtClean="0">
                           <a:ln>
                             <a:noFill/>
                           </a:ln>
@@ -18471,7 +17599,37 @@
                           <a:ea typeface="+mn-ea"/>
                           <a:cs typeface="+mn-cs"/>
                         </a:rPr>
-                        <a:t>3. </a:t>
+                        <a:t>   - </a:t>
+                      </a:r>
+                      <a:r>
+                        <a:rPr kumimoji="1" lang="ko-KR" altLang="en-US" sz="1000" b="0" i="0" u="none" strike="noStrike" kern="1200" cap="none" normalizeH="0" baseline="0" dirty="0" err="1" smtClean="0">
+                          <a:ln>
+                            <a:noFill/>
+                          </a:ln>
+                          <a:solidFill>
+                            <a:schemeClr val="tx1"/>
+                          </a:solidFill>
+                          <a:effectLst/>
+                          <a:latin typeface="+mn-lt"/>
+                          <a:ea typeface="+mn-ea"/>
+                          <a:cs typeface="+mn-cs"/>
+                        </a:rPr>
+                        <a:t>로직</a:t>
+                      </a:r>
+                      <a:r>
+                        <a:rPr kumimoji="1" lang="ko-KR" altLang="en-US" sz="1000" b="0" i="0" u="none" strike="noStrike" kern="1200" cap="none" normalizeH="0" baseline="0" dirty="0" smtClean="0">
+                          <a:ln>
+                            <a:noFill/>
+                          </a:ln>
+                          <a:solidFill>
+                            <a:schemeClr val="tx1"/>
+                          </a:solidFill>
+                          <a:effectLst/>
+                          <a:latin typeface="+mn-lt"/>
+                          <a:ea typeface="+mn-ea"/>
+                          <a:cs typeface="+mn-cs"/>
+                        </a:rPr>
+                        <a:t> 체크리스트에 따른 시험 진행</a:t>
                       </a:r>
                       <a:r>
                         <a:rPr kumimoji="1" lang="en-US" altLang="ko-KR" sz="1000" b="0" i="0" u="none" strike="noStrike" kern="1200" cap="none" normalizeH="0" baseline="0" dirty="0" smtClean="0">
@@ -18486,7 +17644,7 @@
                           <a:ea typeface="+mn-ea"/>
                           <a:cs typeface="+mn-cs"/>
                         </a:rPr>
-                        <a:t>SPQA </a:t>
+                        <a:t> </a:t>
                       </a:r>
                       <a:r>
                         <a:rPr kumimoji="1" lang="ko-KR" altLang="en-US" sz="1000" b="0" i="0" u="none" strike="noStrike" kern="1200" cap="none" normalizeH="0" baseline="0" dirty="0" smtClean="0">
@@ -18501,7 +17659,7 @@
                           <a:ea typeface="+mn-ea"/>
                           <a:cs typeface="+mn-cs"/>
                         </a:rPr>
-                        <a:t>육성 프로젝트 진행</a:t>
+                        <a:t>완료</a:t>
                       </a:r>
                       <a:endParaRPr kumimoji="1" lang="en-US" altLang="ko-KR" sz="1000" b="0" i="0" u="none" strike="noStrike" kern="1200" cap="none" normalizeH="0" baseline="0" dirty="0" smtClean="0">
                         <a:ln>
@@ -18537,7 +17695,7 @@
                         <a:defRPr/>
                       </a:pPr>
                       <a:r>
-                        <a:rPr kumimoji="1" lang="en-US" altLang="ko-KR" sz="1000" b="0" i="0" u="none" strike="noStrike" kern="1200" cap="none" normalizeH="0" baseline="0" smtClean="0">
+                        <a:rPr kumimoji="1" lang="en-US" altLang="ko-KR" sz="1000" b="0" i="0" u="none" strike="noStrike" kern="1200" cap="none" normalizeH="0" baseline="0" dirty="0" smtClean="0">
                           <a:ln>
                             <a:noFill/>
                           </a:ln>
@@ -18549,10 +17707,10 @@
                           <a:ea typeface="+mn-ea"/>
                           <a:cs typeface="+mn-cs"/>
                         </a:rPr>
-                        <a:t>   - SWE. 1, 2, 3 </a:t>
-                      </a:r>
-                      <a:r>
-                        <a:rPr kumimoji="1" lang="ko-KR" altLang="en-US" sz="1000" b="0" i="0" u="none" strike="noStrike" kern="1200" cap="none" normalizeH="0" baseline="0" smtClean="0">
+                        <a:t>   - </a:t>
+                      </a:r>
+                      <a:r>
+                        <a:rPr kumimoji="1" lang="ko-KR" altLang="en-US" sz="1000" b="0" i="0" u="none" strike="noStrike" kern="1200" cap="none" normalizeH="0" baseline="0" dirty="0" smtClean="0">
                           <a:ln>
                             <a:noFill/>
                           </a:ln>
@@ -18564,10 +17722,10 @@
                           <a:ea typeface="+mn-ea"/>
                           <a:cs typeface="+mn-cs"/>
                         </a:rPr>
-                        <a:t>산출물 작성 및 검토</a:t>
-                      </a:r>
-                      <a:r>
-                        <a:rPr kumimoji="1" lang="en-US" altLang="ko-KR" sz="1000" b="0" i="0" u="none" strike="noStrike" kern="1200" cap="none" normalizeH="0" baseline="0" smtClean="0">
+                        <a:t>설계변경 진행 </a:t>
+                      </a:r>
+                      <a:r>
+                        <a:rPr kumimoji="1" lang="en-US" altLang="ko-KR" sz="1000" b="0" i="0" u="none" strike="noStrike" kern="1200" cap="none" normalizeH="0" baseline="0" dirty="0" smtClean="0">
                           <a:ln>
                             <a:noFill/>
                           </a:ln>
@@ -18579,10 +17737,10 @@
                           <a:ea typeface="+mn-ea"/>
                           <a:cs typeface="+mn-cs"/>
                         </a:rPr>
-                        <a:t/>
-                      </a:r>
-                      <a:br>
-                        <a:rPr kumimoji="1" lang="en-US" altLang="ko-KR" sz="1000" b="0" i="0" u="none" strike="noStrike" kern="1200" cap="none" normalizeH="0" baseline="0" smtClean="0">
+                        <a:t>(9/10</a:t>
+                      </a:r>
+                      <a:r>
+                        <a:rPr kumimoji="1" lang="ko-KR" altLang="en-US" sz="1000" b="0" i="0" u="none" strike="noStrike" kern="1200" cap="none" normalizeH="0" baseline="0" dirty="0" smtClean="0">
                           <a:ln>
                             <a:noFill/>
                           </a:ln>
@@ -18594,9 +17752,10 @@
                           <a:ea typeface="+mn-ea"/>
                           <a:cs typeface="+mn-cs"/>
                         </a:rPr>
-                      </a:br>
-                      <a:r>
-                        <a:rPr kumimoji="1" lang="en-US" altLang="ko-KR" sz="1000" b="0" i="0" u="none" strike="noStrike" kern="1200" cap="none" normalizeH="0" baseline="0" smtClean="0">
+                        <a:t>일</a:t>
+                      </a:r>
+                      <a:r>
+                        <a:rPr kumimoji="1" lang="en-US" altLang="ko-KR" sz="1000" b="0" i="0" u="none" strike="noStrike" kern="1200" cap="none" normalizeH="0" baseline="0" dirty="0" smtClean="0">
                           <a:ln>
                             <a:noFill/>
                           </a:ln>
@@ -18608,10 +17767,31 @@
                           <a:ea typeface="+mn-ea"/>
                           <a:cs typeface="+mn-cs"/>
                         </a:rPr>
-                        <a:t>   - SW Unit Test Case Specification (80% </a:t>
-                      </a:r>
-                      <a:r>
-                        <a:rPr kumimoji="1" lang="en-US" altLang="ko-KR" sz="1000" b="0" i="0" u="none" strike="noStrike" kern="1200" cap="none" normalizeH="0" baseline="0" smtClean="0">
+                        <a:t>)</a:t>
+                      </a:r>
+                    </a:p>
+                    <a:p>
+                      <a:pPr marL="0" marR="0" lvl="0" indent="0" algn="l" defTabSz="914400" rtl="0" eaLnBrk="1" fontAlgn="base" latinLnBrk="1" hangingPunct="1">
+                        <a:lnSpc>
+                          <a:spcPct val="100000"/>
+                        </a:lnSpc>
+                        <a:spcBef>
+                          <a:spcPct val="20000"/>
+                        </a:spcBef>
+                        <a:spcAft>
+                          <a:spcPct val="0"/>
+                        </a:spcAft>
+                        <a:buClr>
+                          <a:srgbClr val="FF0000"/>
+                        </a:buClr>
+                        <a:buSzTx/>
+                        <a:buFont typeface="Wingdings" pitchFamily="2" charset="2"/>
+                        <a:buNone/>
+                        <a:tabLst/>
+                        <a:defRPr/>
+                      </a:pPr>
+                      <a:r>
+                        <a:rPr kumimoji="1" lang="en-US" altLang="ko-KR" sz="1000" b="0" i="0" u="none" strike="noStrike" kern="1200" cap="none" normalizeH="0" baseline="0" dirty="0" smtClean="0">
                           <a:ln>
                             <a:noFill/>
                           </a:ln>
@@ -18622,12 +17802,11 @@
                           <a:latin typeface="+mn-lt"/>
                           <a:ea typeface="+mn-ea"/>
                           <a:cs typeface="+mn-cs"/>
-                          <a:sym typeface="Wingdings" panose="05000000000000000000" pitchFamily="2" charset="2"/>
-                        </a:rPr>
-                        <a:t> 90%)</a:t>
-                      </a:r>
-                      <a:br>
-                        <a:rPr kumimoji="1" lang="en-US" altLang="ko-KR" sz="1000" b="0" i="0" u="none" strike="noStrike" kern="1200" cap="none" normalizeH="0" baseline="0" smtClean="0">
+                        </a:rPr>
+                        <a:t>  : </a:t>
+                      </a:r>
+                      <a:r>
+                        <a:rPr kumimoji="1" lang="ko-KR" altLang="en-US" sz="1000" b="0" i="0" u="none" strike="noStrike" kern="1200" cap="none" normalizeH="0" baseline="0" dirty="0" smtClean="0">
                           <a:ln>
                             <a:noFill/>
                           </a:ln>
@@ -18638,57 +17817,10 @@
                           <a:latin typeface="+mn-lt"/>
                           <a:ea typeface="+mn-ea"/>
                           <a:cs typeface="+mn-cs"/>
-                          <a:sym typeface="Wingdings" panose="05000000000000000000" pitchFamily="2" charset="2"/>
-                        </a:rPr>
-                      </a:br>
-                      <a:r>
-                        <a:rPr kumimoji="1" lang="en-US" altLang="ko-KR" sz="1000" b="0" i="0" u="none" strike="noStrike" kern="1200" cap="none" normalizeH="0" baseline="0" smtClean="0">
-                          <a:ln>
-                            <a:noFill/>
-                          </a:ln>
-                          <a:solidFill>
-                            <a:schemeClr val="tx1"/>
-                          </a:solidFill>
-                          <a:effectLst/>
-                          <a:latin typeface="+mn-lt"/>
-                          <a:ea typeface="+mn-ea"/>
-                          <a:cs typeface="+mn-cs"/>
-                          <a:sym typeface="Wingdings" panose="05000000000000000000" pitchFamily="2" charset="2"/>
-                        </a:rPr>
-                        <a:t>   - </a:t>
-                      </a:r>
-                      <a:r>
-                        <a:rPr kumimoji="1" lang="en-US" altLang="ko-KR" sz="1000" b="0" i="0" u="none" strike="noStrike" kern="1200" cap="none" normalizeH="0" baseline="0" smtClean="0">
-                          <a:ln>
-                            <a:noFill/>
-                          </a:ln>
-                          <a:solidFill>
-                            <a:schemeClr val="tx1"/>
-                          </a:solidFill>
-                          <a:effectLst/>
-                          <a:latin typeface="+mn-lt"/>
-                          <a:ea typeface="+mn-ea"/>
-                          <a:cs typeface="+mn-cs"/>
-                        </a:rPr>
-                        <a:t>SW Integration Test Case Specification (80% </a:t>
-                      </a:r>
-                      <a:r>
-                        <a:rPr kumimoji="1" lang="en-US" altLang="ko-KR" sz="1000" b="0" i="0" u="none" strike="noStrike" kern="1200" cap="none" normalizeH="0" baseline="0" smtClean="0">
-                          <a:ln>
-                            <a:noFill/>
-                          </a:ln>
-                          <a:solidFill>
-                            <a:schemeClr val="tx1"/>
-                          </a:solidFill>
-                          <a:effectLst/>
-                          <a:latin typeface="+mn-lt"/>
-                          <a:ea typeface="+mn-ea"/>
-                          <a:cs typeface="+mn-cs"/>
-                          <a:sym typeface="Wingdings" panose="05000000000000000000" pitchFamily="2" charset="2"/>
-                        </a:rPr>
-                        <a:t> 90%)</a:t>
-                      </a:r>
-                      <a:endParaRPr kumimoji="1" lang="en-US" altLang="ko-KR" sz="1000" b="0" i="0" u="none" strike="noStrike" kern="1200" cap="none" normalizeH="0" baseline="0" smtClean="0">
+                        </a:rPr>
+                        <a:t>슬로바키아 법인 재고 파악 및 재고 처리 방안 수립 후 결재 상신</a:t>
+                      </a:r>
+                      <a:endParaRPr kumimoji="1" lang="en-US" altLang="ko-KR" sz="1000" b="0" i="0" u="none" strike="noStrike" kern="1200" cap="none" normalizeH="0" baseline="0" dirty="0" smtClean="0">
                         <a:ln>
                           <a:noFill/>
                         </a:ln>
@@ -18722,7 +17854,7 @@
                         <a:defRPr/>
                       </a:pPr>
                       <a:r>
-                        <a:rPr kumimoji="1" lang="en-US" altLang="ko-KR" sz="1000" b="0" i="0" u="none" strike="noStrike" kern="1200" cap="none" normalizeH="0" baseline="0" smtClean="0">
+                        <a:rPr kumimoji="1" lang="en-US" altLang="ko-KR" sz="1000" b="0" i="0" u="none" strike="noStrike" kern="1200" cap="none" normalizeH="0" baseline="0" dirty="0" smtClean="0">
                           <a:ln>
                             <a:noFill/>
                           </a:ln>
@@ -18734,10 +17866,31 @@
                           <a:ea typeface="+mn-ea"/>
                           <a:cs typeface="+mn-cs"/>
                         </a:rPr>
-                        <a:t>   - SW Static Test </a:t>
-                      </a:r>
-                      <a:r>
-                        <a:rPr kumimoji="1" lang="ko-KR" altLang="en-US" sz="1000" b="0" i="0" u="none" strike="noStrike" kern="1200" cap="none" normalizeH="0" baseline="0" smtClean="0">
+                        <a:t>  </a:t>
+                      </a:r>
+                    </a:p>
+                    <a:p>
+                      <a:pPr marL="0" marR="0" lvl="0" indent="0" algn="l" defTabSz="914400" rtl="0" eaLnBrk="1" fontAlgn="base" latinLnBrk="1" hangingPunct="1">
+                        <a:lnSpc>
+                          <a:spcPct val="100000"/>
+                        </a:lnSpc>
+                        <a:spcBef>
+                          <a:spcPct val="20000"/>
+                        </a:spcBef>
+                        <a:spcAft>
+                          <a:spcPct val="0"/>
+                        </a:spcAft>
+                        <a:buClr>
+                          <a:srgbClr val="FF0000"/>
+                        </a:buClr>
+                        <a:buSzTx/>
+                        <a:buFont typeface="Wingdings" pitchFamily="2" charset="2"/>
+                        <a:buNone/>
+                        <a:tabLst/>
+                        <a:defRPr/>
+                      </a:pPr>
+                      <a:r>
+                        <a:rPr kumimoji="1" lang="en-US" altLang="ko-KR" sz="1000" b="0" i="0" u="none" strike="noStrike" kern="1200" cap="none" normalizeH="0" baseline="0" dirty="0" smtClean="0">
                           <a:ln>
                             <a:noFill/>
                           </a:ln>
@@ -18749,9 +17902,24 @@
                           <a:ea typeface="+mn-ea"/>
                           <a:cs typeface="+mn-cs"/>
                         </a:rPr>
-                        <a:t>진행</a:t>
-                      </a:r>
-                      <a:endParaRPr kumimoji="1" lang="en-US" altLang="ko-KR" sz="1000" b="0" i="0" u="none" strike="noStrike" kern="1200" cap="none" normalizeH="0" baseline="0" smtClean="0">
+                        <a:t>2. </a:t>
+                      </a:r>
+                      <a:r>
+                        <a:rPr kumimoji="1" lang="ko-KR" altLang="en-US" sz="1000" b="0" i="0" u="none" strike="noStrike" kern="1200" cap="none" normalizeH="0" baseline="0" dirty="0" smtClean="0">
+                          <a:ln>
+                            <a:noFill/>
+                          </a:ln>
+                          <a:solidFill>
+                            <a:schemeClr val="tx1"/>
+                          </a:solidFill>
+                          <a:effectLst/>
+                          <a:latin typeface="+mn-lt"/>
+                          <a:ea typeface="+mn-ea"/>
+                          <a:cs typeface="+mn-cs"/>
+                        </a:rPr>
+                        <a:t>사이버 보안</a:t>
+                      </a:r>
+                      <a:endParaRPr kumimoji="1" lang="en-US" altLang="ko-KR" sz="1000" b="0" i="0" u="none" strike="noStrike" kern="1200" cap="none" normalizeH="0" baseline="0" dirty="0" smtClean="0">
                         <a:ln>
                           <a:noFill/>
                         </a:ln>
@@ -18785,7 +17953,7 @@
                         <a:defRPr/>
                       </a:pPr>
                       <a:r>
-                        <a:rPr kumimoji="1" lang="en-US" altLang="ko-KR" sz="1000" b="0" i="0" u="none" strike="noStrike" kern="1200" cap="none" normalizeH="0" baseline="0" smtClean="0">
+                        <a:rPr kumimoji="1" lang="en-US" altLang="ko-KR" sz="1000" b="0" i="0" u="none" strike="noStrike" kern="1200" cap="none" normalizeH="0" baseline="0" dirty="0" smtClean="0">
                           <a:ln>
                             <a:noFill/>
                           </a:ln>
@@ -18800,7 +17968,7 @@
                         <a:t>   - </a:t>
                       </a:r>
                       <a:r>
-                        <a:rPr kumimoji="1" lang="ko-KR" altLang="en-US" sz="1000" b="0" i="0" u="none" strike="noStrike" kern="1200" cap="none" normalizeH="0" baseline="0" smtClean="0">
+                        <a:rPr kumimoji="1" lang="ko-KR" altLang="en-US" sz="1000" b="0" i="0" u="none" strike="noStrike" kern="1200" cap="none" normalizeH="0" baseline="0" dirty="0" smtClean="0">
                           <a:ln>
                             <a:noFill/>
                           </a:ln>
@@ -18812,10 +17980,10 @@
                           <a:ea typeface="+mn-ea"/>
                           <a:cs typeface="+mn-cs"/>
                         </a:rPr>
-                        <a:t>씨앤비스 </a:t>
-                      </a:r>
-                      <a:r>
-                        <a:rPr kumimoji="1" lang="en-US" altLang="ko-KR" sz="1000" b="0" i="0" u="none" strike="noStrike" kern="1200" cap="none" normalizeH="0" baseline="0" smtClean="0">
+                        <a:t>사이버 보안 적용 시 </a:t>
+                      </a:r>
+                      <a:r>
+                        <a:rPr kumimoji="1" lang="en-US" altLang="ko-KR" sz="1000" b="0" i="0" u="none" strike="noStrike" kern="1200" cap="none" normalizeH="0" baseline="0" dirty="0" smtClean="0">
                           <a:ln>
                             <a:noFill/>
                           </a:ln>
@@ -18827,10 +17995,10 @@
                           <a:ea typeface="+mn-ea"/>
                           <a:cs typeface="+mn-cs"/>
                         </a:rPr>
-                        <a:t>3</a:t>
-                      </a:r>
-                      <a:r>
-                        <a:rPr kumimoji="1" lang="ko-KR" altLang="en-US" sz="1000" b="0" i="0" u="none" strike="noStrike" kern="1200" cap="none" normalizeH="0" baseline="0" smtClean="0">
+                        <a:t>UPDATE </a:t>
+                      </a:r>
+                      <a:r>
+                        <a:rPr kumimoji="1" lang="ko-KR" altLang="en-US" sz="1000" b="0" i="0" u="none" strike="noStrike" kern="1200" cap="none" normalizeH="0" baseline="0" dirty="0" smtClean="0">
                           <a:ln>
                             <a:noFill/>
                           </a:ln>
@@ -18842,10 +18010,10 @@
                           <a:ea typeface="+mn-ea"/>
                           <a:cs typeface="+mn-cs"/>
                         </a:rPr>
-                        <a:t>차 점검 </a:t>
-                      </a:r>
-                      <a:r>
-                        <a:rPr kumimoji="1" lang="en-US" altLang="ko-KR" sz="1000" b="0" i="0" u="none" strike="noStrike" kern="1200" cap="none" normalizeH="0" baseline="0" smtClean="0">
+                        <a:t>안되는 부분 공조 </a:t>
+                      </a:r>
+                      <a:r>
+                        <a:rPr kumimoji="1" lang="ko-KR" altLang="en-US" sz="1000" b="0" i="0" u="none" strike="noStrike" kern="1200" cap="none" normalizeH="0" baseline="0" dirty="0" err="1" smtClean="0">
                           <a:ln>
                             <a:noFill/>
                           </a:ln>
@@ -18857,7 +18025,1290 @@
                           <a:ea typeface="+mn-ea"/>
                           <a:cs typeface="+mn-cs"/>
                         </a:rPr>
-                        <a:t>8/28</a:t>
+                        <a:t>설계팀으로</a:t>
+                      </a:r>
+                      <a:r>
+                        <a:rPr kumimoji="1" lang="ko-KR" altLang="en-US" sz="1000" b="0" i="0" u="none" strike="noStrike" kern="1200" cap="none" normalizeH="0" baseline="0" dirty="0" smtClean="0">
+                          <a:ln>
+                            <a:noFill/>
+                          </a:ln>
+                          <a:solidFill>
+                            <a:schemeClr val="tx1"/>
+                          </a:solidFill>
+                          <a:effectLst/>
+                          <a:latin typeface="+mn-lt"/>
+                          <a:ea typeface="+mn-ea"/>
+                          <a:cs typeface="+mn-cs"/>
+                        </a:rPr>
+                        <a:t> </a:t>
+                      </a:r>
+                      <a:endParaRPr kumimoji="1" lang="en-US" altLang="ko-KR" sz="1000" b="0" i="0" u="none" strike="noStrike" kern="1200" cap="none" normalizeH="0" baseline="0" dirty="0" smtClean="0">
+                        <a:ln>
+                          <a:noFill/>
+                        </a:ln>
+                        <a:solidFill>
+                          <a:schemeClr val="tx1"/>
+                        </a:solidFill>
+                        <a:effectLst/>
+                        <a:latin typeface="+mn-lt"/>
+                        <a:ea typeface="+mn-ea"/>
+                        <a:cs typeface="+mn-cs"/>
+                      </a:endParaRPr>
+                    </a:p>
+                    <a:p>
+                      <a:pPr marL="0" marR="0" lvl="0" indent="0" algn="l" defTabSz="914400" rtl="0" eaLnBrk="1" fontAlgn="base" latinLnBrk="1" hangingPunct="1">
+                        <a:lnSpc>
+                          <a:spcPct val="100000"/>
+                        </a:lnSpc>
+                        <a:spcBef>
+                          <a:spcPct val="20000"/>
+                        </a:spcBef>
+                        <a:spcAft>
+                          <a:spcPct val="0"/>
+                        </a:spcAft>
+                        <a:buClr>
+                          <a:srgbClr val="FF0000"/>
+                        </a:buClr>
+                        <a:buSzTx/>
+                        <a:buFont typeface="Wingdings" pitchFamily="2" charset="2"/>
+                        <a:buNone/>
+                        <a:tabLst/>
+                        <a:defRPr/>
+                      </a:pPr>
+                      <a:r>
+                        <a:rPr kumimoji="1" lang="en-US" altLang="ko-KR" sz="1000" b="0" i="0" u="none" strike="noStrike" kern="1200" cap="none" normalizeH="0" baseline="0" dirty="0" smtClean="0">
+                          <a:ln>
+                            <a:noFill/>
+                          </a:ln>
+                          <a:solidFill>
+                            <a:schemeClr val="tx1"/>
+                          </a:solidFill>
+                          <a:effectLst/>
+                          <a:latin typeface="+mn-lt"/>
+                          <a:ea typeface="+mn-ea"/>
+                          <a:cs typeface="+mn-cs"/>
+                        </a:rPr>
+                        <a:t>     </a:t>
+                      </a:r>
+                      <a:r>
+                        <a:rPr kumimoji="1" lang="ko-KR" altLang="en-US" sz="1000" b="0" i="0" u="none" strike="noStrike" kern="1200" cap="none" normalizeH="0" baseline="0" dirty="0" smtClean="0">
+                          <a:ln>
+                            <a:noFill/>
+                          </a:ln>
+                          <a:solidFill>
+                            <a:schemeClr val="tx1"/>
+                          </a:solidFill>
+                          <a:effectLst/>
+                          <a:latin typeface="+mn-lt"/>
+                          <a:ea typeface="+mn-ea"/>
+                          <a:cs typeface="+mn-cs"/>
+                        </a:rPr>
+                        <a:t>이슈 제기</a:t>
+                      </a:r>
+                      <a:endParaRPr kumimoji="1" lang="en-US" altLang="ko-KR" sz="1000" b="0" i="0" u="none" strike="noStrike" kern="1200" cap="none" normalizeH="0" baseline="0" dirty="0" smtClean="0">
+                        <a:ln>
+                          <a:noFill/>
+                        </a:ln>
+                        <a:solidFill>
+                          <a:schemeClr val="tx1"/>
+                        </a:solidFill>
+                        <a:effectLst/>
+                        <a:latin typeface="+mn-lt"/>
+                        <a:ea typeface="+mn-ea"/>
+                        <a:cs typeface="+mn-cs"/>
+                      </a:endParaRPr>
+                    </a:p>
+                    <a:p>
+                      <a:pPr marL="0" marR="0" lvl="0" indent="0" algn="l" defTabSz="914400" rtl="0" eaLnBrk="1" fontAlgn="base" latinLnBrk="1" hangingPunct="1">
+                        <a:lnSpc>
+                          <a:spcPct val="100000"/>
+                        </a:lnSpc>
+                        <a:spcBef>
+                          <a:spcPct val="20000"/>
+                        </a:spcBef>
+                        <a:spcAft>
+                          <a:spcPct val="0"/>
+                        </a:spcAft>
+                        <a:buClr>
+                          <a:srgbClr val="FF0000"/>
+                        </a:buClr>
+                        <a:buSzTx/>
+                        <a:buFont typeface="Wingdings" pitchFamily="2" charset="2"/>
+                        <a:buNone/>
+                        <a:tabLst/>
+                        <a:defRPr/>
+                      </a:pPr>
+                      <a:r>
+                        <a:rPr kumimoji="1" lang="en-US" altLang="ko-KR" sz="1000" b="0" i="0" u="none" strike="noStrike" kern="1200" cap="none" normalizeH="0" baseline="0" dirty="0" smtClean="0">
+                          <a:ln>
+                            <a:noFill/>
+                          </a:ln>
+                          <a:solidFill>
+                            <a:schemeClr val="tx1"/>
+                          </a:solidFill>
+                          <a:effectLst/>
+                          <a:latin typeface="+mn-lt"/>
+                          <a:ea typeface="+mn-ea"/>
+                          <a:cs typeface="+mn-cs"/>
+                        </a:rPr>
+                        <a:t>     : </a:t>
+                      </a:r>
+                      <a:r>
+                        <a:rPr kumimoji="1" lang="ko-KR" altLang="en-US" sz="1000" b="0" i="0" u="none" strike="noStrike" kern="1200" cap="none" normalizeH="0" baseline="0" dirty="0" smtClean="0">
+                          <a:ln>
+                            <a:noFill/>
+                          </a:ln>
+                          <a:solidFill>
+                            <a:schemeClr val="tx1"/>
+                          </a:solidFill>
+                          <a:effectLst/>
+                          <a:latin typeface="+mn-lt"/>
+                          <a:ea typeface="+mn-ea"/>
+                          <a:cs typeface="+mn-cs"/>
+                        </a:rPr>
+                        <a:t>정식 </a:t>
+                      </a:r>
+                      <a:r>
+                        <a:rPr kumimoji="1" lang="en-US" altLang="ko-KR" sz="1000" b="0" i="0" u="none" strike="noStrike" kern="1200" cap="none" normalizeH="0" baseline="0" dirty="0" smtClean="0">
+                          <a:ln>
+                            <a:noFill/>
+                          </a:ln>
+                          <a:solidFill>
+                            <a:schemeClr val="tx1"/>
+                          </a:solidFill>
+                          <a:effectLst/>
+                          <a:latin typeface="+mn-lt"/>
+                          <a:ea typeface="+mn-ea"/>
+                          <a:cs typeface="+mn-cs"/>
+                        </a:rPr>
+                        <a:t>OTA </a:t>
+                      </a:r>
+                      <a:r>
+                        <a:rPr kumimoji="1" lang="ko-KR" altLang="en-US" sz="1000" b="0" i="0" u="none" strike="noStrike" kern="1200" cap="none" normalizeH="0" baseline="0" dirty="0" smtClean="0">
+                          <a:ln>
+                            <a:noFill/>
+                          </a:ln>
+                          <a:solidFill>
+                            <a:schemeClr val="tx1"/>
+                          </a:solidFill>
+                          <a:effectLst/>
+                          <a:latin typeface="+mn-lt"/>
+                          <a:ea typeface="+mn-ea"/>
+                          <a:cs typeface="+mn-cs"/>
+                        </a:rPr>
+                        <a:t>적용 시 </a:t>
+                      </a:r>
+                      <a:r>
+                        <a:rPr kumimoji="1" lang="en-US" altLang="ko-KR" sz="1000" b="0" i="0" u="none" strike="noStrike" kern="1200" cap="none" normalizeH="0" baseline="0" dirty="0" err="1" smtClean="0">
+                          <a:ln>
+                            <a:noFill/>
+                          </a:ln>
+                          <a:solidFill>
+                            <a:schemeClr val="tx1"/>
+                          </a:solidFill>
+                          <a:effectLst/>
+                          <a:latin typeface="+mn-lt"/>
+                          <a:ea typeface="+mn-ea"/>
+                          <a:cs typeface="+mn-cs"/>
+                        </a:rPr>
+                        <a:t>AutoSar</a:t>
+                      </a:r>
+                      <a:r>
+                        <a:rPr kumimoji="1" lang="en-US" altLang="ko-KR" sz="1000" b="0" i="0" u="none" strike="noStrike" kern="1200" cap="none" normalizeH="0" baseline="0" dirty="0" smtClean="0">
+                          <a:ln>
+                            <a:noFill/>
+                          </a:ln>
+                          <a:solidFill>
+                            <a:schemeClr val="tx1"/>
+                          </a:solidFill>
+                          <a:effectLst/>
+                          <a:latin typeface="+mn-lt"/>
+                          <a:ea typeface="+mn-ea"/>
+                          <a:cs typeface="+mn-cs"/>
+                        </a:rPr>
+                        <a:t> </a:t>
+                      </a:r>
+                      <a:r>
+                        <a:rPr kumimoji="1" lang="ko-KR" altLang="en-US" sz="1000" b="0" i="0" u="none" strike="noStrike" kern="1200" cap="none" normalizeH="0" baseline="0" dirty="0" smtClean="0">
+                          <a:ln>
+                            <a:noFill/>
+                          </a:ln>
+                          <a:solidFill>
+                            <a:schemeClr val="tx1"/>
+                          </a:solidFill>
+                          <a:effectLst/>
+                          <a:latin typeface="+mn-lt"/>
+                          <a:ea typeface="+mn-ea"/>
+                          <a:cs typeface="+mn-cs"/>
+                        </a:rPr>
+                        <a:t>적용 및 </a:t>
+                      </a:r>
+                      <a:r>
+                        <a:rPr kumimoji="1" lang="ko-KR" altLang="en-US" sz="1000" b="0" i="0" u="none" strike="noStrike" kern="1200" cap="none" normalizeH="0" baseline="0" dirty="0" err="1" smtClean="0">
+                          <a:ln>
+                            <a:noFill/>
+                          </a:ln>
+                          <a:solidFill>
+                            <a:schemeClr val="tx1"/>
+                          </a:solidFill>
+                          <a:effectLst/>
+                          <a:latin typeface="+mn-lt"/>
+                          <a:ea typeface="+mn-ea"/>
+                          <a:cs typeface="+mn-cs"/>
+                        </a:rPr>
+                        <a:t>그에따른</a:t>
+                      </a:r>
+                      <a:r>
+                        <a:rPr kumimoji="1" lang="ko-KR" altLang="en-US" sz="1000" b="0" i="0" u="none" strike="noStrike" kern="1200" cap="none" normalizeH="0" baseline="0" dirty="0" smtClean="0">
+                          <a:ln>
+                            <a:noFill/>
+                          </a:ln>
+                          <a:solidFill>
+                            <a:schemeClr val="tx1"/>
+                          </a:solidFill>
+                          <a:effectLst/>
+                          <a:latin typeface="+mn-lt"/>
+                          <a:ea typeface="+mn-ea"/>
+                          <a:cs typeface="+mn-cs"/>
+                        </a:rPr>
+                        <a:t> 개발 기간</a:t>
+                      </a:r>
+                      <a:r>
+                        <a:rPr kumimoji="1" lang="en-US" altLang="ko-KR" sz="1000" b="0" i="0" u="none" strike="noStrike" kern="1200" cap="none" normalizeH="0" baseline="0" dirty="0" smtClean="0">
+                          <a:ln>
+                            <a:noFill/>
+                          </a:ln>
+                          <a:solidFill>
+                            <a:schemeClr val="tx1"/>
+                          </a:solidFill>
+                          <a:effectLst/>
+                          <a:latin typeface="+mn-lt"/>
+                          <a:ea typeface="+mn-ea"/>
+                          <a:cs typeface="+mn-cs"/>
+                        </a:rPr>
+                        <a:t>/</a:t>
+                      </a:r>
+                      <a:r>
+                        <a:rPr kumimoji="1" lang="ko-KR" altLang="en-US" sz="1000" b="0" i="0" u="none" strike="noStrike" kern="1200" cap="none" normalizeH="0" baseline="0" dirty="0" smtClean="0">
+                          <a:ln>
+                            <a:noFill/>
+                          </a:ln>
+                          <a:solidFill>
+                            <a:schemeClr val="tx1"/>
+                          </a:solidFill>
+                          <a:effectLst/>
+                          <a:latin typeface="+mn-lt"/>
+                          <a:ea typeface="+mn-ea"/>
+                          <a:cs typeface="+mn-cs"/>
+                        </a:rPr>
+                        <a:t>투자</a:t>
+                      </a:r>
+                      <a:endParaRPr kumimoji="1" lang="en-US" altLang="ko-KR" sz="1000" b="0" i="0" u="none" strike="noStrike" kern="1200" cap="none" normalizeH="0" baseline="0" dirty="0" smtClean="0">
+                        <a:ln>
+                          <a:noFill/>
+                        </a:ln>
+                        <a:solidFill>
+                          <a:schemeClr val="tx1"/>
+                        </a:solidFill>
+                        <a:effectLst/>
+                        <a:latin typeface="+mn-lt"/>
+                        <a:ea typeface="+mn-ea"/>
+                        <a:cs typeface="+mn-cs"/>
+                      </a:endParaRPr>
+                    </a:p>
+                    <a:p>
+                      <a:pPr marL="0" marR="0" lvl="0" indent="0" algn="l" defTabSz="914400" rtl="0" eaLnBrk="1" fontAlgn="base" latinLnBrk="1" hangingPunct="1">
+                        <a:lnSpc>
+                          <a:spcPct val="100000"/>
+                        </a:lnSpc>
+                        <a:spcBef>
+                          <a:spcPct val="20000"/>
+                        </a:spcBef>
+                        <a:spcAft>
+                          <a:spcPct val="0"/>
+                        </a:spcAft>
+                        <a:buClr>
+                          <a:srgbClr val="FF0000"/>
+                        </a:buClr>
+                        <a:buSzTx/>
+                        <a:buFont typeface="Wingdings" pitchFamily="2" charset="2"/>
+                        <a:buNone/>
+                        <a:tabLst/>
+                        <a:defRPr/>
+                      </a:pPr>
+                      <a:r>
+                        <a:rPr kumimoji="1" lang="en-US" altLang="ko-KR" sz="1000" b="0" i="0" u="none" strike="noStrike" kern="1200" cap="none" normalizeH="0" baseline="0" dirty="0" smtClean="0">
+                          <a:ln>
+                            <a:noFill/>
+                          </a:ln>
+                          <a:solidFill>
+                            <a:schemeClr val="tx1"/>
+                          </a:solidFill>
+                          <a:effectLst/>
+                          <a:latin typeface="+mn-lt"/>
+                          <a:ea typeface="+mn-ea"/>
+                          <a:cs typeface="+mn-cs"/>
+                        </a:rPr>
+                        <a:t>       </a:t>
+                      </a:r>
+                      <a:r>
+                        <a:rPr kumimoji="1" lang="ko-KR" altLang="en-US" sz="1000" b="0" i="0" u="none" strike="noStrike" kern="1200" cap="none" normalizeH="0" baseline="0" dirty="0" smtClean="0">
+                          <a:ln>
+                            <a:noFill/>
+                          </a:ln>
+                          <a:solidFill>
+                            <a:schemeClr val="tx1"/>
+                          </a:solidFill>
+                          <a:effectLst/>
+                          <a:latin typeface="+mn-lt"/>
+                          <a:ea typeface="+mn-ea"/>
+                          <a:cs typeface="+mn-cs"/>
+                        </a:rPr>
+                        <a:t>비 발생 내용 공유 完</a:t>
+                      </a:r>
+                      <a:endParaRPr kumimoji="1" lang="en-US" altLang="ko-KR" sz="1000" b="0" i="0" u="none" strike="noStrike" kern="1200" cap="none" normalizeH="0" baseline="0" dirty="0" smtClean="0">
+                        <a:ln>
+                          <a:noFill/>
+                        </a:ln>
+                        <a:solidFill>
+                          <a:schemeClr val="tx1"/>
+                        </a:solidFill>
+                        <a:effectLst/>
+                        <a:latin typeface="+mn-lt"/>
+                        <a:ea typeface="+mn-ea"/>
+                        <a:cs typeface="+mn-cs"/>
+                      </a:endParaRPr>
+                    </a:p>
+                    <a:p>
+                      <a:pPr marL="0" marR="0" lvl="0" indent="0" algn="l" defTabSz="914400" rtl="0" eaLnBrk="1" fontAlgn="base" latinLnBrk="1" hangingPunct="1">
+                        <a:lnSpc>
+                          <a:spcPct val="100000"/>
+                        </a:lnSpc>
+                        <a:spcBef>
+                          <a:spcPct val="20000"/>
+                        </a:spcBef>
+                        <a:spcAft>
+                          <a:spcPct val="0"/>
+                        </a:spcAft>
+                        <a:buClr>
+                          <a:srgbClr val="FF0000"/>
+                        </a:buClr>
+                        <a:buSzTx/>
+                        <a:buFont typeface="Wingdings" pitchFamily="2" charset="2"/>
+                        <a:buNone/>
+                        <a:tabLst/>
+                        <a:defRPr/>
+                      </a:pPr>
+                      <a:r>
+                        <a:rPr kumimoji="1" lang="en-US" altLang="ko-KR" sz="1000" b="0" i="0" u="none" strike="noStrike" kern="1200" cap="none" normalizeH="0" baseline="0" dirty="0" smtClean="0">
+                          <a:ln>
+                            <a:noFill/>
+                          </a:ln>
+                          <a:solidFill>
+                            <a:schemeClr val="tx1"/>
+                          </a:solidFill>
+                          <a:effectLst/>
+                          <a:latin typeface="+mn-lt"/>
+                          <a:ea typeface="+mn-ea"/>
+                          <a:cs typeface="+mn-cs"/>
+                        </a:rPr>
+                        <a:t>     : </a:t>
+                      </a:r>
+                      <a:r>
+                        <a:rPr kumimoji="1" lang="ko-KR" altLang="en-US" sz="1000" b="0" i="0" u="none" strike="noStrike" kern="1200" cap="none" normalizeH="0" baseline="0" dirty="0" smtClean="0">
+                          <a:ln>
+                            <a:noFill/>
+                          </a:ln>
+                          <a:solidFill>
+                            <a:schemeClr val="tx1"/>
+                          </a:solidFill>
+                          <a:effectLst/>
+                          <a:latin typeface="+mn-lt"/>
+                          <a:ea typeface="+mn-ea"/>
+                          <a:cs typeface="+mn-cs"/>
+                        </a:rPr>
+                        <a:t>정식 </a:t>
+                      </a:r>
+                      <a:r>
+                        <a:rPr kumimoji="1" lang="en-US" altLang="ko-KR" sz="1000" b="0" i="0" u="none" strike="noStrike" kern="1200" cap="none" normalizeH="0" baseline="0" dirty="0" smtClean="0">
+                          <a:ln>
+                            <a:noFill/>
+                          </a:ln>
+                          <a:solidFill>
+                            <a:schemeClr val="tx1"/>
+                          </a:solidFill>
+                          <a:effectLst/>
+                          <a:latin typeface="+mn-lt"/>
+                          <a:ea typeface="+mn-ea"/>
+                          <a:cs typeface="+mn-cs"/>
+                        </a:rPr>
+                        <a:t>OTA </a:t>
+                      </a:r>
+                      <a:r>
+                        <a:rPr kumimoji="1" lang="ko-KR" altLang="en-US" sz="1000" b="0" i="0" u="none" strike="noStrike" kern="1200" cap="none" normalizeH="0" baseline="0" dirty="0" smtClean="0">
+                          <a:ln>
+                            <a:noFill/>
+                          </a:ln>
+                          <a:solidFill>
+                            <a:schemeClr val="tx1"/>
+                          </a:solidFill>
+                          <a:effectLst/>
+                          <a:latin typeface="+mn-lt"/>
+                          <a:ea typeface="+mn-ea"/>
+                          <a:cs typeface="+mn-cs"/>
+                        </a:rPr>
+                        <a:t>적용 안하나</a:t>
+                      </a:r>
+                      <a:r>
+                        <a:rPr kumimoji="1" lang="en-US" altLang="ko-KR" sz="1000" b="0" i="0" u="none" strike="noStrike" kern="1200" cap="none" normalizeH="0" baseline="0" dirty="0" smtClean="0">
+                          <a:ln>
+                            <a:noFill/>
+                          </a:ln>
+                          <a:solidFill>
+                            <a:schemeClr val="tx1"/>
+                          </a:solidFill>
+                          <a:effectLst/>
+                          <a:latin typeface="+mn-lt"/>
+                          <a:ea typeface="+mn-ea"/>
+                          <a:cs typeface="+mn-cs"/>
+                        </a:rPr>
+                        <a:t>, Secure Flash 1.0 rule </a:t>
+                      </a:r>
+                      <a:r>
+                        <a:rPr kumimoji="1" lang="ko-KR" altLang="en-US" sz="1000" b="0" i="0" u="none" strike="noStrike" kern="1200" cap="none" normalizeH="0" baseline="0" dirty="0" smtClean="0">
+                          <a:ln>
+                            <a:noFill/>
+                          </a:ln>
+                          <a:solidFill>
+                            <a:schemeClr val="tx1"/>
+                          </a:solidFill>
+                          <a:effectLst/>
+                          <a:latin typeface="+mn-lt"/>
+                          <a:ea typeface="+mn-ea"/>
+                          <a:cs typeface="+mn-cs"/>
+                        </a:rPr>
+                        <a:t>기반 업데이트  </a:t>
+                      </a:r>
+                      <a:endParaRPr kumimoji="1" lang="en-US" altLang="ko-KR" sz="1000" b="0" i="0" u="none" strike="noStrike" kern="1200" cap="none" normalizeH="0" baseline="0" dirty="0" smtClean="0">
+                        <a:ln>
+                          <a:noFill/>
+                        </a:ln>
+                        <a:solidFill>
+                          <a:schemeClr val="tx1"/>
+                        </a:solidFill>
+                        <a:effectLst/>
+                        <a:latin typeface="+mn-lt"/>
+                        <a:ea typeface="+mn-ea"/>
+                        <a:cs typeface="+mn-cs"/>
+                      </a:endParaRPr>
+                    </a:p>
+                    <a:p>
+                      <a:pPr marL="0" marR="0" lvl="0" indent="0" algn="l" defTabSz="914400" rtl="0" eaLnBrk="1" fontAlgn="base" latinLnBrk="1" hangingPunct="1">
+                        <a:lnSpc>
+                          <a:spcPct val="100000"/>
+                        </a:lnSpc>
+                        <a:spcBef>
+                          <a:spcPct val="20000"/>
+                        </a:spcBef>
+                        <a:spcAft>
+                          <a:spcPct val="0"/>
+                        </a:spcAft>
+                        <a:buClr>
+                          <a:srgbClr val="FF0000"/>
+                        </a:buClr>
+                        <a:buSzTx/>
+                        <a:buFont typeface="Wingdings" pitchFamily="2" charset="2"/>
+                        <a:buNone/>
+                        <a:tabLst/>
+                        <a:defRPr/>
+                      </a:pPr>
+                      <a:r>
+                        <a:rPr kumimoji="1" lang="en-US" altLang="ko-KR" sz="1000" b="0" i="0" u="none" strike="noStrike" kern="1200" cap="none" normalizeH="0" baseline="0" dirty="0" smtClean="0">
+                          <a:ln>
+                            <a:noFill/>
+                          </a:ln>
+                          <a:solidFill>
+                            <a:schemeClr val="tx1"/>
+                          </a:solidFill>
+                          <a:effectLst/>
+                          <a:latin typeface="+mn-lt"/>
+                          <a:ea typeface="+mn-ea"/>
+                          <a:cs typeface="+mn-cs"/>
+                        </a:rPr>
+                        <a:t>       </a:t>
+                      </a:r>
+                      <a:r>
+                        <a:rPr kumimoji="1" lang="ko-KR" altLang="en-US" sz="1000" b="0" i="0" u="none" strike="noStrike" kern="1200" cap="none" normalizeH="0" baseline="0" dirty="0" smtClean="0">
+                          <a:ln>
+                            <a:noFill/>
+                          </a:ln>
+                          <a:solidFill>
+                            <a:schemeClr val="tx1"/>
+                          </a:solidFill>
+                          <a:effectLst/>
+                          <a:latin typeface="+mn-lt"/>
+                          <a:ea typeface="+mn-ea"/>
+                          <a:cs typeface="+mn-cs"/>
+                        </a:rPr>
+                        <a:t>가능 </a:t>
+                      </a:r>
+                      <a:r>
+                        <a:rPr kumimoji="1" lang="ko-KR" altLang="en-US" sz="1000" b="0" i="0" u="none" strike="noStrike" kern="1200" cap="none" normalizeH="0" baseline="0" dirty="0" err="1" smtClean="0">
+                          <a:ln>
+                            <a:noFill/>
+                          </a:ln>
+                          <a:solidFill>
+                            <a:schemeClr val="tx1"/>
+                          </a:solidFill>
+                          <a:effectLst/>
+                          <a:latin typeface="+mn-lt"/>
+                          <a:ea typeface="+mn-ea"/>
+                          <a:cs typeface="+mn-cs"/>
+                        </a:rPr>
+                        <a:t>토록</a:t>
+                      </a:r>
+                      <a:r>
+                        <a:rPr kumimoji="1" lang="ko-KR" altLang="en-US" sz="1000" b="0" i="0" u="none" strike="noStrike" kern="1200" cap="none" normalizeH="0" baseline="0" dirty="0" smtClean="0">
+                          <a:ln>
+                            <a:noFill/>
+                          </a:ln>
+                          <a:solidFill>
+                            <a:schemeClr val="tx1"/>
+                          </a:solidFill>
+                          <a:effectLst/>
+                          <a:latin typeface="+mn-lt"/>
+                          <a:ea typeface="+mn-ea"/>
+                          <a:cs typeface="+mn-cs"/>
+                        </a:rPr>
+                        <a:t> 제안 完</a:t>
+                      </a:r>
+                      <a:endParaRPr kumimoji="1" lang="en-US" altLang="ko-KR" sz="1000" b="0" i="0" u="none" strike="noStrike" kern="1200" cap="none" normalizeH="0" baseline="0" dirty="0" smtClean="0">
+                        <a:ln>
+                          <a:noFill/>
+                        </a:ln>
+                        <a:solidFill>
+                          <a:schemeClr val="tx1"/>
+                        </a:solidFill>
+                        <a:effectLst/>
+                        <a:latin typeface="+mn-lt"/>
+                        <a:ea typeface="+mn-ea"/>
+                        <a:cs typeface="+mn-cs"/>
+                      </a:endParaRPr>
+                    </a:p>
+                    <a:p>
+                      <a:pPr marL="0" marR="0" lvl="0" indent="0" algn="l" defTabSz="914400" rtl="0" eaLnBrk="1" fontAlgn="base" latinLnBrk="1" hangingPunct="1">
+                        <a:lnSpc>
+                          <a:spcPct val="100000"/>
+                        </a:lnSpc>
+                        <a:spcBef>
+                          <a:spcPct val="20000"/>
+                        </a:spcBef>
+                        <a:spcAft>
+                          <a:spcPct val="0"/>
+                        </a:spcAft>
+                        <a:buClr>
+                          <a:srgbClr val="FF0000"/>
+                        </a:buClr>
+                        <a:buSzTx/>
+                        <a:buFont typeface="Wingdings" pitchFamily="2" charset="2"/>
+                        <a:buNone/>
+                        <a:tabLst/>
+                        <a:defRPr/>
+                      </a:pPr>
+                      <a:r>
+                        <a:rPr kumimoji="1" lang="en-US" altLang="ko-KR" sz="1000" b="0" i="0" u="none" strike="noStrike" kern="1200" cap="none" normalizeH="0" baseline="0" dirty="0" smtClean="0">
+                          <a:ln>
+                            <a:noFill/>
+                          </a:ln>
+                          <a:solidFill>
+                            <a:schemeClr val="tx1"/>
+                          </a:solidFill>
+                          <a:effectLst/>
+                          <a:latin typeface="+mn-lt"/>
+                          <a:ea typeface="+mn-ea"/>
+                          <a:cs typeface="+mn-cs"/>
+                        </a:rPr>
+                        <a:t>    </a:t>
+                      </a:r>
+                      <a:r>
+                        <a:rPr kumimoji="1" lang="en-US" altLang="ko-KR" sz="1000" b="0" i="0" u="none" strike="noStrike" kern="1200" cap="none" normalizeH="0" baseline="0" dirty="0" smtClean="0">
+                          <a:ln>
+                            <a:noFill/>
+                          </a:ln>
+                          <a:solidFill>
+                            <a:schemeClr val="tx1"/>
+                          </a:solidFill>
+                          <a:effectLst/>
+                          <a:latin typeface="+mn-lt"/>
+                          <a:ea typeface="+mn-ea"/>
+                          <a:cs typeface="+mn-cs"/>
+                          <a:sym typeface="Wingdings" panose="05000000000000000000" pitchFamily="2" charset="2"/>
+                        </a:rPr>
+                        <a:t> QV </a:t>
+                      </a:r>
+                      <a:r>
+                        <a:rPr kumimoji="1" lang="ko-KR" altLang="en-US" sz="1000" b="0" i="0" u="none" strike="noStrike" kern="1200" cap="none" normalizeH="0" baseline="0" dirty="0" smtClean="0">
+                          <a:ln>
+                            <a:noFill/>
+                          </a:ln>
+                          <a:solidFill>
+                            <a:schemeClr val="tx1"/>
+                          </a:solidFill>
+                          <a:effectLst/>
+                          <a:latin typeface="+mn-lt"/>
+                          <a:ea typeface="+mn-ea"/>
+                          <a:cs typeface="+mn-cs"/>
+                          <a:sym typeface="Wingdings" panose="05000000000000000000" pitchFamily="2" charset="2"/>
+                        </a:rPr>
+                        <a:t>프로젝트의 일정 </a:t>
+                      </a:r>
+                      <a:r>
+                        <a:rPr kumimoji="1" lang="ko-KR" altLang="en-US" sz="1000" b="0" i="0" u="none" strike="noStrike" kern="1200" cap="none" normalizeH="0" baseline="0" dirty="0" err="1" smtClean="0">
+                          <a:ln>
+                            <a:noFill/>
+                          </a:ln>
+                          <a:solidFill>
+                            <a:schemeClr val="tx1"/>
+                          </a:solidFill>
+                          <a:effectLst/>
+                          <a:latin typeface="+mn-lt"/>
+                          <a:ea typeface="+mn-ea"/>
+                          <a:cs typeface="+mn-cs"/>
+                          <a:sym typeface="Wingdings" panose="05000000000000000000" pitchFamily="2" charset="2"/>
+                        </a:rPr>
+                        <a:t>긴급함에</a:t>
+                      </a:r>
+                      <a:r>
+                        <a:rPr kumimoji="1" lang="ko-KR" altLang="en-US" sz="1000" b="0" i="0" u="none" strike="noStrike" kern="1200" cap="none" normalizeH="0" baseline="0" dirty="0" smtClean="0">
+                          <a:ln>
+                            <a:noFill/>
+                          </a:ln>
+                          <a:solidFill>
+                            <a:schemeClr val="tx1"/>
+                          </a:solidFill>
+                          <a:effectLst/>
+                          <a:latin typeface="+mn-lt"/>
+                          <a:ea typeface="+mn-ea"/>
+                          <a:cs typeface="+mn-cs"/>
+                          <a:sym typeface="Wingdings" panose="05000000000000000000" pitchFamily="2" charset="2"/>
+                        </a:rPr>
+                        <a:t> 따라 빠른 회신 요청 하였으며</a:t>
+                      </a:r>
+                      <a:r>
+                        <a:rPr kumimoji="1" lang="en-US" altLang="ko-KR" sz="1000" b="0" i="0" u="none" strike="noStrike" kern="1200" cap="none" normalizeH="0" baseline="0" dirty="0" smtClean="0">
+                          <a:ln>
+                            <a:noFill/>
+                          </a:ln>
+                          <a:solidFill>
+                            <a:schemeClr val="tx1"/>
+                          </a:solidFill>
+                          <a:effectLst/>
+                          <a:latin typeface="+mn-lt"/>
+                          <a:ea typeface="+mn-ea"/>
+                          <a:cs typeface="+mn-cs"/>
+                          <a:sym typeface="Wingdings" panose="05000000000000000000" pitchFamily="2" charset="2"/>
+                        </a:rPr>
+                        <a:t>,</a:t>
+                      </a:r>
+                    </a:p>
+                    <a:p>
+                      <a:pPr marL="0" marR="0" lvl="0" indent="0" algn="l" defTabSz="914400" rtl="0" eaLnBrk="1" fontAlgn="base" latinLnBrk="1" hangingPunct="1">
+                        <a:lnSpc>
+                          <a:spcPct val="100000"/>
+                        </a:lnSpc>
+                        <a:spcBef>
+                          <a:spcPct val="20000"/>
+                        </a:spcBef>
+                        <a:spcAft>
+                          <a:spcPct val="0"/>
+                        </a:spcAft>
+                        <a:buClr>
+                          <a:srgbClr val="FF0000"/>
+                        </a:buClr>
+                        <a:buSzTx/>
+                        <a:buFont typeface="Wingdings" pitchFamily="2" charset="2"/>
+                        <a:buNone/>
+                        <a:tabLst/>
+                        <a:defRPr/>
+                      </a:pPr>
+                      <a:r>
+                        <a:rPr kumimoji="1" lang="en-US" altLang="ko-KR" sz="1000" b="0" i="0" u="none" strike="noStrike" kern="1200" cap="none" normalizeH="0" baseline="0" dirty="0" smtClean="0">
+                          <a:ln>
+                            <a:noFill/>
+                          </a:ln>
+                          <a:solidFill>
+                            <a:schemeClr val="tx1"/>
+                          </a:solidFill>
+                          <a:effectLst/>
+                          <a:latin typeface="+mn-lt"/>
+                          <a:ea typeface="+mn-ea"/>
+                          <a:cs typeface="+mn-cs"/>
+                          <a:sym typeface="Wingdings" panose="05000000000000000000" pitchFamily="2" charset="2"/>
+                        </a:rPr>
+                        <a:t>        </a:t>
+                      </a:r>
+                      <a:r>
+                        <a:rPr kumimoji="1" lang="ko-KR" altLang="en-US" sz="1000" b="0" i="0" u="none" strike="noStrike" kern="1200" cap="none" normalizeH="0" baseline="0" dirty="0" smtClean="0">
+                          <a:ln>
+                            <a:noFill/>
+                          </a:ln>
+                          <a:solidFill>
+                            <a:schemeClr val="tx1"/>
+                          </a:solidFill>
+                          <a:effectLst/>
+                          <a:latin typeface="+mn-lt"/>
+                          <a:ea typeface="+mn-ea"/>
+                          <a:cs typeface="+mn-cs"/>
+                          <a:sym typeface="Wingdings" panose="05000000000000000000" pitchFamily="2" charset="2"/>
+                        </a:rPr>
+                        <a:t>금주 중 확정 하여 </a:t>
+                      </a:r>
+                      <a:r>
+                        <a:rPr kumimoji="1" lang="ko-KR" altLang="en-US" sz="1000" b="0" i="0" u="none" strike="noStrike" kern="1200" cap="none" normalizeH="0" baseline="0" dirty="0" err="1" smtClean="0">
+                          <a:ln>
+                            <a:noFill/>
+                          </a:ln>
+                          <a:solidFill>
+                            <a:schemeClr val="tx1"/>
+                          </a:solidFill>
+                          <a:effectLst/>
+                          <a:latin typeface="+mn-lt"/>
+                          <a:ea typeface="+mn-ea"/>
+                          <a:cs typeface="+mn-cs"/>
+                          <a:sym typeface="Wingdings" panose="05000000000000000000" pitchFamily="2" charset="2"/>
+                        </a:rPr>
+                        <a:t>회신준다고</a:t>
+                      </a:r>
+                      <a:r>
+                        <a:rPr kumimoji="1" lang="ko-KR" altLang="en-US" sz="1000" b="0" i="0" u="none" strike="noStrike" kern="1200" cap="none" normalizeH="0" baseline="0" dirty="0" smtClean="0">
+                          <a:ln>
+                            <a:noFill/>
+                          </a:ln>
+                          <a:solidFill>
+                            <a:schemeClr val="tx1"/>
+                          </a:solidFill>
+                          <a:effectLst/>
+                          <a:latin typeface="+mn-lt"/>
+                          <a:ea typeface="+mn-ea"/>
+                          <a:cs typeface="+mn-cs"/>
+                          <a:sym typeface="Wingdings" panose="05000000000000000000" pitchFamily="2" charset="2"/>
+                        </a:rPr>
+                        <a:t> 함 </a:t>
+                      </a:r>
+                      <a:r>
+                        <a:rPr kumimoji="1" lang="en-US" altLang="ko-KR" sz="1000" b="0" i="0" u="none" strike="noStrike" kern="1200" cap="none" normalizeH="0" baseline="0" dirty="0" smtClean="0">
+                          <a:ln>
+                            <a:noFill/>
+                          </a:ln>
+                          <a:solidFill>
+                            <a:schemeClr val="tx1"/>
+                          </a:solidFill>
+                          <a:effectLst/>
+                          <a:latin typeface="+mn-lt"/>
+                          <a:ea typeface="+mn-ea"/>
+                          <a:cs typeface="+mn-cs"/>
+                          <a:sym typeface="Wingdings" panose="05000000000000000000" pitchFamily="2" charset="2"/>
+                        </a:rPr>
+                        <a:t>(</a:t>
+                      </a:r>
+                      <a:r>
+                        <a:rPr kumimoji="1" lang="ko-KR" altLang="en-US" sz="1000" b="0" i="0" u="none" strike="noStrike" kern="1200" cap="none" normalizeH="0" baseline="0" dirty="0" smtClean="0">
+                          <a:ln>
+                            <a:noFill/>
+                          </a:ln>
+                          <a:solidFill>
+                            <a:schemeClr val="tx1"/>
+                          </a:solidFill>
+                          <a:effectLst/>
+                          <a:latin typeface="+mn-lt"/>
+                          <a:ea typeface="+mn-ea"/>
+                          <a:cs typeface="+mn-cs"/>
+                          <a:sym typeface="Wingdings" panose="05000000000000000000" pitchFamily="2" charset="2"/>
+                        </a:rPr>
+                        <a:t>공조시스템 한별 책임</a:t>
+                      </a:r>
+                      <a:r>
+                        <a:rPr kumimoji="1" lang="en-US" altLang="ko-KR" sz="1000" b="0" i="0" u="none" strike="noStrike" kern="1200" cap="none" normalizeH="0" baseline="0" dirty="0" smtClean="0">
+                          <a:ln>
+                            <a:noFill/>
+                          </a:ln>
+                          <a:solidFill>
+                            <a:schemeClr val="tx1"/>
+                          </a:solidFill>
+                          <a:effectLst/>
+                          <a:latin typeface="+mn-lt"/>
+                          <a:ea typeface="+mn-ea"/>
+                          <a:cs typeface="+mn-cs"/>
+                          <a:sym typeface="Wingdings" panose="05000000000000000000" pitchFamily="2" charset="2"/>
+                        </a:rPr>
+                        <a:t>)</a:t>
+                      </a:r>
+                      <a:endParaRPr kumimoji="1" lang="en-US" altLang="ko-KR" sz="1000" b="0" i="0" u="none" strike="noStrike" kern="1200" cap="none" normalizeH="0" baseline="0" dirty="0" smtClean="0">
+                        <a:ln>
+                          <a:noFill/>
+                        </a:ln>
+                        <a:solidFill>
+                          <a:schemeClr val="tx1"/>
+                        </a:solidFill>
+                        <a:effectLst/>
+                        <a:latin typeface="+mn-lt"/>
+                        <a:ea typeface="+mn-ea"/>
+                        <a:cs typeface="+mn-cs"/>
+                      </a:endParaRPr>
+                    </a:p>
+                    <a:p>
+                      <a:pPr marL="0" marR="0" lvl="0" indent="0" algn="l" defTabSz="914400" rtl="0" eaLnBrk="1" fontAlgn="base" latinLnBrk="1" hangingPunct="1">
+                        <a:lnSpc>
+                          <a:spcPct val="100000"/>
+                        </a:lnSpc>
+                        <a:spcBef>
+                          <a:spcPct val="20000"/>
+                        </a:spcBef>
+                        <a:spcAft>
+                          <a:spcPct val="0"/>
+                        </a:spcAft>
+                        <a:buClr>
+                          <a:srgbClr val="FF0000"/>
+                        </a:buClr>
+                        <a:buSzTx/>
+                        <a:buFont typeface="Wingdings" pitchFamily="2" charset="2"/>
+                        <a:buNone/>
+                        <a:tabLst/>
+                        <a:defRPr/>
+                      </a:pPr>
+                      <a:r>
+                        <a:rPr kumimoji="1" lang="en-US" altLang="ko-KR" sz="1000" b="0" i="0" u="none" strike="noStrike" kern="1200" cap="none" normalizeH="0" baseline="0" dirty="0" smtClean="0">
+                          <a:ln>
+                            <a:noFill/>
+                          </a:ln>
+                          <a:solidFill>
+                            <a:schemeClr val="tx1"/>
+                          </a:solidFill>
+                          <a:effectLst/>
+                          <a:latin typeface="+mn-lt"/>
+                          <a:ea typeface="+mn-ea"/>
+                          <a:cs typeface="+mn-cs"/>
+                        </a:rPr>
+                        <a:t>     </a:t>
+                      </a:r>
+                    </a:p>
+                    <a:p>
+                      <a:pPr marL="0" marR="0" lvl="0" indent="0" algn="l" defTabSz="914400" rtl="0" eaLnBrk="1" fontAlgn="base" latinLnBrk="1" hangingPunct="1">
+                        <a:lnSpc>
+                          <a:spcPct val="100000"/>
+                        </a:lnSpc>
+                        <a:spcBef>
+                          <a:spcPct val="20000"/>
+                        </a:spcBef>
+                        <a:spcAft>
+                          <a:spcPct val="0"/>
+                        </a:spcAft>
+                        <a:buClr>
+                          <a:srgbClr val="FF0000"/>
+                        </a:buClr>
+                        <a:buSzTx/>
+                        <a:buFont typeface="Wingdings" pitchFamily="2" charset="2"/>
+                        <a:buNone/>
+                        <a:tabLst/>
+                        <a:defRPr/>
+                      </a:pPr>
+                      <a:r>
+                        <a:rPr kumimoji="1" lang="en-US" altLang="ko-KR" sz="1000" b="0" i="0" u="none" strike="noStrike" kern="1200" cap="none" normalizeH="0" baseline="0" dirty="0" smtClean="0">
+                          <a:ln>
+                            <a:noFill/>
+                          </a:ln>
+                          <a:solidFill>
+                            <a:schemeClr val="tx1"/>
+                          </a:solidFill>
+                          <a:effectLst/>
+                          <a:latin typeface="+mn-lt"/>
+                          <a:ea typeface="+mn-ea"/>
+                          <a:cs typeface="+mn-cs"/>
+                        </a:rPr>
+                        <a:t>3. SPQA </a:t>
+                      </a:r>
+                      <a:r>
+                        <a:rPr kumimoji="1" lang="ko-KR" altLang="en-US" sz="1000" b="0" i="0" u="none" strike="noStrike" kern="1200" cap="none" normalizeH="0" baseline="0" dirty="0" smtClean="0">
+                          <a:ln>
+                            <a:noFill/>
+                          </a:ln>
+                          <a:solidFill>
+                            <a:schemeClr val="tx1"/>
+                          </a:solidFill>
+                          <a:effectLst/>
+                          <a:latin typeface="+mn-lt"/>
+                          <a:ea typeface="+mn-ea"/>
+                          <a:cs typeface="+mn-cs"/>
+                        </a:rPr>
+                        <a:t>육성 프로젝트 진행</a:t>
+                      </a:r>
+                      <a:endParaRPr kumimoji="1" lang="en-US" altLang="ko-KR" sz="1000" b="0" i="0" u="none" strike="noStrike" kern="1200" cap="none" normalizeH="0" baseline="0" dirty="0" smtClean="0">
+                        <a:ln>
+                          <a:noFill/>
+                        </a:ln>
+                        <a:solidFill>
+                          <a:schemeClr val="tx1"/>
+                        </a:solidFill>
+                        <a:effectLst/>
+                        <a:latin typeface="+mn-lt"/>
+                        <a:ea typeface="+mn-ea"/>
+                        <a:cs typeface="+mn-cs"/>
+                      </a:endParaRPr>
+                    </a:p>
+                    <a:p>
+                      <a:pPr marL="0" marR="0" lvl="0" indent="0" algn="l" defTabSz="914400" rtl="0" eaLnBrk="1" fontAlgn="base" latinLnBrk="1" hangingPunct="1">
+                        <a:lnSpc>
+                          <a:spcPct val="100000"/>
+                        </a:lnSpc>
+                        <a:spcBef>
+                          <a:spcPct val="20000"/>
+                        </a:spcBef>
+                        <a:spcAft>
+                          <a:spcPct val="0"/>
+                        </a:spcAft>
+                        <a:buClr>
+                          <a:srgbClr val="FF0000"/>
+                        </a:buClr>
+                        <a:buSzTx/>
+                        <a:buFont typeface="Wingdings" pitchFamily="2" charset="2"/>
+                        <a:buNone/>
+                        <a:tabLst/>
+                        <a:defRPr/>
+                      </a:pPr>
+                      <a:r>
+                        <a:rPr kumimoji="1" lang="en-US" altLang="ko-KR" sz="1000" b="0" i="0" u="none" strike="noStrike" kern="1200" cap="none" normalizeH="0" baseline="0" dirty="0" smtClean="0">
+                          <a:ln>
+                            <a:noFill/>
+                          </a:ln>
+                          <a:solidFill>
+                            <a:schemeClr val="tx1"/>
+                          </a:solidFill>
+                          <a:effectLst/>
+                          <a:latin typeface="+mn-lt"/>
+                          <a:ea typeface="+mn-ea"/>
+                          <a:cs typeface="+mn-cs"/>
+                        </a:rPr>
+                        <a:t>   - SWE. Group ALM </a:t>
+                      </a:r>
+                      <a:r>
+                        <a:rPr kumimoji="1" lang="ko-KR" altLang="en-US" sz="1000" b="0" i="0" u="none" strike="noStrike" kern="1200" cap="none" normalizeH="0" baseline="0" dirty="0" smtClean="0">
+                          <a:ln>
+                            <a:noFill/>
+                          </a:ln>
+                          <a:solidFill>
+                            <a:schemeClr val="tx1"/>
+                          </a:solidFill>
+                          <a:effectLst/>
+                          <a:latin typeface="+mn-lt"/>
+                          <a:ea typeface="+mn-ea"/>
+                          <a:cs typeface="+mn-cs"/>
+                        </a:rPr>
+                        <a:t>업로드 시작</a:t>
+                      </a:r>
+                      <a:r>
+                        <a:rPr kumimoji="1" lang="en-US" altLang="ko-KR" sz="1000" b="0" i="0" u="none" strike="noStrike" kern="1200" cap="none" normalizeH="0" baseline="0" dirty="0" smtClean="0">
+                          <a:ln>
+                            <a:noFill/>
+                          </a:ln>
+                          <a:solidFill>
+                            <a:schemeClr val="tx1"/>
+                          </a:solidFill>
+                          <a:effectLst/>
+                          <a:latin typeface="+mn-lt"/>
+                          <a:ea typeface="+mn-ea"/>
+                          <a:cs typeface="+mn-cs"/>
+                        </a:rPr>
+                        <a:t/>
+                      </a:r>
+                      <a:br>
+                        <a:rPr kumimoji="1" lang="en-US" altLang="ko-KR" sz="1000" b="0" i="0" u="none" strike="noStrike" kern="1200" cap="none" normalizeH="0" baseline="0" dirty="0" smtClean="0">
+                          <a:ln>
+                            <a:noFill/>
+                          </a:ln>
+                          <a:solidFill>
+                            <a:schemeClr val="tx1"/>
+                          </a:solidFill>
+                          <a:effectLst/>
+                          <a:latin typeface="+mn-lt"/>
+                          <a:ea typeface="+mn-ea"/>
+                          <a:cs typeface="+mn-cs"/>
+                        </a:rPr>
+                      </a:br>
+                      <a:r>
+                        <a:rPr kumimoji="1" lang="en-US" altLang="ko-KR" sz="1000" b="0" i="0" u="none" strike="noStrike" kern="1200" cap="none" normalizeH="0" baseline="0" dirty="0" smtClean="0">
+                          <a:ln>
+                            <a:noFill/>
+                          </a:ln>
+                          <a:solidFill>
+                            <a:schemeClr val="tx1"/>
+                          </a:solidFill>
+                          <a:effectLst/>
+                          <a:latin typeface="+mn-lt"/>
+                          <a:ea typeface="+mn-ea"/>
+                          <a:cs typeface="+mn-cs"/>
+                        </a:rPr>
+                        <a:t>   - SW Unit Test Case Specification (100% </a:t>
+                      </a:r>
+                      <a:r>
+                        <a:rPr kumimoji="1" lang="en-US" altLang="ko-KR" sz="1000" b="0" i="0" u="none" strike="noStrike" kern="1200" cap="none" normalizeH="0" baseline="0" dirty="0" smtClean="0">
+                          <a:ln>
+                            <a:noFill/>
+                          </a:ln>
+                          <a:solidFill>
+                            <a:schemeClr val="tx1"/>
+                          </a:solidFill>
+                          <a:effectLst/>
+                          <a:latin typeface="+mn-lt"/>
+                          <a:ea typeface="+mn-ea"/>
+                          <a:cs typeface="+mn-cs"/>
+                          <a:sym typeface="Wingdings" panose="05000000000000000000" pitchFamily="2" charset="2"/>
+                        </a:rPr>
+                        <a:t> 100%)</a:t>
+                      </a:r>
+                      <a:br>
+                        <a:rPr kumimoji="1" lang="en-US" altLang="ko-KR" sz="1000" b="0" i="0" u="none" strike="noStrike" kern="1200" cap="none" normalizeH="0" baseline="0" dirty="0" smtClean="0">
+                          <a:ln>
+                            <a:noFill/>
+                          </a:ln>
+                          <a:solidFill>
+                            <a:schemeClr val="tx1"/>
+                          </a:solidFill>
+                          <a:effectLst/>
+                          <a:latin typeface="+mn-lt"/>
+                          <a:ea typeface="+mn-ea"/>
+                          <a:cs typeface="+mn-cs"/>
+                          <a:sym typeface="Wingdings" panose="05000000000000000000" pitchFamily="2" charset="2"/>
+                        </a:rPr>
+                      </a:br>
+                      <a:r>
+                        <a:rPr kumimoji="1" lang="en-US" altLang="ko-KR" sz="1000" b="0" i="0" u="none" strike="noStrike" kern="1200" cap="none" normalizeH="0" baseline="0" dirty="0" smtClean="0">
+                          <a:ln>
+                            <a:noFill/>
+                          </a:ln>
+                          <a:solidFill>
+                            <a:schemeClr val="tx1"/>
+                          </a:solidFill>
+                          <a:effectLst/>
+                          <a:latin typeface="+mn-lt"/>
+                          <a:ea typeface="+mn-ea"/>
+                          <a:cs typeface="+mn-cs"/>
+                          <a:sym typeface="Wingdings" panose="05000000000000000000" pitchFamily="2" charset="2"/>
+                        </a:rPr>
+                        <a:t>   - </a:t>
+                      </a:r>
+                      <a:r>
+                        <a:rPr kumimoji="1" lang="en-US" altLang="ko-KR" sz="1000" b="0" i="0" u="none" strike="noStrike" kern="1200" cap="none" normalizeH="0" baseline="0" dirty="0" smtClean="0">
+                          <a:ln>
+                            <a:noFill/>
+                          </a:ln>
+                          <a:solidFill>
+                            <a:schemeClr val="tx1"/>
+                          </a:solidFill>
+                          <a:effectLst/>
+                          <a:latin typeface="+mn-lt"/>
+                          <a:ea typeface="+mn-ea"/>
+                          <a:cs typeface="+mn-cs"/>
+                        </a:rPr>
+                        <a:t>SW Integration Test Case Specification (100% </a:t>
+                      </a:r>
+                      <a:r>
+                        <a:rPr kumimoji="1" lang="en-US" altLang="ko-KR" sz="1000" b="0" i="0" u="none" strike="noStrike" kern="1200" cap="none" normalizeH="0" baseline="0" dirty="0" smtClean="0">
+                          <a:ln>
+                            <a:noFill/>
+                          </a:ln>
+                          <a:solidFill>
+                            <a:schemeClr val="tx1"/>
+                          </a:solidFill>
+                          <a:effectLst/>
+                          <a:latin typeface="+mn-lt"/>
+                          <a:ea typeface="+mn-ea"/>
+                          <a:cs typeface="+mn-cs"/>
+                          <a:sym typeface="Wingdings" panose="05000000000000000000" pitchFamily="2" charset="2"/>
+                        </a:rPr>
+                        <a:t> 100%)</a:t>
+                      </a:r>
+                      <a:endParaRPr kumimoji="1" lang="en-US" altLang="ko-KR" sz="1000" b="0" i="0" u="none" strike="noStrike" kern="1200" cap="none" normalizeH="0" baseline="0" dirty="0" smtClean="0">
+                        <a:ln>
+                          <a:noFill/>
+                        </a:ln>
+                        <a:solidFill>
+                          <a:schemeClr val="tx1"/>
+                        </a:solidFill>
+                        <a:effectLst/>
+                        <a:latin typeface="+mn-lt"/>
+                        <a:ea typeface="+mn-ea"/>
+                        <a:cs typeface="+mn-cs"/>
+                      </a:endParaRPr>
+                    </a:p>
+                    <a:p>
+                      <a:pPr marL="0" marR="0" lvl="0" indent="0" algn="l" defTabSz="914400" rtl="0" eaLnBrk="1" fontAlgn="base" latinLnBrk="1" hangingPunct="1">
+                        <a:lnSpc>
+                          <a:spcPct val="100000"/>
+                        </a:lnSpc>
+                        <a:spcBef>
+                          <a:spcPct val="20000"/>
+                        </a:spcBef>
+                        <a:spcAft>
+                          <a:spcPct val="0"/>
+                        </a:spcAft>
+                        <a:buClr>
+                          <a:srgbClr val="FF0000"/>
+                        </a:buClr>
+                        <a:buSzTx/>
+                        <a:buFont typeface="Wingdings" pitchFamily="2" charset="2"/>
+                        <a:buNone/>
+                        <a:tabLst/>
+                        <a:defRPr/>
+                      </a:pPr>
+                      <a:r>
+                        <a:rPr kumimoji="1" lang="en-US" altLang="ko-KR" sz="1000" b="0" i="0" u="none" strike="noStrike" kern="1200" cap="none" normalizeH="0" baseline="0" dirty="0" smtClean="0">
+                          <a:ln>
+                            <a:noFill/>
+                          </a:ln>
+                          <a:solidFill>
+                            <a:schemeClr val="tx1"/>
+                          </a:solidFill>
+                          <a:effectLst/>
+                          <a:latin typeface="+mn-lt"/>
+                          <a:ea typeface="+mn-ea"/>
+                          <a:cs typeface="+mn-cs"/>
+                        </a:rPr>
+                        <a:t>   - SW Static Test </a:t>
+                      </a:r>
+                      <a:r>
+                        <a:rPr kumimoji="1" lang="ko-KR" altLang="en-US" sz="1000" b="0" i="0" u="none" strike="noStrike" kern="1200" cap="none" normalizeH="0" baseline="0" dirty="0" smtClean="0">
+                          <a:ln>
+                            <a:noFill/>
+                          </a:ln>
+                          <a:solidFill>
+                            <a:schemeClr val="tx1"/>
+                          </a:solidFill>
+                          <a:effectLst/>
+                          <a:latin typeface="+mn-lt"/>
+                          <a:ea typeface="+mn-ea"/>
+                          <a:cs typeface="+mn-cs"/>
+                        </a:rPr>
+                        <a:t>완료 및 리포트</a:t>
+                      </a:r>
+                      <a:r>
+                        <a:rPr kumimoji="1" lang="en-US" altLang="ko-KR" sz="1000" b="0" i="0" u="none" strike="noStrike" kern="1200" cap="none" normalizeH="0" baseline="0" dirty="0" smtClean="0">
+                          <a:ln>
+                            <a:noFill/>
+                          </a:ln>
+                          <a:solidFill>
+                            <a:schemeClr val="tx1"/>
+                          </a:solidFill>
+                          <a:effectLst/>
+                          <a:latin typeface="+mn-lt"/>
+                          <a:ea typeface="+mn-ea"/>
+                          <a:cs typeface="+mn-cs"/>
+                        </a:rPr>
+                        <a:t>,</a:t>
+                      </a:r>
+                      <a:r>
+                        <a:rPr kumimoji="1" lang="ko-KR" altLang="en-US" sz="1000" b="0" i="0" u="none" strike="noStrike" kern="1200" cap="none" normalizeH="0" baseline="0" dirty="0" smtClean="0">
+                          <a:ln>
+                            <a:noFill/>
+                          </a:ln>
+                          <a:solidFill>
+                            <a:schemeClr val="tx1"/>
+                          </a:solidFill>
+                          <a:effectLst/>
+                          <a:latin typeface="+mn-lt"/>
+                          <a:ea typeface="+mn-ea"/>
+                          <a:cs typeface="+mn-cs"/>
+                        </a:rPr>
+                        <a:t> 보완 사유 정당화 완료</a:t>
+                      </a:r>
+                      <a:r>
+                        <a:rPr kumimoji="1" lang="en-US" altLang="ko-KR" sz="1000" b="0" i="0" u="none" strike="noStrike" kern="1200" cap="none" normalizeH="0" baseline="0" dirty="0" smtClean="0">
+                          <a:ln>
+                            <a:noFill/>
+                          </a:ln>
+                          <a:solidFill>
+                            <a:schemeClr val="tx1"/>
+                          </a:solidFill>
+                          <a:effectLst/>
+                          <a:latin typeface="+mn-lt"/>
+                          <a:ea typeface="+mn-ea"/>
+                          <a:cs typeface="+mn-cs"/>
+                        </a:rPr>
+                        <a:t/>
+                      </a:r>
+                      <a:br>
+                        <a:rPr kumimoji="1" lang="en-US" altLang="ko-KR" sz="1000" b="0" i="0" u="none" strike="noStrike" kern="1200" cap="none" normalizeH="0" baseline="0" dirty="0" smtClean="0">
+                          <a:ln>
+                            <a:noFill/>
+                          </a:ln>
+                          <a:solidFill>
+                            <a:schemeClr val="tx1"/>
+                          </a:solidFill>
+                          <a:effectLst/>
+                          <a:latin typeface="+mn-lt"/>
+                          <a:ea typeface="+mn-ea"/>
+                          <a:cs typeface="+mn-cs"/>
+                        </a:rPr>
+                      </a:br>
+                      <a:r>
+                        <a:rPr kumimoji="1" lang="en-US" altLang="ko-KR" sz="1000" b="0" i="0" u="none" strike="noStrike" kern="1200" cap="none" normalizeH="0" baseline="0" dirty="0" smtClean="0">
+                          <a:ln>
+                            <a:noFill/>
+                          </a:ln>
+                          <a:solidFill>
+                            <a:schemeClr val="tx1"/>
+                          </a:solidFill>
+                          <a:effectLst/>
+                          <a:latin typeface="+mn-lt"/>
+                          <a:ea typeface="+mn-ea"/>
+                          <a:cs typeface="+mn-cs"/>
+                        </a:rPr>
+                        <a:t>   - SW Unit Test </a:t>
+                      </a:r>
+                      <a:r>
+                        <a:rPr kumimoji="1" lang="ko-KR" altLang="en-US" sz="1000" b="0" i="0" u="none" strike="noStrike" kern="1200" cap="none" normalizeH="0" baseline="0" dirty="0" smtClean="0">
+                          <a:ln>
+                            <a:noFill/>
+                          </a:ln>
+                          <a:solidFill>
+                            <a:schemeClr val="tx1"/>
+                          </a:solidFill>
+                          <a:effectLst/>
+                          <a:latin typeface="+mn-lt"/>
+                          <a:ea typeface="+mn-ea"/>
+                          <a:cs typeface="+mn-cs"/>
+                        </a:rPr>
+                        <a:t>진행 </a:t>
+                      </a:r>
+                      <a:r>
+                        <a:rPr kumimoji="1" lang="en-US" altLang="ko-KR" sz="1000" b="0" i="0" u="none" strike="noStrike" kern="1200" cap="none" normalizeH="0" baseline="0" dirty="0" smtClean="0">
+                          <a:ln>
+                            <a:noFill/>
+                          </a:ln>
+                          <a:solidFill>
+                            <a:schemeClr val="tx1"/>
+                          </a:solidFill>
+                          <a:effectLst/>
+                          <a:latin typeface="+mn-lt"/>
+                          <a:ea typeface="+mn-ea"/>
+                          <a:cs typeface="+mn-cs"/>
+                        </a:rPr>
+                        <a:t>(0% </a:t>
+                      </a:r>
+                      <a:r>
+                        <a:rPr kumimoji="1" lang="en-US" altLang="ko-KR" sz="1000" b="0" i="0" u="none" strike="noStrike" kern="1200" cap="none" normalizeH="0" baseline="0" dirty="0" smtClean="0">
+                          <a:ln>
+                            <a:noFill/>
+                          </a:ln>
+                          <a:solidFill>
+                            <a:schemeClr val="tx1"/>
+                          </a:solidFill>
+                          <a:effectLst/>
+                          <a:latin typeface="+mn-lt"/>
+                          <a:ea typeface="+mn-ea"/>
+                          <a:cs typeface="+mn-cs"/>
+                          <a:sym typeface="Wingdings" panose="05000000000000000000" pitchFamily="2" charset="2"/>
+                        </a:rPr>
+                        <a:t> 90%)</a:t>
                       </a:r>
                       <a:endParaRPr kumimoji="1" lang="en-US" altLang="ko-KR" sz="1000" b="0" i="0" u="none" strike="noStrike" kern="1200" cap="none" normalizeH="0" baseline="0" dirty="0" smtClean="0">
                         <a:ln>
@@ -19003,7 +19454,7 @@
                         </a:rPr>
                       </a:br>
                       <a:r>
-                        <a:rPr kumimoji="1" lang="en-US" altLang="ko-KR" sz="1000" b="0" i="0" u="none" strike="noStrike" kern="1200" cap="none" normalizeH="0" baseline="0" smtClean="0">
+                        <a:rPr kumimoji="1" lang="en-US" altLang="ko-KR" sz="1000" b="0" i="0" u="none" strike="noStrike" kern="1200" cap="none" normalizeH="0" baseline="0" dirty="0" smtClean="0">
                           <a:ln>
                             <a:noFill/>
                           </a:ln>
@@ -19015,7 +19466,470 @@
                           <a:ea typeface="+mn-ea"/>
                           <a:cs typeface="+mn-cs"/>
                         </a:rPr>
+                        <a:t>   - SWE. Group ALM </a:t>
+                      </a:r>
+                      <a:r>
+                        <a:rPr kumimoji="1" lang="ko-KR" altLang="en-US" sz="1000" b="0" i="0" u="none" strike="noStrike" kern="1200" cap="none" normalizeH="0" baseline="0" dirty="0" smtClean="0">
+                          <a:ln>
+                            <a:noFill/>
+                          </a:ln>
+                          <a:solidFill>
+                            <a:schemeClr val="tx1"/>
+                          </a:solidFill>
+                          <a:effectLst/>
+                          <a:latin typeface="+mn-lt"/>
+                          <a:ea typeface="+mn-ea"/>
+                          <a:cs typeface="+mn-cs"/>
+                        </a:rPr>
+                        <a:t>업로드 </a:t>
+                      </a:r>
+                      <a:r>
+                        <a:rPr kumimoji="1" lang="en-US" altLang="ko-KR" sz="1000" b="0" i="0" u="none" strike="noStrike" kern="1200" cap="none" normalizeH="0" baseline="0" dirty="0" smtClean="0">
+                          <a:ln>
+                            <a:noFill/>
+                          </a:ln>
+                          <a:solidFill>
+                            <a:schemeClr val="tx1"/>
+                          </a:solidFill>
+                          <a:effectLst/>
+                          <a:latin typeface="+mn-lt"/>
+                          <a:ea typeface="+mn-ea"/>
+                          <a:cs typeface="+mn-cs"/>
+                        </a:rPr>
+                        <a:t>(9/16</a:t>
+                      </a:r>
+                      <a:r>
+                        <a:rPr kumimoji="1" lang="ko-KR" altLang="en-US" sz="1000" b="0" i="0" u="none" strike="noStrike" kern="1200" cap="none" normalizeH="0" baseline="0" dirty="0" smtClean="0">
+                          <a:ln>
+                            <a:noFill/>
+                          </a:ln>
+                          <a:solidFill>
+                            <a:schemeClr val="tx1"/>
+                          </a:solidFill>
+                          <a:effectLst/>
+                          <a:latin typeface="+mn-lt"/>
+                          <a:ea typeface="+mn-ea"/>
+                          <a:cs typeface="+mn-cs"/>
+                        </a:rPr>
+                        <a:t>일 완료 예정</a:t>
+                      </a:r>
+                      <a:r>
+                        <a:rPr kumimoji="1" lang="en-US" altLang="ko-KR" sz="1000" b="0" i="0" u="none" strike="noStrike" kern="1200" cap="none" normalizeH="0" baseline="0" dirty="0" smtClean="0">
+                          <a:ln>
+                            <a:noFill/>
+                          </a:ln>
+                          <a:solidFill>
+                            <a:schemeClr val="tx1"/>
+                          </a:solidFill>
+                          <a:effectLst/>
+                          <a:latin typeface="+mn-lt"/>
+                          <a:ea typeface="+mn-ea"/>
+                          <a:cs typeface="+mn-cs"/>
+                        </a:rPr>
+                        <a:t>)</a:t>
+                      </a:r>
+                      <a:br>
+                        <a:rPr kumimoji="1" lang="en-US" altLang="ko-KR" sz="1000" b="0" i="0" u="none" strike="noStrike" kern="1200" cap="none" normalizeH="0" baseline="0" dirty="0" smtClean="0">
+                          <a:ln>
+                            <a:noFill/>
+                          </a:ln>
+                          <a:solidFill>
+                            <a:schemeClr val="tx1"/>
+                          </a:solidFill>
+                          <a:effectLst/>
+                          <a:latin typeface="+mn-lt"/>
+                          <a:ea typeface="+mn-ea"/>
+                          <a:cs typeface="+mn-cs"/>
+                        </a:rPr>
+                      </a:br>
+                      <a:r>
+                        <a:rPr kumimoji="1" lang="en-US" altLang="ko-KR" sz="1000" b="0" i="0" u="none" strike="noStrike" kern="1200" cap="none" normalizeH="0" baseline="0" dirty="0" smtClean="0">
+                          <a:ln>
+                            <a:noFill/>
+                          </a:ln>
+                          <a:solidFill>
+                            <a:schemeClr val="tx1"/>
+                          </a:solidFill>
+                          <a:effectLst/>
+                          <a:latin typeface="+mn-lt"/>
+                          <a:ea typeface="+mn-ea"/>
+                          <a:cs typeface="+mn-cs"/>
+                        </a:rPr>
+                        <a:t>   - SW Unit Test </a:t>
+                      </a:r>
+                      <a:r>
+                        <a:rPr kumimoji="1" lang="ko-KR" altLang="en-US" sz="1000" b="0" i="0" u="none" strike="noStrike" kern="1200" cap="none" normalizeH="0" baseline="0" dirty="0" smtClean="0">
+                          <a:ln>
+                            <a:noFill/>
+                          </a:ln>
+                          <a:solidFill>
+                            <a:schemeClr val="tx1"/>
+                          </a:solidFill>
+                          <a:effectLst/>
+                          <a:latin typeface="+mn-lt"/>
+                          <a:ea typeface="+mn-ea"/>
+                          <a:cs typeface="+mn-cs"/>
+                        </a:rPr>
+                        <a:t>완료</a:t>
+                      </a:r>
+                      <a:r>
+                        <a:rPr kumimoji="1" lang="en-US" altLang="ko-KR" sz="1000" b="0" i="0" u="none" strike="noStrike" kern="1200" cap="none" normalizeH="0" baseline="0" dirty="0" smtClean="0">
+                          <a:ln>
+                            <a:noFill/>
+                          </a:ln>
+                          <a:solidFill>
+                            <a:schemeClr val="tx1"/>
+                          </a:solidFill>
+                          <a:effectLst/>
+                          <a:latin typeface="+mn-lt"/>
+                          <a:ea typeface="+mn-ea"/>
+                          <a:cs typeface="+mn-cs"/>
+                          <a:sym typeface="Wingdings" panose="05000000000000000000" pitchFamily="2" charset="2"/>
+                        </a:rPr>
+                        <a:t/>
+                      </a:r>
+                      <a:br>
+                        <a:rPr kumimoji="1" lang="en-US" altLang="ko-KR" sz="1000" b="0" i="0" u="none" strike="noStrike" kern="1200" cap="none" normalizeH="0" baseline="0" dirty="0" smtClean="0">
+                          <a:ln>
+                            <a:noFill/>
+                          </a:ln>
+                          <a:solidFill>
+                            <a:schemeClr val="tx1"/>
+                          </a:solidFill>
+                          <a:effectLst/>
+                          <a:latin typeface="+mn-lt"/>
+                          <a:ea typeface="+mn-ea"/>
+                          <a:cs typeface="+mn-cs"/>
+                          <a:sym typeface="Wingdings" panose="05000000000000000000" pitchFamily="2" charset="2"/>
+                        </a:rPr>
+                      </a:br>
+                      <a:r>
+                        <a:rPr kumimoji="1" lang="en-US" altLang="ko-KR" sz="1000" b="0" i="0" u="none" strike="noStrike" kern="1200" cap="none" normalizeH="0" baseline="0" dirty="0" smtClean="0">
+                          <a:ln>
+                            <a:noFill/>
+                          </a:ln>
+                          <a:solidFill>
+                            <a:schemeClr val="tx1"/>
+                          </a:solidFill>
+                          <a:effectLst/>
+                          <a:latin typeface="+mn-lt"/>
+                          <a:ea typeface="+mn-ea"/>
+                          <a:cs typeface="+mn-cs"/>
+                          <a:sym typeface="Wingdings" panose="05000000000000000000" pitchFamily="2" charset="2"/>
+                        </a:rPr>
+                        <a:t>   - SW Unit Test </a:t>
+                      </a:r>
+                      <a:r>
+                        <a:rPr kumimoji="1" lang="en-US" altLang="ko-KR" sz="1000" b="0" i="0" u="none" strike="noStrike" kern="1200" cap="none" normalizeH="0" baseline="0" dirty="0" smtClean="0">
+                          <a:ln>
+                            <a:noFill/>
+                          </a:ln>
+                          <a:solidFill>
+                            <a:schemeClr val="tx1"/>
+                          </a:solidFill>
+                          <a:effectLst/>
+                          <a:latin typeface="+mn-lt"/>
+                          <a:ea typeface="+mn-ea"/>
+                          <a:cs typeface="+mn-cs"/>
+                        </a:rPr>
+                        <a:t>Review Report</a:t>
+                      </a:r>
+                      <a:r>
+                        <a:rPr kumimoji="1" lang="en-US" altLang="ko-KR" sz="1000" b="0" i="0" u="none" strike="noStrike" kern="1200" cap="none" normalizeH="0" baseline="0" dirty="0" smtClean="0">
+                          <a:ln>
+                            <a:noFill/>
+                          </a:ln>
+                          <a:solidFill>
+                            <a:schemeClr val="tx1"/>
+                          </a:solidFill>
+                          <a:effectLst/>
+                          <a:latin typeface="+mn-lt"/>
+                          <a:ea typeface="+mn-ea"/>
+                          <a:cs typeface="+mn-cs"/>
+                          <a:sym typeface="Wingdings" panose="05000000000000000000" pitchFamily="2" charset="2"/>
+                        </a:rPr>
                         <a:t> </a:t>
+                      </a:r>
+                      <a:r>
+                        <a:rPr kumimoji="1" lang="ko-KR" altLang="en-US" sz="1000" b="0" i="0" u="none" strike="noStrike" kern="1200" cap="none" normalizeH="0" baseline="0" dirty="0" smtClean="0">
+                          <a:ln>
+                            <a:noFill/>
+                          </a:ln>
+                          <a:solidFill>
+                            <a:schemeClr val="tx1"/>
+                          </a:solidFill>
+                          <a:effectLst/>
+                          <a:latin typeface="+mn-lt"/>
+                          <a:ea typeface="+mn-ea"/>
+                          <a:cs typeface="+mn-cs"/>
+                          <a:sym typeface="Wingdings" panose="05000000000000000000" pitchFamily="2" charset="2"/>
+                        </a:rPr>
+                        <a:t>완료 </a:t>
+                      </a:r>
+                      <a:r>
+                        <a:rPr kumimoji="1" lang="en-US" altLang="ko-KR" sz="1000" b="0" i="0" u="none" strike="noStrike" kern="1200" cap="none" normalizeH="0" baseline="0" dirty="0" smtClean="0">
+                          <a:ln>
+                            <a:noFill/>
+                          </a:ln>
+                          <a:solidFill>
+                            <a:schemeClr val="tx1"/>
+                          </a:solidFill>
+                          <a:effectLst/>
+                          <a:latin typeface="+mn-lt"/>
+                          <a:ea typeface="+mn-ea"/>
+                          <a:cs typeface="+mn-cs"/>
+                          <a:sym typeface="Wingdings" panose="05000000000000000000" pitchFamily="2" charset="2"/>
+                        </a:rPr>
+                        <a:t/>
+                      </a:r>
+                      <a:br>
+                        <a:rPr kumimoji="1" lang="en-US" altLang="ko-KR" sz="1000" b="0" i="0" u="none" strike="noStrike" kern="1200" cap="none" normalizeH="0" baseline="0" dirty="0" smtClean="0">
+                          <a:ln>
+                            <a:noFill/>
+                          </a:ln>
+                          <a:solidFill>
+                            <a:schemeClr val="tx1"/>
+                          </a:solidFill>
+                          <a:effectLst/>
+                          <a:latin typeface="+mn-lt"/>
+                          <a:ea typeface="+mn-ea"/>
+                          <a:cs typeface="+mn-cs"/>
+                          <a:sym typeface="Wingdings" panose="05000000000000000000" pitchFamily="2" charset="2"/>
+                        </a:rPr>
+                      </a:br>
+                      <a:r>
+                        <a:rPr kumimoji="1" lang="en-US" altLang="ko-KR" sz="1000" b="0" i="0" u="none" strike="noStrike" kern="1200" cap="none" normalizeH="0" baseline="0" dirty="0" smtClean="0">
+                          <a:ln>
+                            <a:noFill/>
+                          </a:ln>
+                          <a:solidFill>
+                            <a:schemeClr val="tx1"/>
+                          </a:solidFill>
+                          <a:effectLst/>
+                          <a:latin typeface="+mn-lt"/>
+                          <a:ea typeface="+mn-ea"/>
+                          <a:cs typeface="+mn-cs"/>
+                          <a:sym typeface="Wingdings" panose="05000000000000000000" pitchFamily="2" charset="2"/>
+                        </a:rPr>
+                        <a:t>   - </a:t>
+                      </a:r>
+                      <a:r>
+                        <a:rPr kumimoji="1" lang="en-US" altLang="ko-KR" sz="1000" b="0" i="0" u="none" strike="noStrike" kern="1200" cap="none" normalizeH="0" baseline="0" dirty="0" smtClean="0">
+                          <a:ln>
+                            <a:noFill/>
+                          </a:ln>
+                          <a:solidFill>
+                            <a:schemeClr val="tx1"/>
+                          </a:solidFill>
+                          <a:effectLst/>
+                          <a:latin typeface="+mn-lt"/>
+                          <a:ea typeface="+mn-ea"/>
+                          <a:cs typeface="+mn-cs"/>
+                        </a:rPr>
+                        <a:t>SW Integration Test </a:t>
+                      </a:r>
+                      <a:r>
+                        <a:rPr kumimoji="1" lang="ko-KR" altLang="en-US" sz="1000" b="0" i="0" u="none" strike="noStrike" kern="1200" cap="none" normalizeH="0" baseline="0" dirty="0" smtClean="0">
+                          <a:ln>
+                            <a:noFill/>
+                          </a:ln>
+                          <a:solidFill>
+                            <a:schemeClr val="tx1"/>
+                          </a:solidFill>
+                          <a:effectLst/>
+                          <a:latin typeface="+mn-lt"/>
+                          <a:ea typeface="+mn-ea"/>
+                          <a:cs typeface="+mn-cs"/>
+                        </a:rPr>
+                        <a:t>완료</a:t>
+                      </a:r>
+                      <a:endParaRPr kumimoji="1" lang="en-US" altLang="ko-KR" sz="1000" b="0" i="0" u="none" strike="noStrike" kern="1200" cap="none" normalizeH="0" baseline="0" dirty="0" smtClean="0">
+                        <a:ln>
+                          <a:noFill/>
+                        </a:ln>
+                        <a:solidFill>
+                          <a:schemeClr val="tx1"/>
+                        </a:solidFill>
+                        <a:effectLst/>
+                        <a:latin typeface="+mn-lt"/>
+                        <a:ea typeface="+mn-ea"/>
+                        <a:cs typeface="+mn-cs"/>
+                      </a:endParaRPr>
+                    </a:p>
+                    <a:p>
+                      <a:pPr marL="0" marR="0" lvl="0" indent="0" algn="l" defTabSz="914400" rtl="0" eaLnBrk="1" fontAlgn="base" latinLnBrk="1" hangingPunct="1">
+                        <a:lnSpc>
+                          <a:spcPct val="100000"/>
+                        </a:lnSpc>
+                        <a:spcBef>
+                          <a:spcPct val="20000"/>
+                        </a:spcBef>
+                        <a:spcAft>
+                          <a:spcPct val="0"/>
+                        </a:spcAft>
+                        <a:buClr>
+                          <a:srgbClr val="FF0000"/>
+                        </a:buClr>
+                        <a:buSzTx/>
+                        <a:buFont typeface="Wingdings" pitchFamily="2" charset="2"/>
+                        <a:buNone/>
+                        <a:tabLst/>
+                        <a:defRPr/>
+                      </a:pPr>
+                      <a:r>
+                        <a:rPr kumimoji="1" lang="en-US" altLang="ko-KR" sz="1000" b="0" i="0" u="none" strike="noStrike" kern="1200" cap="none" normalizeH="0" baseline="0" dirty="0" smtClean="0">
+                          <a:ln>
+                            <a:noFill/>
+                          </a:ln>
+                          <a:solidFill>
+                            <a:schemeClr val="tx1"/>
+                          </a:solidFill>
+                          <a:effectLst/>
+                          <a:latin typeface="+mn-lt"/>
+                          <a:ea typeface="+mn-ea"/>
+                          <a:cs typeface="+mn-cs"/>
+                        </a:rPr>
+                        <a:t>   - SW Integration Test Review Report</a:t>
+                      </a:r>
+                      <a:r>
+                        <a:rPr kumimoji="1" lang="ko-KR" altLang="en-US" sz="1000" b="0" i="0" u="none" strike="noStrike" kern="1200" cap="none" normalizeH="0" baseline="0" dirty="0" smtClean="0">
+                          <a:ln>
+                            <a:noFill/>
+                          </a:ln>
+                          <a:solidFill>
+                            <a:schemeClr val="tx1"/>
+                          </a:solidFill>
+                          <a:effectLst/>
+                          <a:latin typeface="+mn-lt"/>
+                          <a:ea typeface="+mn-ea"/>
+                          <a:cs typeface="+mn-cs"/>
+                        </a:rPr>
+                        <a:t>완료</a:t>
+                      </a:r>
+                      <a:r>
+                        <a:rPr kumimoji="1" lang="en-US" altLang="ko-KR" sz="1000" b="0" i="0" u="none" strike="noStrike" kern="1200" cap="none" normalizeH="0" baseline="0" dirty="0" smtClean="0">
+                          <a:ln>
+                            <a:noFill/>
+                          </a:ln>
+                          <a:solidFill>
+                            <a:schemeClr val="tx1"/>
+                          </a:solidFill>
+                          <a:effectLst/>
+                          <a:latin typeface="+mn-lt"/>
+                          <a:ea typeface="+mn-ea"/>
+                          <a:cs typeface="+mn-cs"/>
+                        </a:rPr>
+                        <a:t>   </a:t>
+                      </a:r>
+                    </a:p>
+                    <a:p>
+                      <a:pPr marL="0" marR="0" lvl="0" indent="0" algn="l" defTabSz="914400" rtl="0" eaLnBrk="1" fontAlgn="base" latinLnBrk="1" hangingPunct="1">
+                        <a:lnSpc>
+                          <a:spcPct val="100000"/>
+                        </a:lnSpc>
+                        <a:spcBef>
+                          <a:spcPct val="20000"/>
+                        </a:spcBef>
+                        <a:spcAft>
+                          <a:spcPct val="0"/>
+                        </a:spcAft>
+                        <a:buClr>
+                          <a:srgbClr val="FF0000"/>
+                        </a:buClr>
+                        <a:buSzTx/>
+                        <a:buFont typeface="Wingdings" pitchFamily="2" charset="2"/>
+                        <a:buNone/>
+                        <a:tabLst/>
+                        <a:defRPr/>
+                      </a:pPr>
+                      <a:r>
+                        <a:rPr kumimoji="1" lang="en-US" altLang="ko-KR" sz="1000" b="0" i="0" u="none" strike="noStrike" kern="1200" cap="none" normalizeH="0" baseline="0" dirty="0" smtClean="0">
+                          <a:ln>
+                            <a:noFill/>
+                          </a:ln>
+                          <a:solidFill>
+                            <a:schemeClr val="tx1"/>
+                          </a:solidFill>
+                          <a:effectLst/>
+                          <a:latin typeface="+mn-lt"/>
+                          <a:ea typeface="+mn-ea"/>
+                          <a:cs typeface="+mn-cs"/>
+                        </a:rPr>
+                        <a:t>   - SW Qualification Test </a:t>
+                      </a:r>
+                      <a:r>
+                        <a:rPr kumimoji="1" lang="ko-KR" altLang="en-US" sz="1000" b="0" i="0" u="none" strike="noStrike" kern="1200" cap="none" normalizeH="0" baseline="0" dirty="0" smtClean="0">
+                          <a:ln>
+                            <a:noFill/>
+                          </a:ln>
+                          <a:solidFill>
+                            <a:schemeClr val="tx1"/>
+                          </a:solidFill>
+                          <a:effectLst/>
+                          <a:latin typeface="+mn-lt"/>
+                          <a:ea typeface="+mn-ea"/>
+                          <a:cs typeface="+mn-cs"/>
+                        </a:rPr>
+                        <a:t>완료</a:t>
+                      </a:r>
+                      <a:r>
+                        <a:rPr kumimoji="1" lang="en-US" altLang="ko-KR" sz="1000" b="0" i="0" u="none" strike="noStrike" kern="1200" cap="none" normalizeH="0" baseline="0" dirty="0" smtClean="0">
+                          <a:ln>
+                            <a:noFill/>
+                          </a:ln>
+                          <a:solidFill>
+                            <a:schemeClr val="tx1"/>
+                          </a:solidFill>
+                          <a:effectLst/>
+                          <a:latin typeface="+mn-lt"/>
+                          <a:ea typeface="+mn-ea"/>
+                          <a:cs typeface="+mn-cs"/>
+                        </a:rPr>
+                        <a:t/>
+                      </a:r>
+                      <a:br>
+                        <a:rPr kumimoji="1" lang="en-US" altLang="ko-KR" sz="1000" b="0" i="0" u="none" strike="noStrike" kern="1200" cap="none" normalizeH="0" baseline="0" dirty="0" smtClean="0">
+                          <a:ln>
+                            <a:noFill/>
+                          </a:ln>
+                          <a:solidFill>
+                            <a:schemeClr val="tx1"/>
+                          </a:solidFill>
+                          <a:effectLst/>
+                          <a:latin typeface="+mn-lt"/>
+                          <a:ea typeface="+mn-ea"/>
+                          <a:cs typeface="+mn-cs"/>
+                        </a:rPr>
+                      </a:br>
+                      <a:r>
+                        <a:rPr kumimoji="1" lang="en-US" altLang="ko-KR" sz="1000" b="0" i="0" u="none" strike="noStrike" kern="1200" cap="none" normalizeH="0" baseline="0" dirty="0" smtClean="0">
+                          <a:ln>
+                            <a:noFill/>
+                          </a:ln>
+                          <a:solidFill>
+                            <a:schemeClr val="tx1"/>
+                          </a:solidFill>
+                          <a:effectLst/>
+                          <a:latin typeface="+mn-lt"/>
+                          <a:ea typeface="+mn-ea"/>
+                          <a:cs typeface="+mn-cs"/>
+                        </a:rPr>
+                        <a:t>   - SW Qualification Test Review Report </a:t>
+                      </a:r>
+                      <a:r>
+                        <a:rPr kumimoji="1" lang="ko-KR" altLang="en-US" sz="1000" b="0" i="0" u="none" strike="noStrike" kern="1200" cap="none" normalizeH="0" baseline="0" dirty="0" smtClean="0">
+                          <a:ln>
+                            <a:noFill/>
+                          </a:ln>
+                          <a:solidFill>
+                            <a:schemeClr val="tx1"/>
+                          </a:solidFill>
+                          <a:effectLst/>
+                          <a:latin typeface="+mn-lt"/>
+                          <a:ea typeface="+mn-ea"/>
+                          <a:cs typeface="+mn-cs"/>
+                        </a:rPr>
+                        <a:t>완료</a:t>
                       </a:r>
                       <a:endParaRPr kumimoji="1" lang="en-US" altLang="ko-KR" sz="1000" b="0" i="0" u="none" strike="noStrike" kern="1200" cap="none" normalizeH="0" baseline="0" dirty="0" smtClean="0">
                         <a:ln>
@@ -21715,20 +22629,20 @@
           <p:nvPr>
             <p:extLst>
               <p:ext uri="{D42A27DB-BD31-4B8C-83A1-F6EECF244321}">
-                <p14:modId xmlns:p14="http://schemas.microsoft.com/office/powerpoint/2010/main" val="2532185581"/>
+                <p14:modId xmlns:p14="http://schemas.microsoft.com/office/powerpoint/2010/main" val="1859919937"/>
               </p:ext>
             </p:extLst>
           </p:nvPr>
         </p:nvGraphicFramePr>
         <p:xfrm>
-          <a:off x="3770886" y="4725144"/>
+          <a:off x="3724316" y="4574754"/>
           <a:ext cx="381000" cy="806450"/>
         </p:xfrm>
         <a:graphic>
           <a:graphicData uri="http://schemas.openxmlformats.org/presentationml/2006/ole">
             <mc:AlternateContent xmlns:mc="http://schemas.openxmlformats.org/markup-compatibility/2006">
               <mc:Choice xmlns:v="urn:schemas-microsoft-com:vml" Requires="v">
-                <p:oleObj spid="_x0000_s1133" name="워크시트" showAsIcon="1" r:id="rId4" imgW="380880" imgH="806400" progId="Excel.Sheet.12">
+                <p:oleObj spid="_x0000_s1137" name="워크시트" showAsIcon="1" r:id="rId4" imgW="380880" imgH="806400" progId="Excel.Sheet.12">
                   <p:embed/>
                 </p:oleObj>
               </mc:Choice>
@@ -21749,7 +22663,7 @@
                     </p:blipFill>
                     <p:spPr>
                       <a:xfrm>
-                        <a:off x="3770886" y="4725144"/>
+                        <a:off x="3724316" y="4574754"/>
                         <a:ext cx="381000" cy="806450"/>
                       </a:xfrm>
                       <a:prstGeom prst="rect">
@@ -22508,7 +23422,7 @@
                         <a:defRPr/>
                       </a:pPr>
                       <a:r>
-                        <a:rPr kumimoji="1" lang="en-US" altLang="ko-KR" sz="1000" b="0" i="0" u="none" strike="noStrike" kern="1200" cap="none" normalizeH="0" baseline="0" smtClean="0">
+                        <a:rPr kumimoji="1" lang="en-US" altLang="ko-KR" sz="1000" b="0" i="0" u="none" strike="noStrike" kern="1200" cap="none" normalizeH="0" baseline="0" dirty="0" smtClean="0">
                           <a:ln>
                             <a:noFill/>
                           </a:ln>
@@ -22523,7 +23437,7 @@
                         <a:t>1. </a:t>
                       </a:r>
                       <a:r>
-                        <a:rPr kumimoji="1" lang="ko-KR" altLang="en-US" sz="1000" b="0" i="0" u="none" strike="noStrike" kern="1200" cap="none" normalizeH="0" baseline="0" smtClean="0">
+                        <a:rPr kumimoji="1" lang="ko-KR" altLang="en-US" sz="1000" b="0" i="0" u="none" strike="noStrike" kern="1200" cap="none" normalizeH="0" baseline="0" dirty="0" smtClean="0">
                           <a:ln>
                             <a:noFill/>
                           </a:ln>
@@ -22537,7 +23451,7 @@
                         </a:rPr>
                         <a:t>최대 난방 및 좌우 편차 대응</a:t>
                       </a:r>
-                      <a:endParaRPr kumimoji="1" lang="en-US" altLang="ko-KR" sz="1000" b="0" i="0" u="none" strike="noStrike" kern="1200" cap="none" normalizeH="0" baseline="0" smtClean="0">
+                      <a:endParaRPr kumimoji="1" lang="en-US" altLang="ko-KR" sz="1000" b="0" i="0" u="none" strike="noStrike" kern="1200" cap="none" normalizeH="0" baseline="0" dirty="0" smtClean="0">
                         <a:ln>
                           <a:noFill/>
                         </a:ln>
@@ -22571,7 +23485,7 @@
                         <a:defRPr/>
                       </a:pPr>
                       <a:r>
-                        <a:rPr kumimoji="1" lang="en-US" altLang="ko-KR" sz="1000" b="0" i="0" u="none" strike="noStrike" kern="1200" cap="none" normalizeH="0" baseline="0" smtClean="0">
+                        <a:rPr kumimoji="1" lang="en-US" altLang="ko-KR" sz="1000" b="0" i="0" u="none" strike="noStrike" kern="1200" cap="none" normalizeH="0" baseline="0" dirty="0" smtClean="0">
                           <a:ln>
                             <a:noFill/>
                           </a:ln>
@@ -22583,10 +23497,10 @@
                           <a:ea typeface="+mn-ea"/>
                           <a:cs typeface="+mn-cs"/>
                         </a:rPr>
-                        <a:t>   - SVm </a:t>
-                      </a:r>
-                      <a:r>
-                        <a:rPr kumimoji="1" lang="ko-KR" altLang="en-US" sz="1000" b="0" i="0" u="none" strike="noStrike" kern="1200" cap="none" normalizeH="0" baseline="0" smtClean="0">
+                        <a:t>   - </a:t>
+                      </a:r>
+                      <a:r>
+                        <a:rPr kumimoji="1" lang="en-US" altLang="ko-KR" sz="1000" b="0" i="0" u="none" strike="noStrike" kern="1200" cap="none" normalizeH="0" baseline="0" dirty="0" err="1" smtClean="0">
                           <a:ln>
                             <a:noFill/>
                           </a:ln>
@@ -22598,10 +23512,10 @@
                           <a:ea typeface="+mn-ea"/>
                           <a:cs typeface="+mn-cs"/>
                         </a:rPr>
-                        <a:t>최대 난방 평가 </a:t>
-                      </a:r>
-                      <a:r>
-                        <a:rPr kumimoji="1" lang="en-US" altLang="ko-KR" sz="1000" b="0" i="0" u="none" strike="noStrike" kern="1200" cap="none" normalizeH="0" baseline="0" smtClean="0">
+                        <a:t>SVm</a:t>
+                      </a:r>
+                      <a:r>
+                        <a:rPr kumimoji="1" lang="en-US" altLang="ko-KR" sz="1000" b="0" i="0" u="none" strike="noStrike" kern="1200" cap="none" normalizeH="0" baseline="0" dirty="0" smtClean="0">
                           <a:ln>
                             <a:noFill/>
                           </a:ln>
@@ -22613,10 +23527,10 @@
                           <a:ea typeface="+mn-ea"/>
                           <a:cs typeface="+mn-cs"/>
                         </a:rPr>
-                        <a:t>PASS (S/W </a:t>
-                      </a:r>
-                      <a:r>
-                        <a:rPr kumimoji="1" lang="ko-KR" altLang="en-US" sz="1000" b="0" i="0" u="none" strike="noStrike" kern="1200" cap="none" normalizeH="0" baseline="0" smtClean="0">
+                        <a:t> </a:t>
+                      </a:r>
+                      <a:r>
+                        <a:rPr kumimoji="1" lang="ko-KR" altLang="en-US" sz="1000" b="0" i="0" u="none" strike="noStrike" kern="1200" cap="none" normalizeH="0" baseline="0" dirty="0" smtClean="0">
                           <a:ln>
                             <a:noFill/>
                           </a:ln>
@@ -22628,10 +23542,10 @@
                           <a:ea typeface="+mn-ea"/>
                           <a:cs typeface="+mn-cs"/>
                         </a:rPr>
-                        <a:t>전력 </a:t>
-                      </a:r>
-                      <a:r>
-                        <a:rPr kumimoji="1" lang="en-US" altLang="ko-KR" sz="1000" b="0" i="0" u="none" strike="noStrike" kern="1200" cap="none" normalizeH="0" baseline="0" smtClean="0">
+                        <a:t>최대 난방 평가 </a:t>
+                      </a:r>
+                      <a:r>
+                        <a:rPr kumimoji="1" lang="en-US" altLang="ko-KR" sz="1000" b="0" i="0" u="none" strike="noStrike" kern="1200" cap="none" normalizeH="0" baseline="0" dirty="0" smtClean="0">
                           <a:ln>
                             <a:noFill/>
                           </a:ln>
@@ -22643,10 +23557,10 @@
                           <a:ea typeface="+mn-ea"/>
                           <a:cs typeface="+mn-cs"/>
                         </a:rPr>
-                        <a:t>LIMIT </a:t>
-                      </a:r>
-                      <a:r>
-                        <a:rPr kumimoji="1" lang="ko-KR" altLang="en-US" sz="1000" b="0" i="0" u="none" strike="noStrike" kern="1200" cap="none" normalizeH="0" baseline="0" smtClean="0">
+                        <a:t>PASS (S/W </a:t>
+                      </a:r>
+                      <a:r>
+                        <a:rPr kumimoji="1" lang="ko-KR" altLang="en-US" sz="1000" b="0" i="0" u="none" strike="noStrike" kern="1200" cap="none" normalizeH="0" baseline="0" dirty="0" smtClean="0">
                           <a:ln>
                             <a:noFill/>
                           </a:ln>
@@ -22658,10 +23572,40 @@
                           <a:ea typeface="+mn-ea"/>
                           <a:cs typeface="+mn-cs"/>
                         </a:rPr>
+                        <a:t>전력 </a:t>
+                      </a:r>
+                      <a:r>
+                        <a:rPr kumimoji="1" lang="en-US" altLang="ko-KR" sz="1000" b="0" i="0" u="none" strike="noStrike" kern="1200" cap="none" normalizeH="0" baseline="0" dirty="0" smtClean="0">
+                          <a:ln>
+                            <a:noFill/>
+                          </a:ln>
+                          <a:solidFill>
+                            <a:schemeClr val="tx1"/>
+                          </a:solidFill>
+                          <a:effectLst/>
+                          <a:latin typeface="+mn-lt"/>
+                          <a:ea typeface="+mn-ea"/>
+                          <a:cs typeface="+mn-cs"/>
+                        </a:rPr>
+                        <a:t>LIMIT </a:t>
+                      </a:r>
+                      <a:r>
+                        <a:rPr kumimoji="1" lang="ko-KR" altLang="en-US" sz="1000" b="0" i="0" u="none" strike="noStrike" kern="1200" cap="none" normalizeH="0" baseline="0" dirty="0" smtClean="0">
+                          <a:ln>
+                            <a:noFill/>
+                          </a:ln>
+                          <a:solidFill>
+                            <a:schemeClr val="tx1"/>
+                          </a:solidFill>
+                          <a:effectLst/>
+                          <a:latin typeface="+mn-lt"/>
+                          <a:ea typeface="+mn-ea"/>
+                          <a:cs typeface="+mn-cs"/>
+                        </a:rPr>
                         <a:t>해제</a:t>
                       </a:r>
                       <a:r>
-                        <a:rPr kumimoji="1" lang="en-US" altLang="ko-KR" sz="1000" b="0" i="0" u="none" strike="noStrike" kern="1200" cap="none" normalizeH="0" baseline="0" smtClean="0">
+                        <a:rPr kumimoji="1" lang="en-US" altLang="ko-KR" sz="1000" b="0" i="0" u="none" strike="noStrike" kern="1200" cap="none" normalizeH="0" baseline="0" dirty="0" smtClean="0">
                           <a:ln>
                             <a:noFill/>
                           </a:ln>
@@ -22697,7 +23641,7 @@
                         <a:defRPr/>
                       </a:pPr>
                       <a:r>
-                        <a:rPr kumimoji="1" lang="en-US" altLang="ko-KR" sz="1000" b="0" i="0" u="none" strike="noStrike" kern="1200" cap="none" normalizeH="0" baseline="0" smtClean="0">
+                        <a:rPr kumimoji="1" lang="en-US" altLang="ko-KR" sz="1000" b="0" i="0" u="none" strike="noStrike" kern="1200" cap="none" normalizeH="0" baseline="0" dirty="0" smtClean="0">
                           <a:ln>
                             <a:noFill/>
                           </a:ln>
@@ -22712,7 +23656,7 @@
                         <a:t>     </a:t>
                       </a:r>
                       <a:r>
-                        <a:rPr kumimoji="1" lang="ko-KR" altLang="en-US" sz="1000" b="0" i="0" u="none" strike="noStrike" kern="1200" cap="none" normalizeH="0" baseline="0" smtClean="0">
+                        <a:rPr kumimoji="1" lang="ko-KR" altLang="en-US" sz="1000" b="0" i="0" u="none" strike="noStrike" kern="1200" cap="none" normalizeH="0" baseline="0" dirty="0" err="1" smtClean="0">
                           <a:ln>
                             <a:noFill/>
                           </a:ln>
@@ -22724,10 +23668,10 @@
                           <a:ea typeface="+mn-ea"/>
                           <a:cs typeface="+mn-cs"/>
                         </a:rPr>
-                        <a:t>평가시료 </a:t>
-                      </a:r>
-                      <a:r>
-                        <a:rPr kumimoji="1" lang="en-US" altLang="ko-KR" sz="1000" b="0" i="0" u="none" strike="noStrike" kern="1200" cap="none" normalizeH="0" baseline="0" smtClean="0">
+                        <a:t>평가시료</a:t>
+                      </a:r>
+                      <a:r>
+                        <a:rPr kumimoji="1" lang="ko-KR" altLang="en-US" sz="1000" b="0" i="0" u="none" strike="noStrike" kern="1200" cap="none" normalizeH="0" baseline="0" dirty="0" smtClean="0">
                           <a:ln>
                             <a:noFill/>
                           </a:ln>
@@ -22739,10 +23683,10 @@
                           <a:ea typeface="+mn-ea"/>
                           <a:cs typeface="+mn-cs"/>
                         </a:rPr>
-                        <a:t>: </a:t>
-                      </a:r>
-                      <a:r>
-                        <a:rPr kumimoji="1" lang="ko-KR" altLang="en-US" sz="1000" b="0" i="0" u="none" strike="noStrike" kern="1200" cap="none" normalizeH="0" baseline="0" smtClean="0">
+                        <a:t> </a:t>
+                      </a:r>
+                      <a:r>
+                        <a:rPr kumimoji="1" lang="en-US" altLang="ko-KR" sz="1000" b="0" i="0" u="none" strike="noStrike" kern="1200" cap="none" normalizeH="0" baseline="0" dirty="0" smtClean="0">
                           <a:ln>
                             <a:noFill/>
                           </a:ln>
@@ -22754,10 +23698,10 @@
                           <a:ea typeface="+mn-ea"/>
                           <a:cs typeface="+mn-cs"/>
                         </a:rPr>
-                        <a:t>핀 </a:t>
-                      </a:r>
-                      <a:r>
-                        <a:rPr kumimoji="1" lang="en-US" altLang="ko-KR" sz="1000" b="0" i="0" u="none" strike="noStrike" kern="1200" cap="none" normalizeH="0" baseline="0" smtClean="0">
+                        <a:t>: </a:t>
+                      </a:r>
+                      <a:r>
+                        <a:rPr kumimoji="1" lang="ko-KR" altLang="en-US" sz="1000" b="0" i="0" u="none" strike="noStrike" kern="1200" cap="none" normalizeH="0" baseline="0" dirty="0" smtClean="0">
                           <a:ln>
                             <a:noFill/>
                           </a:ln>
@@ -22769,10 +23713,10 @@
                           <a:ea typeface="+mn-ea"/>
                           <a:cs typeface="+mn-cs"/>
                         </a:rPr>
-                        <a:t>24mm, TC165</a:t>
-                      </a:r>
-                      <a:r>
-                        <a:rPr kumimoji="1" lang="ko-KR" altLang="en-US" sz="1000" b="0" i="0" u="none" strike="noStrike" kern="1200" cap="none" normalizeH="0" baseline="0" smtClean="0">
+                        <a:t>핀 </a:t>
+                      </a:r>
+                      <a:r>
+                        <a:rPr kumimoji="1" lang="en-US" altLang="ko-KR" sz="1000" b="0" i="0" u="none" strike="noStrike" kern="1200" cap="none" normalizeH="0" baseline="0" dirty="0" smtClean="0">
                           <a:ln>
                             <a:noFill/>
                           </a:ln>
@@ -22784,9 +23728,24 @@
                           <a:ea typeface="+mn-ea"/>
                           <a:cs typeface="+mn-cs"/>
                         </a:rPr>
+                        <a:t>24mm, TC165</a:t>
+                      </a:r>
+                      <a:r>
+                        <a:rPr kumimoji="1" lang="ko-KR" altLang="en-US" sz="1000" b="0" i="0" u="none" strike="noStrike" kern="1200" cap="none" normalizeH="0" baseline="0" dirty="0" smtClean="0">
+                          <a:ln>
+                            <a:noFill/>
+                          </a:ln>
+                          <a:solidFill>
+                            <a:schemeClr val="tx1"/>
+                          </a:solidFill>
+                          <a:effectLst/>
+                          <a:latin typeface="+mn-lt"/>
+                          <a:ea typeface="+mn-ea"/>
+                          <a:cs typeface="+mn-cs"/>
+                        </a:rPr>
                         <a:t>℃</a:t>
                       </a:r>
-                      <a:endParaRPr kumimoji="1" lang="en-US" altLang="ko-KR" sz="1000" b="0" i="0" u="none" strike="noStrike" kern="1200" cap="none" normalizeH="0" baseline="0" smtClean="0">
+                      <a:endParaRPr kumimoji="1" lang="en-US" altLang="ko-KR" sz="1000" b="0" i="0" u="none" strike="noStrike" kern="1200" cap="none" normalizeH="0" baseline="0" dirty="0" smtClean="0">
                         <a:ln>
                           <a:noFill/>
                         </a:ln>
@@ -22819,7 +23778,7 @@
                         <a:tabLst/>
                         <a:defRPr/>
                       </a:pPr>
-                      <a:endParaRPr kumimoji="1" lang="en-US" altLang="ko-KR" sz="1000" b="0" i="0" u="none" strike="noStrike" kern="1200" cap="none" normalizeH="0" baseline="0" smtClean="0">
+                      <a:endParaRPr kumimoji="1" lang="en-US" altLang="ko-KR" sz="1000" b="0" i="0" u="none" strike="noStrike" kern="1200" cap="none" normalizeH="0" baseline="0" dirty="0" smtClean="0">
                         <a:ln>
                           <a:noFill/>
                         </a:ln>
@@ -22853,7 +23812,7 @@
                         <a:defRPr/>
                       </a:pPr>
                       <a:r>
-                        <a:rPr kumimoji="1" lang="en-US" altLang="ko-KR" sz="1000" b="0" i="0" u="none" strike="noStrike" kern="1200" cap="none" normalizeH="0" baseline="0" smtClean="0">
+                        <a:rPr kumimoji="1" lang="en-US" altLang="ko-KR" sz="1000" b="0" i="0" u="none" strike="noStrike" kern="1200" cap="none" normalizeH="0" baseline="0" dirty="0" smtClean="0">
                           <a:ln>
                             <a:noFill/>
                           </a:ln>
@@ -22868,7 +23827,7 @@
                         <a:t>   - S/W </a:t>
                       </a:r>
                       <a:r>
-                        <a:rPr kumimoji="1" lang="ko-KR" altLang="en-US" sz="1000" b="0" i="0" u="none" strike="noStrike" kern="1200" cap="none" normalizeH="0" baseline="0" smtClean="0">
+                        <a:rPr kumimoji="1" lang="ko-KR" altLang="en-US" sz="1000" b="0" i="0" u="none" strike="noStrike" kern="1200" cap="none" normalizeH="0" baseline="0" dirty="0" smtClean="0">
                           <a:ln>
                             <a:noFill/>
                           </a:ln>
@@ -22883,7 +23842,7 @@
                         <a:t>전력 </a:t>
                       </a:r>
                       <a:r>
-                        <a:rPr kumimoji="1" lang="en-US" altLang="ko-KR" sz="1000" b="0" i="0" u="none" strike="noStrike" kern="1200" cap="none" normalizeH="0" baseline="0" smtClean="0">
+                        <a:rPr kumimoji="1" lang="en-US" altLang="ko-KR" sz="1000" b="0" i="0" u="none" strike="noStrike" kern="1200" cap="none" normalizeH="0" baseline="0" dirty="0" smtClean="0">
                           <a:ln>
                             <a:noFill/>
                           </a:ln>
@@ -22898,7 +23857,7 @@
                         <a:t>LIMIT </a:t>
                       </a:r>
                       <a:r>
-                        <a:rPr kumimoji="1" lang="ko-KR" altLang="en-US" sz="1000" b="0" i="0" u="none" strike="noStrike" kern="1200" cap="none" normalizeH="0" baseline="0" smtClean="0">
+                        <a:rPr kumimoji="1" lang="ko-KR" altLang="en-US" sz="1000" b="0" i="0" u="none" strike="noStrike" kern="1200" cap="none" normalizeH="0" baseline="0" dirty="0" smtClean="0">
                           <a:ln>
                             <a:noFill/>
                           </a:ln>
@@ -22913,7 +23872,7 @@
                         <a:t>및 선형 구간 재정립 하기 위한 문의 </a:t>
                       </a:r>
                       <a:r>
-                        <a:rPr kumimoji="1" lang="en-US" altLang="ko-KR" sz="1000" b="0" i="0" u="none" strike="noStrike" kern="1200" cap="none" normalizeH="0" baseline="0" smtClean="0">
+                        <a:rPr kumimoji="1" lang="en-US" altLang="ko-KR" sz="1000" b="0" i="0" u="none" strike="noStrike" kern="1200" cap="none" normalizeH="0" baseline="0" dirty="0" smtClean="0">
                           <a:ln>
                             <a:noFill/>
                           </a:ln>
@@ -22928,7 +23887,7 @@
                         <a:t>(</a:t>
                       </a:r>
                       <a:r>
-                        <a:rPr kumimoji="1" lang="ko-KR" altLang="en-US" sz="1000" b="0" i="0" u="none" strike="noStrike" kern="1200" cap="none" normalizeH="0" baseline="0" smtClean="0">
+                        <a:rPr kumimoji="1" lang="ko-KR" altLang="en-US" sz="1000" b="0" i="0" u="none" strike="noStrike" kern="1200" cap="none" normalizeH="0" baseline="0" dirty="0" err="1" smtClean="0">
                           <a:ln>
                             <a:noFill/>
                           </a:ln>
@@ -22943,7 +23902,7 @@
                         <a:t>공조설계</a:t>
                       </a:r>
                       <a:r>
-                        <a:rPr kumimoji="1" lang="en-US" altLang="ko-KR" sz="1000" b="0" i="0" u="none" strike="noStrike" kern="1200" cap="none" normalizeH="0" baseline="0" smtClean="0">
+                        <a:rPr kumimoji="1" lang="en-US" altLang="ko-KR" sz="1000" b="0" i="0" u="none" strike="noStrike" kern="1200" cap="none" normalizeH="0" baseline="0" dirty="0" smtClean="0">
                           <a:ln>
                             <a:noFill/>
                           </a:ln>
@@ -22979,7 +23938,7 @@
                         <a:defRPr/>
                       </a:pPr>
                       <a:r>
-                        <a:rPr kumimoji="1" lang="en-US" altLang="ko-KR" sz="1000" b="0" i="0" u="none" strike="noStrike" kern="1200" cap="none" normalizeH="0" baseline="0" smtClean="0">
+                        <a:rPr kumimoji="1" lang="en-US" altLang="ko-KR" sz="1000" b="0" i="0" u="none" strike="noStrike" kern="1200" cap="none" normalizeH="0" baseline="0" dirty="0" smtClean="0">
                           <a:ln>
                             <a:noFill/>
                           </a:ln>
@@ -22994,7 +23953,7 @@
                         <a:t>     : </a:t>
                       </a:r>
                       <a:r>
-                        <a:rPr kumimoji="1" lang="ko-KR" altLang="en-US" sz="1000" b="0" i="0" u="none" strike="noStrike" kern="1200" cap="none" normalizeH="0" baseline="0" smtClean="0">
+                        <a:rPr kumimoji="1" lang="ko-KR" altLang="en-US" sz="1000" b="0" i="0" u="none" strike="noStrike" kern="1200" cap="none" normalizeH="0" baseline="0" dirty="0" smtClean="0">
                           <a:ln>
                             <a:noFill/>
                           </a:ln>
@@ -23009,7 +23968,7 @@
                         <a:t>전력 </a:t>
                       </a:r>
                       <a:r>
-                        <a:rPr kumimoji="1" lang="en-US" altLang="ko-KR" sz="1000" b="0" i="0" u="none" strike="noStrike" kern="1200" cap="none" normalizeH="0" baseline="0" smtClean="0">
+                        <a:rPr kumimoji="1" lang="en-US" altLang="ko-KR" sz="1000" b="0" i="0" u="none" strike="noStrike" kern="1200" cap="none" normalizeH="0" baseline="0" dirty="0" smtClean="0">
                           <a:ln>
                             <a:noFill/>
                           </a:ln>
@@ -23024,7 +23983,7 @@
                         <a:t>LIMIT </a:t>
                       </a:r>
                       <a:r>
-                        <a:rPr kumimoji="1" lang="ko-KR" altLang="en-US" sz="1000" b="0" i="0" u="none" strike="noStrike" kern="1200" cap="none" normalizeH="0" baseline="0" smtClean="0">
+                        <a:rPr kumimoji="1" lang="ko-KR" altLang="en-US" sz="1000" b="0" i="0" u="none" strike="noStrike" kern="1200" cap="none" normalizeH="0" baseline="0" dirty="0" smtClean="0">
                           <a:ln>
                             <a:noFill/>
                           </a:ln>
@@ -23039,7 +23998,7 @@
                         <a:t>및 선형 구간 정립 시 실차조건에서 좌</a:t>
                       </a:r>
                       <a:r>
-                        <a:rPr kumimoji="1" lang="en-US" altLang="ko-KR" sz="1000" b="0" i="0" u="none" strike="noStrike" kern="1200" cap="none" normalizeH="0" baseline="0" smtClean="0">
+                        <a:rPr kumimoji="1" lang="en-US" altLang="ko-KR" sz="1000" b="0" i="0" u="none" strike="noStrike" kern="1200" cap="none" normalizeH="0" baseline="0" dirty="0" smtClean="0">
                           <a:ln>
                             <a:noFill/>
                           </a:ln>
@@ -23054,7 +24013,7 @@
                         <a:t>/</a:t>
                       </a:r>
                       <a:r>
-                        <a:rPr kumimoji="1" lang="ko-KR" altLang="en-US" sz="1000" b="0" i="0" u="none" strike="noStrike" kern="1200" cap="none" normalizeH="0" baseline="0" smtClean="0">
+                        <a:rPr kumimoji="1" lang="ko-KR" altLang="en-US" sz="1000" b="0" i="0" u="none" strike="noStrike" kern="1200" cap="none" normalizeH="0" baseline="0" dirty="0" smtClean="0">
                           <a:ln>
                             <a:noFill/>
                           </a:ln>
@@ -23068,7 +24027,7 @@
                         </a:rPr>
                         <a:t>우 편차</a:t>
                       </a:r>
-                      <a:endParaRPr kumimoji="1" lang="en-US" altLang="ko-KR" sz="1000" b="0" i="0" u="none" strike="noStrike" kern="1200" cap="none" normalizeH="0" baseline="0" smtClean="0">
+                      <a:endParaRPr kumimoji="1" lang="en-US" altLang="ko-KR" sz="1000" b="0" i="0" u="none" strike="noStrike" kern="1200" cap="none" normalizeH="0" baseline="0" dirty="0" smtClean="0">
                         <a:ln>
                           <a:noFill/>
                         </a:ln>
@@ -23102,7 +24061,7 @@
                         <a:defRPr/>
                       </a:pPr>
                       <a:r>
-                        <a:rPr kumimoji="1" lang="en-US" altLang="ko-KR" sz="1000" b="0" i="0" u="none" strike="noStrike" kern="1200" cap="none" normalizeH="0" baseline="0" smtClean="0">
+                        <a:rPr kumimoji="1" lang="en-US" altLang="ko-KR" sz="1000" b="0" i="0" u="none" strike="noStrike" kern="1200" cap="none" normalizeH="0" baseline="0" dirty="0" smtClean="0">
                           <a:ln>
                             <a:noFill/>
                           </a:ln>
@@ -23117,7 +24076,7 @@
                         <a:t>       </a:t>
                       </a:r>
                       <a:r>
-                        <a:rPr kumimoji="1" lang="ko-KR" altLang="en-US" sz="1000" b="0" i="0" u="none" strike="noStrike" kern="1200" cap="none" normalizeH="0" baseline="0" smtClean="0">
+                        <a:rPr kumimoji="1" lang="ko-KR" altLang="en-US" sz="1000" b="0" i="0" u="none" strike="noStrike" kern="1200" cap="none" normalizeH="0" baseline="0" dirty="0" smtClean="0">
                           <a:ln>
                             <a:noFill/>
                           </a:ln>
@@ -23132,7 +24091,7 @@
                         <a:t>튜닝 진행 필요 </a:t>
                       </a:r>
                       <a:r>
-                        <a:rPr kumimoji="1" lang="en-US" altLang="ko-KR" sz="1000" b="0" i="0" u="none" strike="noStrike" kern="1200" cap="none" normalizeH="0" baseline="0" smtClean="0">
+                        <a:rPr kumimoji="1" lang="en-US" altLang="ko-KR" sz="1000" b="0" i="0" u="none" strike="noStrike" kern="1200" cap="none" normalizeH="0" baseline="0" dirty="0" smtClean="0">
                           <a:ln>
                             <a:noFill/>
                           </a:ln>
@@ -23147,7 +24106,7 @@
                         <a:t>(</a:t>
                       </a:r>
                       <a:r>
-                        <a:rPr kumimoji="1" lang="ko-KR" altLang="en-US" sz="1000" b="0" i="0" u="none" strike="noStrike" kern="1200" cap="none" normalizeH="0" baseline="0" smtClean="0">
+                        <a:rPr kumimoji="1" lang="ko-KR" altLang="en-US" sz="1000" b="0" i="0" u="none" strike="noStrike" kern="1200" cap="none" normalizeH="0" baseline="0" dirty="0" err="1" smtClean="0">
                           <a:ln>
                             <a:noFill/>
                           </a:ln>
@@ -23159,10 +24118,55 @@
                           <a:ea typeface="+mn-ea"/>
                           <a:cs typeface="+mn-cs"/>
                         </a:rPr>
-                        <a:t>고객사에 챔버 일정 요청 중</a:t>
-                      </a:r>
-                      <a:r>
-                        <a:rPr kumimoji="1" lang="en-US" altLang="ko-KR" sz="1000" b="0" i="0" u="none" strike="noStrike" kern="1200" cap="none" normalizeH="0" baseline="0" smtClean="0">
+                        <a:t>고객사에</a:t>
+                      </a:r>
+                      <a:r>
+                        <a:rPr kumimoji="1" lang="ko-KR" altLang="en-US" sz="1000" b="0" i="0" u="none" strike="noStrike" kern="1200" cap="none" normalizeH="0" baseline="0" dirty="0" smtClean="0">
+                          <a:ln>
+                            <a:noFill/>
+                          </a:ln>
+                          <a:solidFill>
+                            <a:schemeClr val="tx1"/>
+                          </a:solidFill>
+                          <a:effectLst/>
+                          <a:latin typeface="+mn-lt"/>
+                          <a:ea typeface="+mn-ea"/>
+                          <a:cs typeface="+mn-cs"/>
+                        </a:rPr>
+                        <a:t> </a:t>
+                      </a:r>
+                      <a:r>
+                        <a:rPr kumimoji="1" lang="ko-KR" altLang="en-US" sz="1000" b="0" i="0" u="none" strike="noStrike" kern="1200" cap="none" normalizeH="0" baseline="0" dirty="0" err="1" smtClean="0">
+                          <a:ln>
+                            <a:noFill/>
+                          </a:ln>
+                          <a:solidFill>
+                            <a:schemeClr val="tx1"/>
+                          </a:solidFill>
+                          <a:effectLst/>
+                          <a:latin typeface="+mn-lt"/>
+                          <a:ea typeface="+mn-ea"/>
+                          <a:cs typeface="+mn-cs"/>
+                        </a:rPr>
+                        <a:t>챔버</a:t>
+                      </a:r>
+                      <a:r>
+                        <a:rPr kumimoji="1" lang="ko-KR" altLang="en-US" sz="1000" b="0" i="0" u="none" strike="noStrike" kern="1200" cap="none" normalizeH="0" baseline="0" dirty="0" smtClean="0">
+                          <a:ln>
+                            <a:noFill/>
+                          </a:ln>
+                          <a:solidFill>
+                            <a:schemeClr val="tx1"/>
+                          </a:solidFill>
+                          <a:effectLst/>
+                          <a:latin typeface="+mn-lt"/>
+                          <a:ea typeface="+mn-ea"/>
+                          <a:cs typeface="+mn-cs"/>
+                        </a:rPr>
+                        <a:t> 일정 요청 중</a:t>
+                      </a:r>
+                      <a:r>
+                        <a:rPr kumimoji="1" lang="en-US" altLang="ko-KR" sz="1000" b="0" i="0" u="none" strike="noStrike" kern="1200" cap="none" normalizeH="0" baseline="0" dirty="0" smtClean="0">
                           <a:ln>
                             <a:noFill/>
                           </a:ln>
@@ -23198,7 +24202,7 @@
                         <a:defRPr/>
                       </a:pPr>
                       <a:r>
-                        <a:rPr kumimoji="1" lang="en-US" altLang="ko-KR" sz="1000" b="0" i="0" u="none" strike="noStrike" kern="1200" cap="none" normalizeH="0" baseline="0" smtClean="0">
+                        <a:rPr kumimoji="1" lang="en-US" altLang="ko-KR" sz="1000" b="0" i="0" u="none" strike="noStrike" kern="1200" cap="none" normalizeH="0" baseline="0" dirty="0" smtClean="0">
                           <a:ln>
                             <a:noFill/>
                           </a:ln>
@@ -23234,7 +24238,7 @@
                         <a:defRPr/>
                       </a:pPr>
                       <a:r>
-                        <a:rPr kumimoji="1" lang="en-US" altLang="ko-KR" sz="1000" b="0" i="0" u="none" strike="noStrike" kern="1200" cap="none" normalizeH="0" baseline="0" smtClean="0">
+                        <a:rPr kumimoji="1" lang="en-US" altLang="ko-KR" sz="1000" b="0" i="0" u="none" strike="noStrike" kern="1200" cap="none" normalizeH="0" baseline="0" dirty="0" smtClean="0">
                           <a:ln>
                             <a:noFill/>
                           </a:ln>
@@ -23249,7 +24253,7 @@
                         <a:t>2. TC 165</a:t>
                       </a:r>
                       <a:r>
-                        <a:rPr kumimoji="1" lang="ko-KR" altLang="en-US" sz="1000" b="0" i="0" u="none" strike="noStrike" kern="1200" cap="none" normalizeH="0" baseline="0" smtClean="0">
+                        <a:rPr kumimoji="1" lang="ko-KR" altLang="en-US" sz="1000" b="0" i="0" u="none" strike="noStrike" kern="1200" cap="none" normalizeH="0" baseline="0" dirty="0" smtClean="0">
                           <a:ln>
                             <a:noFill/>
                           </a:ln>
@@ -23264,7 +24268,7 @@
                         <a:t>℃ 변경에 따른 </a:t>
                       </a:r>
                       <a:r>
-                        <a:rPr kumimoji="1" lang="en-US" altLang="ko-KR" sz="1000" b="0" i="0" u="none" strike="noStrike" kern="1200" cap="none" normalizeH="0" baseline="0" smtClean="0">
+                        <a:rPr kumimoji="1" lang="en-US" altLang="ko-KR" sz="1000" b="0" i="0" u="none" strike="noStrike" kern="1200" cap="none" normalizeH="0" baseline="0" dirty="0" smtClean="0">
                           <a:ln>
                             <a:noFill/>
                           </a:ln>
@@ -23279,7 +24283,7 @@
                         <a:t>Soft-Start </a:t>
                       </a:r>
                       <a:r>
-                        <a:rPr kumimoji="1" lang="ko-KR" altLang="en-US" sz="1000" b="0" i="0" u="none" strike="noStrike" kern="1200" cap="none" normalizeH="0" baseline="0" smtClean="0">
+                        <a:rPr kumimoji="1" lang="ko-KR" altLang="en-US" sz="1000" b="0" i="0" u="none" strike="noStrike" kern="1200" cap="none" normalizeH="0" baseline="0" dirty="0" err="1" smtClean="0">
                           <a:ln>
                             <a:noFill/>
                           </a:ln>
@@ -23291,9 +24295,24 @@
                           <a:ea typeface="+mn-ea"/>
                           <a:cs typeface="+mn-cs"/>
                         </a:rPr>
-                        <a:t>로직 설계 완료</a:t>
-                      </a:r>
-                      <a:endParaRPr kumimoji="1" lang="en-US" altLang="ko-KR" sz="1000" b="0" i="0" u="none" strike="noStrike" kern="1200" cap="none" normalizeH="0" baseline="0" smtClean="0">
+                        <a:t>로직</a:t>
+                      </a:r>
+                      <a:r>
+                        <a:rPr kumimoji="1" lang="ko-KR" altLang="en-US" sz="1000" b="0" i="0" u="none" strike="noStrike" kern="1200" cap="none" normalizeH="0" baseline="0" dirty="0" smtClean="0">
+                          <a:ln>
+                            <a:noFill/>
+                          </a:ln>
+                          <a:solidFill>
+                            <a:schemeClr val="tx1"/>
+                          </a:solidFill>
+                          <a:effectLst/>
+                          <a:latin typeface="+mn-lt"/>
+                          <a:ea typeface="+mn-ea"/>
+                          <a:cs typeface="+mn-cs"/>
+                        </a:rPr>
+                        <a:t> 설계 완료</a:t>
+                      </a:r>
+                      <a:endParaRPr kumimoji="1" lang="en-US" altLang="ko-KR" sz="1000" b="0" i="0" u="none" strike="noStrike" kern="1200" cap="none" normalizeH="0" baseline="0" dirty="0" smtClean="0">
                         <a:ln>
                           <a:noFill/>
                         </a:ln>
@@ -23327,7 +24346,7 @@
                         <a:defRPr/>
                       </a:pPr>
                       <a:r>
-                        <a:rPr kumimoji="1" lang="en-US" altLang="ko-KR" sz="1000" b="0" i="0" u="none" strike="noStrike" kern="1200" cap="none" normalizeH="0" baseline="0" smtClean="0">
+                        <a:rPr kumimoji="1" lang="en-US" altLang="ko-KR" sz="1000" b="0" i="0" u="none" strike="noStrike" kern="1200" cap="none" normalizeH="0" baseline="0" dirty="0" smtClean="0">
                           <a:ln>
                             <a:noFill/>
                           </a:ln>
@@ -23342,7 +24361,7 @@
                         <a:t>     : Soft-Start </a:t>
                       </a:r>
                       <a:r>
-                        <a:rPr kumimoji="1" lang="ko-KR" altLang="en-US" sz="1000" b="0" i="0" u="none" strike="noStrike" kern="1200" cap="none" normalizeH="0" baseline="0" smtClean="0">
+                        <a:rPr kumimoji="1" lang="ko-KR" altLang="en-US" sz="1000" b="0" i="0" u="none" strike="noStrike" kern="1200" cap="none" normalizeH="0" baseline="0" dirty="0" err="1" smtClean="0">
                           <a:ln>
                             <a:noFill/>
                           </a:ln>
@@ -23354,10 +24373,25 @@
                           <a:ea typeface="+mn-ea"/>
                           <a:cs typeface="+mn-cs"/>
                         </a:rPr>
-                        <a:t>로직 설계 진행 완료 </a:t>
-                      </a:r>
-                      <a:r>
-                        <a:rPr kumimoji="1" lang="en-US" altLang="ko-KR" sz="1000" b="0" i="0" u="none" strike="noStrike" kern="1200" cap="none" normalizeH="0" baseline="0" smtClean="0">
+                        <a:t>로직</a:t>
+                      </a:r>
+                      <a:r>
+                        <a:rPr kumimoji="1" lang="ko-KR" altLang="en-US" sz="1000" b="0" i="0" u="none" strike="noStrike" kern="1200" cap="none" normalizeH="0" baseline="0" dirty="0" smtClean="0">
+                          <a:ln>
+                            <a:noFill/>
+                          </a:ln>
+                          <a:solidFill>
+                            <a:schemeClr val="tx1"/>
+                          </a:solidFill>
+                          <a:effectLst/>
+                          <a:latin typeface="+mn-lt"/>
+                          <a:ea typeface="+mn-ea"/>
+                          <a:cs typeface="+mn-cs"/>
+                        </a:rPr>
+                        <a:t> 설계 진행 완료 </a:t>
+                      </a:r>
+                      <a:r>
+                        <a:rPr kumimoji="1" lang="en-US" altLang="ko-KR" sz="1000" b="0" i="0" u="none" strike="noStrike" kern="1200" cap="none" normalizeH="0" baseline="0" dirty="0" smtClean="0">
                           <a:ln>
                             <a:noFill/>
                           </a:ln>
@@ -23393,7 +24427,7 @@
                         <a:defRPr/>
                       </a:pPr>
                       <a:r>
-                        <a:rPr kumimoji="1" lang="en-US" altLang="ko-KR" sz="1000" b="0" i="0" u="none" strike="noStrike" kern="1200" cap="none" normalizeH="0" baseline="0" smtClean="0">
+                        <a:rPr kumimoji="1" lang="en-US" altLang="ko-KR" sz="1000" b="0" i="0" u="none" strike="noStrike" kern="1200" cap="none" normalizeH="0" baseline="0" dirty="0" smtClean="0">
                           <a:ln>
                             <a:noFill/>
                           </a:ln>
@@ -23408,7 +24442,7 @@
                         <a:t>     : BJ/QV </a:t>
                       </a:r>
                       <a:r>
-                        <a:rPr kumimoji="1" lang="ko-KR" altLang="en-US" sz="1000" b="0" i="0" u="none" strike="noStrike" kern="1200" cap="none" normalizeH="0" baseline="0" smtClean="0">
+                        <a:rPr kumimoji="1" lang="ko-KR" altLang="en-US" sz="1000" b="0" i="0" u="none" strike="noStrike" kern="1200" cap="none" normalizeH="0" baseline="0" dirty="0" smtClean="0">
                           <a:ln>
                             <a:noFill/>
                           </a:ln>
@@ -26666,7 +27700,7 @@
                         <a:defRPr/>
                       </a:pPr>
                       <a:r>
-                        <a:rPr kumimoji="1" lang="en-US" altLang="ko-KR" sz="1000" b="0" i="0" u="none" strike="noStrike" kern="1200" cap="none" normalizeH="0" baseline="0" smtClean="0">
+                        <a:rPr kumimoji="1" lang="en-US" altLang="ko-KR" sz="1000" b="0" i="0" u="none" strike="noStrike" kern="1200" cap="none" normalizeH="0" baseline="0" dirty="0" smtClean="0">
                           <a:ln>
                             <a:noFill/>
                           </a:ln>
@@ -26681,7 +27715,7 @@
                         <a:t>1. </a:t>
                       </a:r>
                       <a:r>
-                        <a:rPr kumimoji="1" lang="ko-KR" altLang="en-US" sz="1000" b="0" i="0" u="none" strike="noStrike" kern="1200" cap="none" normalizeH="0" baseline="0" smtClean="0">
+                        <a:rPr kumimoji="1" lang="ko-KR" altLang="en-US" sz="1000" b="0" i="0" u="none" strike="noStrike" kern="1200" cap="none" normalizeH="0" baseline="0" dirty="0" smtClean="0">
                           <a:ln>
                             <a:noFill/>
                           </a:ln>
@@ -26695,7 +27729,7 @@
                         </a:rPr>
                         <a:t>최대 난방 및 좌우 편차 대응</a:t>
                       </a:r>
-                      <a:endParaRPr kumimoji="1" lang="en-US" altLang="ko-KR" sz="1000" b="0" i="0" u="none" strike="noStrike" kern="1200" cap="none" normalizeH="0" baseline="0" smtClean="0">
+                      <a:endParaRPr kumimoji="1" lang="en-US" altLang="ko-KR" sz="1000" b="0" i="0" u="none" strike="noStrike" kern="1200" cap="none" normalizeH="0" baseline="0" dirty="0" smtClean="0">
                         <a:ln>
                           <a:noFill/>
                         </a:ln>
@@ -26729,7 +27763,7 @@
                         <a:defRPr/>
                       </a:pPr>
                       <a:r>
-                        <a:rPr kumimoji="1" lang="en-US" altLang="ko-KR" sz="1000" b="0" i="0" u="none" strike="noStrike" kern="1200" cap="none" normalizeH="0" baseline="0" smtClean="0">
+                        <a:rPr kumimoji="1" lang="en-US" altLang="ko-KR" sz="1000" b="0" i="0" u="none" strike="noStrike" kern="1200" cap="none" normalizeH="0" baseline="0" dirty="0" smtClean="0">
                           <a:ln>
                             <a:noFill/>
                           </a:ln>
@@ -26744,7 +27778,7 @@
                         <a:t>   - BJ1 </a:t>
                       </a:r>
                       <a:r>
-                        <a:rPr kumimoji="1" lang="ko-KR" altLang="en-US" sz="1000" b="0" i="0" u="none" strike="noStrike" kern="1200" cap="none" normalizeH="0" baseline="0" smtClean="0">
+                        <a:rPr kumimoji="1" lang="ko-KR" altLang="en-US" sz="1000" b="0" i="0" u="none" strike="noStrike" kern="1200" cap="none" normalizeH="0" baseline="0" dirty="0" smtClean="0">
                           <a:ln>
                             <a:noFill/>
                           </a:ln>
@@ -26759,7 +27793,7 @@
                         <a:t>최대 난방 평가 진행 </a:t>
                       </a:r>
                       <a:r>
-                        <a:rPr kumimoji="1" lang="en-US" altLang="ko-KR" sz="1000" b="0" i="0" u="none" strike="noStrike" kern="1200" cap="none" normalizeH="0" baseline="0" smtClean="0">
+                        <a:rPr kumimoji="1" lang="en-US" altLang="ko-KR" sz="1000" b="0" i="0" u="none" strike="noStrike" kern="1200" cap="none" normalizeH="0" baseline="0" dirty="0" smtClean="0">
                           <a:ln>
                             <a:noFill/>
                           </a:ln>
@@ -26795,7 +27829,7 @@
                         <a:defRPr/>
                       </a:pPr>
                       <a:r>
-                        <a:rPr kumimoji="1" lang="en-US" altLang="ko-KR" sz="1000" b="0" i="0" u="none" strike="noStrike" kern="1200" cap="none" normalizeH="0" baseline="0" smtClean="0">
+                        <a:rPr kumimoji="1" lang="en-US" altLang="ko-KR" sz="1000" b="0" i="0" u="none" strike="noStrike" kern="1200" cap="none" normalizeH="0" baseline="0" dirty="0" smtClean="0">
                           <a:ln>
                             <a:noFill/>
                           </a:ln>
@@ -26810,7 +27844,7 @@
                         <a:t>     : </a:t>
                       </a:r>
                       <a:r>
-                        <a:rPr kumimoji="1" lang="ko-KR" altLang="en-US" sz="1000" b="0" i="0" u="none" strike="noStrike" kern="1200" cap="none" normalizeH="0" baseline="0" smtClean="0">
+                        <a:rPr kumimoji="1" lang="ko-KR" altLang="en-US" sz="1000" b="0" i="0" u="none" strike="noStrike" kern="1200" cap="none" normalizeH="0" baseline="0" dirty="0" smtClean="0">
                           <a:ln>
                             <a:noFill/>
                           </a:ln>
@@ -26825,7 +27859,7 @@
                         <a:t>최대 난방 평가 </a:t>
                       </a:r>
                       <a:r>
-                        <a:rPr kumimoji="1" lang="en-US" altLang="ko-KR" sz="1000" b="0" i="0" u="none" strike="noStrike" kern="1200" cap="none" normalizeH="0" baseline="0" smtClean="0">
+                        <a:rPr kumimoji="1" lang="en-US" altLang="ko-KR" sz="1000" b="0" i="0" u="none" strike="noStrike" kern="1200" cap="none" normalizeH="0" baseline="0" dirty="0" smtClean="0">
                           <a:ln>
                             <a:noFill/>
                           </a:ln>
@@ -26861,7 +27895,7 @@
                         <a:defRPr/>
                       </a:pPr>
                       <a:r>
-                        <a:rPr kumimoji="1" lang="en-US" altLang="ko-KR" sz="1000" b="0" i="0" u="none" strike="noStrike" kern="1200" cap="none" normalizeH="0" baseline="0" smtClean="0">
+                        <a:rPr kumimoji="1" lang="en-US" altLang="ko-KR" sz="1000" b="0" i="0" u="none" strike="noStrike" kern="1200" cap="none" normalizeH="0" baseline="0" dirty="0" smtClean="0">
                           <a:ln>
                             <a:noFill/>
                           </a:ln>
@@ -26876,7 +27910,7 @@
                         <a:t>     : </a:t>
                       </a:r>
                       <a:r>
-                        <a:rPr kumimoji="1" lang="ko-KR" altLang="en-US" sz="1000" b="0" i="0" u="none" strike="noStrike" kern="1200" cap="none" normalizeH="0" baseline="0" smtClean="0">
+                        <a:rPr kumimoji="1" lang="ko-KR" altLang="en-US" sz="1000" b="0" i="0" u="none" strike="noStrike" kern="1200" cap="none" normalizeH="0" baseline="0" dirty="0" smtClean="0">
                           <a:ln>
                             <a:noFill/>
                           </a:ln>
@@ -26891,7 +27925,7 @@
                         <a:t>좌우 온도 편차 </a:t>
                       </a:r>
                       <a:r>
-                        <a:rPr kumimoji="1" lang="en-US" altLang="ko-KR" sz="1000" b="0" i="0" u="none" strike="noStrike" kern="1200" cap="none" normalizeH="0" baseline="0" smtClean="0">
+                        <a:rPr kumimoji="1" lang="en-US" altLang="ko-KR" sz="1000" b="0" i="0" u="none" strike="noStrike" kern="1200" cap="none" normalizeH="0" baseline="0" dirty="0" smtClean="0">
                           <a:ln>
                             <a:noFill/>
                           </a:ln>
@@ -26927,7 +27961,7 @@
                         <a:defRPr/>
                       </a:pPr>
                       <a:r>
-                        <a:rPr kumimoji="1" lang="en-US" altLang="ko-KR" sz="1000" b="0" i="0" u="none" strike="noStrike" kern="1200" cap="none" normalizeH="0" baseline="0" smtClean="0">
+                        <a:rPr kumimoji="1" lang="en-US" altLang="ko-KR" sz="1000" b="0" i="0" u="none" strike="noStrike" kern="1200" cap="none" normalizeH="0" baseline="0" dirty="0" smtClean="0">
                           <a:ln>
                             <a:noFill/>
                           </a:ln>
@@ -26942,7 +27976,7 @@
                         <a:t>   - </a:t>
                       </a:r>
                       <a:r>
-                        <a:rPr kumimoji="1" lang="ko-KR" altLang="en-US" sz="1000" b="0" i="0" u="none" strike="noStrike" kern="1200" cap="none" normalizeH="0" baseline="0" smtClean="0">
+                        <a:rPr kumimoji="1" lang="ko-KR" altLang="en-US" sz="1000" b="0" i="0" u="none" strike="noStrike" kern="1200" cap="none" normalizeH="0" baseline="0" dirty="0" smtClean="0">
                           <a:ln>
                             <a:noFill/>
                           </a:ln>
@@ -26954,9 +27988,39 @@
                           <a:ea typeface="+mn-ea"/>
                           <a:cs typeface="+mn-cs"/>
                         </a:rPr>
-                        <a:t>좌우 온도 편차 원인 분석 위한 한온 벤치 평가 진행 </a:t>
-                      </a:r>
-                      <a:endParaRPr kumimoji="1" lang="en-US" altLang="ko-KR" sz="1000" b="0" i="0" u="none" strike="noStrike" kern="1200" cap="none" normalizeH="0" baseline="0" smtClean="0">
+                        <a:t>좌우 온도 편차 원인 분석 위한 </a:t>
+                      </a:r>
+                      <a:r>
+                        <a:rPr kumimoji="1" lang="ko-KR" altLang="en-US" sz="1000" b="0" i="0" u="none" strike="noStrike" kern="1200" cap="none" normalizeH="0" baseline="0" dirty="0" err="1" smtClean="0">
+                          <a:ln>
+                            <a:noFill/>
+                          </a:ln>
+                          <a:solidFill>
+                            <a:schemeClr val="tx1"/>
+                          </a:solidFill>
+                          <a:effectLst/>
+                          <a:latin typeface="+mn-lt"/>
+                          <a:ea typeface="+mn-ea"/>
+                          <a:cs typeface="+mn-cs"/>
+                        </a:rPr>
+                        <a:t>한온</a:t>
+                      </a:r>
+                      <a:r>
+                        <a:rPr kumimoji="1" lang="ko-KR" altLang="en-US" sz="1000" b="0" i="0" u="none" strike="noStrike" kern="1200" cap="none" normalizeH="0" baseline="0" dirty="0" smtClean="0">
+                          <a:ln>
+                            <a:noFill/>
+                          </a:ln>
+                          <a:solidFill>
+                            <a:schemeClr val="tx1"/>
+                          </a:solidFill>
+                          <a:effectLst/>
+                          <a:latin typeface="+mn-lt"/>
+                          <a:ea typeface="+mn-ea"/>
+                          <a:cs typeface="+mn-cs"/>
+                        </a:rPr>
+                        <a:t> 벤치 평가 진행 </a:t>
+                      </a:r>
+                      <a:endParaRPr kumimoji="1" lang="en-US" altLang="ko-KR" sz="1000" b="0" i="0" u="none" strike="noStrike" kern="1200" cap="none" normalizeH="0" baseline="0" dirty="0" smtClean="0">
                         <a:ln>
                           <a:noFill/>
                         </a:ln>
@@ -26990,7 +28054,7 @@
                         <a:defRPr/>
                       </a:pPr>
                       <a:r>
-                        <a:rPr kumimoji="1" lang="en-US" altLang="ko-KR" sz="1000" b="0" i="0" u="none" strike="noStrike" kern="1200" cap="none" normalizeH="0" baseline="0" smtClean="0">
+                        <a:rPr kumimoji="1" lang="en-US" altLang="ko-KR" sz="1000" b="0" i="0" u="none" strike="noStrike" kern="1200" cap="none" normalizeH="0" baseline="0" dirty="0" smtClean="0">
                           <a:ln>
                             <a:noFill/>
                           </a:ln>
@@ -27005,7 +28069,7 @@
                         <a:t>     : </a:t>
                       </a:r>
                       <a:r>
-                        <a:rPr kumimoji="1" lang="ko-KR" altLang="en-US" sz="1000" b="0" i="0" u="none" strike="noStrike" kern="1200" cap="none" normalizeH="0" baseline="0" smtClean="0">
+                        <a:rPr kumimoji="1" lang="ko-KR" altLang="en-US" sz="1000" b="0" i="0" u="none" strike="noStrike" kern="1200" cap="none" normalizeH="0" baseline="0" dirty="0" smtClean="0">
                           <a:ln>
                             <a:noFill/>
                           </a:ln>
@@ -27019,7 +28083,7 @@
                         </a:rPr>
                         <a:t>일정 협의 진행 중</a:t>
                       </a:r>
-                      <a:endParaRPr kumimoji="1" lang="en-US" altLang="ko-KR" sz="1000" b="0" i="0" u="none" strike="noStrike" kern="1200" cap="none" normalizeH="0" baseline="0" smtClean="0">
+                      <a:endParaRPr kumimoji="1" lang="en-US" altLang="ko-KR" sz="1000" b="0" i="0" u="none" strike="noStrike" kern="1200" cap="none" normalizeH="0" baseline="0" dirty="0" smtClean="0">
                         <a:ln>
                           <a:noFill/>
                         </a:ln>
@@ -27053,7 +28117,7 @@
                         <a:defRPr/>
                       </a:pPr>
                       <a:r>
-                        <a:rPr kumimoji="1" lang="en-US" altLang="ko-KR" sz="1000" b="0" i="0" u="none" strike="noStrike" kern="1200" cap="none" normalizeH="0" baseline="0" smtClean="0">
+                        <a:rPr kumimoji="1" lang="en-US" altLang="ko-KR" sz="1000" b="0" i="0" u="none" strike="noStrike" kern="1200" cap="none" normalizeH="0" baseline="0" dirty="0" smtClean="0">
                           <a:ln>
                             <a:noFill/>
                           </a:ln>
@@ -27068,7 +28132,7 @@
                         <a:t>   - </a:t>
                       </a:r>
                       <a:r>
-                        <a:rPr kumimoji="1" lang="ko-KR" altLang="en-US" sz="1000" b="0" i="0" u="none" strike="noStrike" kern="1200" cap="none" normalizeH="0" baseline="0" smtClean="0">
+                        <a:rPr kumimoji="1" lang="ko-KR" altLang="en-US" sz="1000" b="0" i="0" u="none" strike="noStrike" kern="1200" cap="none" normalizeH="0" baseline="0" dirty="0" smtClean="0">
                           <a:ln>
                             <a:noFill/>
                           </a:ln>
@@ -27083,7 +28147,7 @@
                         <a:t>좌우 온도 편차 원인 분석 완료 후 </a:t>
                       </a:r>
                       <a:r>
-                        <a:rPr kumimoji="1" lang="en-US" altLang="ko-KR" sz="1000" b="0" i="0" u="none" strike="noStrike" kern="1200" cap="none" normalizeH="0" baseline="0" smtClean="0">
+                        <a:rPr kumimoji="1" lang="en-US" altLang="ko-KR" sz="1000" b="0" i="0" u="none" strike="noStrike" kern="1200" cap="none" normalizeH="0" baseline="0" dirty="0" smtClean="0">
                           <a:ln>
                             <a:noFill/>
                           </a:ln>
@@ -27098,7 +28162,7 @@
                         <a:t>S/W </a:t>
                       </a:r>
                       <a:r>
-                        <a:rPr kumimoji="1" lang="ko-KR" altLang="en-US" sz="1000" b="0" i="0" u="none" strike="noStrike" kern="1200" cap="none" normalizeH="0" baseline="0" smtClean="0">
+                        <a:rPr kumimoji="1" lang="ko-KR" altLang="en-US" sz="1000" b="0" i="0" u="none" strike="noStrike" kern="1200" cap="none" normalizeH="0" baseline="0" dirty="0" smtClean="0">
                           <a:ln>
                             <a:noFill/>
                           </a:ln>
@@ -27112,7 +28176,7 @@
                         </a:rPr>
                         <a:t>튜닝 예정</a:t>
                       </a:r>
-                      <a:endParaRPr kumimoji="1" lang="en-US" altLang="ko-KR" sz="1000" b="0" i="0" u="none" strike="noStrike" kern="1200" cap="none" normalizeH="0" baseline="0" smtClean="0">
+                      <a:endParaRPr kumimoji="1" lang="en-US" altLang="ko-KR" sz="1000" b="0" i="0" u="none" strike="noStrike" kern="1200" cap="none" normalizeH="0" baseline="0" dirty="0" smtClean="0">
                         <a:ln>
                           <a:noFill/>
                         </a:ln>
@@ -27144,7 +28208,7 @@
                         <a:buNone/>
                         <a:tabLst/>
                       </a:pPr>
-                      <a:endParaRPr kumimoji="1" lang="en-US" altLang="ko-KR" sz="1000" b="1" i="0" u="none" strike="noStrike" kern="1200" cap="none" normalizeH="0" baseline="0" smtClean="0">
+                      <a:endParaRPr kumimoji="1" lang="en-US" altLang="ko-KR" sz="1000" b="1" i="0" u="none" strike="noStrike" kern="1200" cap="none" normalizeH="0" baseline="0" dirty="0" smtClean="0">
                         <a:ln>
                           <a:noFill/>
                         </a:ln>
@@ -27324,7 +28388,7 @@
                         <a:defRPr/>
                       </a:pPr>
                       <a:r>
-                        <a:rPr kumimoji="1" lang="en-US" altLang="ko-KR" sz="1000" b="0" i="0" u="none" strike="noStrike" kern="1200" cap="none" normalizeH="0" baseline="0" smtClean="0">
+                        <a:rPr kumimoji="1" lang="en-US" altLang="ko-KR" sz="1000" b="0" i="0" u="none" strike="noStrike" kern="1200" cap="none" normalizeH="0" baseline="0" dirty="0" smtClean="0">
                           <a:ln>
                             <a:noFill/>
                           </a:ln>
@@ -36771,7 +37835,7 @@
                         <a:defRPr/>
                       </a:pPr>
                       <a:r>
-                        <a:rPr kumimoji="1" lang="en-US" altLang="ko-KR" sz="1000" b="0" i="0" u="none" strike="noStrike" kern="1200" cap="none" normalizeH="0" baseline="0" smtClean="0">
+                        <a:rPr kumimoji="1" lang="en-US" altLang="ko-KR" sz="1000" b="0" i="0" u="none" strike="noStrike" kern="1200" cap="none" normalizeH="0" baseline="0" dirty="0" smtClean="0">
                           <a:ln>
                             <a:noFill/>
                           </a:ln>
@@ -36786,7 +37850,7 @@
                         <a:t>1. </a:t>
                       </a:r>
                       <a:r>
-                        <a:rPr kumimoji="1" lang="ko-KR" altLang="en-US" sz="1000" b="0" i="0" u="none" strike="noStrike" kern="1200" cap="none" normalizeH="0" baseline="0" smtClean="0">
+                        <a:rPr kumimoji="1" lang="ko-KR" altLang="en-US" sz="1000" b="0" i="0" u="none" strike="noStrike" kern="1200" cap="none" normalizeH="0" baseline="0" dirty="0" smtClean="0">
                           <a:ln>
                             <a:noFill/>
                           </a:ln>
@@ -36800,7 +37864,7 @@
                         </a:rPr>
                         <a:t>담당자 지정</a:t>
                       </a:r>
-                      <a:endParaRPr kumimoji="1" lang="en-US" altLang="ko-KR" sz="1000" b="0" i="0" u="none" strike="noStrike" kern="1200" cap="none" normalizeH="0" baseline="0" smtClean="0">
+                      <a:endParaRPr kumimoji="1" lang="en-US" altLang="ko-KR" sz="1000" b="0" i="0" u="none" strike="noStrike" kern="1200" cap="none" normalizeH="0" baseline="0" dirty="0" smtClean="0">
                         <a:ln>
                           <a:noFill/>
                         </a:ln>
@@ -36834,7 +37898,7 @@
                         <a:defRPr/>
                       </a:pPr>
                       <a:r>
-                        <a:rPr kumimoji="1" lang="en-US" altLang="ko-KR" sz="1000" b="0" i="0" u="none" strike="noStrike" kern="1200" cap="none" normalizeH="0" baseline="0" smtClean="0">
+                        <a:rPr kumimoji="1" lang="en-US" altLang="ko-KR" sz="1000" b="0" i="0" u="none" strike="noStrike" kern="1200" cap="none" normalizeH="0" baseline="0" dirty="0" smtClean="0">
                           <a:ln>
                             <a:noFill/>
                           </a:ln>
@@ -36849,7 +37913,7 @@
                         <a:t>    - </a:t>
                       </a:r>
                       <a:r>
-                        <a:rPr kumimoji="1" lang="ko-KR" altLang="en-US" sz="1000" b="0" i="0" u="none" strike="noStrike" kern="1200" cap="none" normalizeH="0" baseline="0" smtClean="0">
+                        <a:rPr kumimoji="1" lang="ko-KR" altLang="en-US" sz="1000" b="0" i="0" u="none" strike="noStrike" kern="1200" cap="none" normalizeH="0" baseline="0" dirty="0" err="1" smtClean="0">
                           <a:ln>
                             <a:noFill/>
                           </a:ln>
@@ -36861,9 +37925,24 @@
                           <a:ea typeface="+mn-ea"/>
                           <a:cs typeface="+mn-cs"/>
                         </a:rPr>
-                        <a:t>임제훈 사원</a:t>
-                      </a:r>
-                      <a:endParaRPr kumimoji="1" lang="en-US" altLang="ko-KR" sz="1000" b="0" i="0" u="none" strike="noStrike" kern="1200" cap="none" normalizeH="0" baseline="0" smtClean="0">
+                        <a:t>임제훈</a:t>
+                      </a:r>
+                      <a:r>
+                        <a:rPr kumimoji="1" lang="ko-KR" altLang="en-US" sz="1000" b="0" i="0" u="none" strike="noStrike" kern="1200" cap="none" normalizeH="0" baseline="0" dirty="0" smtClean="0">
+                          <a:ln>
+                            <a:noFill/>
+                          </a:ln>
+                          <a:solidFill>
+                            <a:schemeClr val="tx1"/>
+                          </a:solidFill>
+                          <a:effectLst/>
+                          <a:latin typeface="+mn-lt"/>
+                          <a:ea typeface="+mn-ea"/>
+                          <a:cs typeface="+mn-cs"/>
+                        </a:rPr>
+                        <a:t> 사원</a:t>
+                      </a:r>
+                      <a:endParaRPr kumimoji="1" lang="en-US" altLang="ko-KR" sz="1000" b="0" i="0" u="none" strike="noStrike" kern="1200" cap="none" normalizeH="0" baseline="0" dirty="0" smtClean="0">
                         <a:ln>
                           <a:noFill/>
                         </a:ln>
@@ -36896,7 +37975,7 @@
                         <a:tabLst/>
                         <a:defRPr/>
                       </a:pPr>
-                      <a:endParaRPr kumimoji="1" lang="en-US" altLang="ko-KR" sz="1000" b="0" i="0" u="none" strike="noStrike" kern="1200" cap="none" normalizeH="0" baseline="0" smtClean="0">
+                      <a:endParaRPr kumimoji="1" lang="en-US" altLang="ko-KR" sz="1000" b="0" i="0" u="none" strike="noStrike" kern="1200" cap="none" normalizeH="0" baseline="0" dirty="0" smtClean="0">
                         <a:ln>
                           <a:noFill/>
                         </a:ln>
@@ -36930,7 +38009,7 @@
                         <a:defRPr/>
                       </a:pPr>
                       <a:r>
-                        <a:rPr kumimoji="1" lang="en-US" altLang="ko-KR" sz="1000" b="0" i="0" u="none" strike="noStrike" kern="1200" cap="none" normalizeH="0" baseline="0" smtClean="0">
+                        <a:rPr kumimoji="1" lang="en-US" altLang="ko-KR" sz="1000" b="0" i="0" u="none" strike="noStrike" kern="1200" cap="none" normalizeH="0" baseline="0" dirty="0" smtClean="0">
                           <a:ln>
                             <a:noFill/>
                           </a:ln>
@@ -36945,7 +38024,7 @@
                         <a:t>2. </a:t>
                       </a:r>
                       <a:r>
-                        <a:rPr kumimoji="1" lang="ko-KR" altLang="en-US" sz="1000" b="0" i="0" u="none" strike="noStrike" kern="1200" cap="none" normalizeH="0" baseline="0" smtClean="0">
+                        <a:rPr kumimoji="1" lang="ko-KR" altLang="en-US" sz="1000" b="0" i="0" u="none" strike="noStrike" kern="1200" cap="none" normalizeH="0" baseline="0" dirty="0" smtClean="0">
                           <a:ln>
                             <a:noFill/>
                           </a:ln>
@@ -36960,7 +38039,7 @@
                         <a:t>사이버 보안 관련 문의 </a:t>
                       </a:r>
                       <a:r>
-                        <a:rPr kumimoji="1" lang="en-US" altLang="ko-KR" sz="1000" b="0" i="0" u="none" strike="noStrike" kern="1200" cap="none" normalizeH="0" baseline="0" smtClean="0">
+                        <a:rPr kumimoji="1" lang="en-US" altLang="ko-KR" sz="1000" b="0" i="0" u="none" strike="noStrike" kern="1200" cap="none" normalizeH="0" baseline="0" dirty="0" smtClean="0">
                           <a:ln>
                             <a:noFill/>
                           </a:ln>
@@ -36975,7 +38054,7 @@
                         <a:t>(To </a:t>
                       </a:r>
                       <a:r>
-                        <a:rPr kumimoji="1" lang="ko-KR" altLang="en-US" sz="1000" b="0" i="0" u="none" strike="noStrike" kern="1200" cap="none" normalizeH="0" baseline="0" smtClean="0">
+                        <a:rPr kumimoji="1" lang="ko-KR" altLang="en-US" sz="1000" b="0" i="0" u="none" strike="noStrike" kern="1200" cap="none" normalizeH="0" baseline="0" dirty="0" smtClean="0">
                           <a:ln>
                             <a:noFill/>
                           </a:ln>
@@ -36987,10 +38066,25 @@
                           <a:ea typeface="+mn-ea"/>
                           <a:cs typeface="+mn-cs"/>
                         </a:rPr>
-                        <a:t>공조 설계팀</a:t>
-                      </a:r>
-                      <a:r>
-                        <a:rPr kumimoji="1" lang="en-US" altLang="ko-KR" sz="1000" b="0" i="0" u="none" strike="noStrike" kern="1200" cap="none" normalizeH="0" baseline="0" smtClean="0">
+                        <a:t>공조 </a:t>
+                      </a:r>
+                      <a:r>
+                        <a:rPr kumimoji="1" lang="ko-KR" altLang="en-US" sz="1000" b="0" i="0" u="none" strike="noStrike" kern="1200" cap="none" normalizeH="0" baseline="0" dirty="0" err="1" smtClean="0">
+                          <a:ln>
+                            <a:noFill/>
+                          </a:ln>
+                          <a:solidFill>
+                            <a:schemeClr val="tx1"/>
+                          </a:solidFill>
+                          <a:effectLst/>
+                          <a:latin typeface="+mn-lt"/>
+                          <a:ea typeface="+mn-ea"/>
+                          <a:cs typeface="+mn-cs"/>
+                        </a:rPr>
+                        <a:t>설계팀</a:t>
+                      </a:r>
+                      <a:r>
+                        <a:rPr kumimoji="1" lang="en-US" altLang="ko-KR" sz="1000" b="0" i="0" u="none" strike="noStrike" kern="1200" cap="none" normalizeH="0" baseline="0" dirty="0" smtClean="0">
                           <a:ln>
                             <a:noFill/>
                           </a:ln>
@@ -37026,7 +38120,7 @@
                         <a:defRPr/>
                       </a:pPr>
                       <a:r>
-                        <a:rPr kumimoji="1" lang="en-US" altLang="ko-KR" sz="1000" b="0" i="0" u="none" strike="noStrike" kern="1200" cap="none" normalizeH="0" baseline="0" smtClean="0">
+                        <a:rPr kumimoji="1" lang="en-US" altLang="ko-KR" sz="1000" b="0" i="0" u="none" strike="noStrike" kern="1200" cap="none" normalizeH="0" baseline="0" dirty="0" smtClean="0">
                           <a:ln>
                             <a:noFill/>
                           </a:ln>
@@ -37041,7 +38135,7 @@
                         <a:t>    - QV </a:t>
                       </a:r>
                       <a:r>
-                        <a:rPr kumimoji="1" lang="ko-KR" altLang="en-US" sz="1000" b="0" i="0" u="none" strike="noStrike" kern="1200" cap="none" normalizeH="0" baseline="0" smtClean="0">
+                        <a:rPr kumimoji="1" lang="ko-KR" altLang="en-US" sz="1000" b="0" i="0" u="none" strike="noStrike" kern="1200" cap="none" normalizeH="0" baseline="0" dirty="0" smtClean="0">
                           <a:ln>
                             <a:noFill/>
                           </a:ln>
@@ -37056,7 +38150,7 @@
                         <a:t>와 동일하게 진행 하면 되는지</a:t>
                       </a:r>
                       <a:r>
-                        <a:rPr kumimoji="1" lang="en-US" altLang="ko-KR" sz="1000" b="0" i="0" u="none" strike="noStrike" kern="1200" cap="none" normalizeH="0" baseline="0" smtClean="0">
+                        <a:rPr kumimoji="1" lang="en-US" altLang="ko-KR" sz="1000" b="0" i="0" u="none" strike="noStrike" kern="1200" cap="none" normalizeH="0" baseline="0" dirty="0" smtClean="0">
                           <a:ln>
                             <a:noFill/>
                           </a:ln>
@@ -37092,7 +38186,7 @@
                         <a:defRPr/>
                       </a:pPr>
                       <a:r>
-                        <a:rPr kumimoji="1" lang="en-US" altLang="ko-KR" sz="1000" b="0" i="0" u="none" strike="noStrike" kern="1200" cap="none" normalizeH="0" baseline="0" smtClean="0">
+                        <a:rPr kumimoji="1" lang="en-US" altLang="ko-KR" sz="1000" b="0" i="0" u="none" strike="noStrike" kern="1200" cap="none" normalizeH="0" baseline="0" dirty="0" smtClean="0">
                           <a:ln>
                             <a:noFill/>
                           </a:ln>
@@ -37107,7 +38201,7 @@
                         <a:t>      (8/20</a:t>
                       </a:r>
                       <a:r>
-                        <a:rPr kumimoji="1" lang="ko-KR" altLang="en-US" sz="1000" b="0" i="0" u="none" strike="noStrike" kern="1200" cap="none" normalizeH="0" baseline="0" smtClean="0">
+                        <a:rPr kumimoji="1" lang="ko-KR" altLang="en-US" sz="1000" b="0" i="0" u="none" strike="noStrike" kern="1200" cap="none" normalizeH="0" baseline="0" dirty="0" smtClean="0">
                           <a:ln>
                             <a:noFill/>
                           </a:ln>
@@ -37122,7 +38216,7 @@
                         <a:t>일 요청하였으나 답변 지연</a:t>
                       </a:r>
                       <a:r>
-                        <a:rPr kumimoji="1" lang="en-US" altLang="ko-KR" sz="1000" b="0" i="0" u="none" strike="noStrike" kern="1200" cap="none" normalizeH="0" baseline="0" smtClean="0">
+                        <a:rPr kumimoji="1" lang="en-US" altLang="ko-KR" sz="1000" b="0" i="0" u="none" strike="noStrike" kern="1200" cap="none" normalizeH="0" baseline="0" dirty="0" smtClean="0">
                           <a:ln>
                             <a:noFill/>
                           </a:ln>
@@ -37158,7 +38252,7 @@
                         <a:defRPr/>
                       </a:pPr>
                       <a:r>
-                        <a:rPr kumimoji="1" lang="en-US" altLang="ko-KR" sz="1000" b="0" i="0" u="none" strike="noStrike" kern="1200" cap="none" normalizeH="0" baseline="0" smtClean="0">
+                        <a:rPr kumimoji="1" lang="en-US" altLang="ko-KR" sz="1000" b="0" i="0" u="none" strike="noStrike" kern="1200" cap="none" normalizeH="0" baseline="0" dirty="0" smtClean="0">
                           <a:ln>
                             <a:noFill/>
                           </a:ln>
@@ -37173,7 +38267,7 @@
                         <a:t>    - </a:t>
                       </a:r>
                       <a:r>
-                        <a:rPr kumimoji="1" lang="ko-KR" altLang="en-US" sz="1000" b="0" i="0" u="none" strike="noStrike" kern="1200" cap="none" normalizeH="0" baseline="0" smtClean="0">
+                        <a:rPr kumimoji="1" lang="ko-KR" altLang="en-US" sz="1000" b="0" i="0" u="none" strike="noStrike" kern="1200" cap="none" normalizeH="0" baseline="0" dirty="0" smtClean="0">
                           <a:ln>
                             <a:noFill/>
                           </a:ln>
@@ -37185,9 +38279,39 @@
                           <a:ea typeface="+mn-ea"/>
                           <a:cs typeface="+mn-cs"/>
                         </a:rPr>
-                        <a:t>공조 설계팀 내부 사이버 보안 규격 재 정립 진행 중</a:t>
-                      </a:r>
-                      <a:endParaRPr kumimoji="1" lang="en-US" altLang="ko-KR" sz="1000" b="0" i="0" u="none" strike="noStrike" kern="1200" cap="none" normalizeH="0" baseline="0" smtClean="0">
+                        <a:t>공조 </a:t>
+                      </a:r>
+                      <a:r>
+                        <a:rPr kumimoji="1" lang="ko-KR" altLang="en-US" sz="1000" b="0" i="0" u="none" strike="noStrike" kern="1200" cap="none" normalizeH="0" baseline="0" dirty="0" err="1" smtClean="0">
+                          <a:ln>
+                            <a:noFill/>
+                          </a:ln>
+                          <a:solidFill>
+                            <a:schemeClr val="tx1"/>
+                          </a:solidFill>
+                          <a:effectLst/>
+                          <a:latin typeface="+mn-lt"/>
+                          <a:ea typeface="+mn-ea"/>
+                          <a:cs typeface="+mn-cs"/>
+                        </a:rPr>
+                        <a:t>설계팀</a:t>
+                      </a:r>
+                      <a:r>
+                        <a:rPr kumimoji="1" lang="ko-KR" altLang="en-US" sz="1000" b="0" i="0" u="none" strike="noStrike" kern="1200" cap="none" normalizeH="0" baseline="0" dirty="0" smtClean="0">
+                          <a:ln>
+                            <a:noFill/>
+                          </a:ln>
+                          <a:solidFill>
+                            <a:schemeClr val="tx1"/>
+                          </a:solidFill>
+                          <a:effectLst/>
+                          <a:latin typeface="+mn-lt"/>
+                          <a:ea typeface="+mn-ea"/>
+                          <a:cs typeface="+mn-cs"/>
+                        </a:rPr>
+                        <a:t> 내부 사이버 보안 규격 재 정립 진행 중</a:t>
+                      </a:r>
+                      <a:endParaRPr kumimoji="1" lang="en-US" altLang="ko-KR" sz="1000" b="0" i="0" u="none" strike="noStrike" kern="1200" cap="none" normalizeH="0" baseline="0" dirty="0" smtClean="0">
                         <a:ln>
                           <a:noFill/>
                         </a:ln>
@@ -37202,7 +38326,7 @@
                     </a:p>
                     <a:p>
                       <a:pPr fontAlgn="t" latinLnBrk="0"/>
-                      <a:endParaRPr lang="en-US" altLang="ko-KR" sz="800" b="0" i="0" kern="1200" smtClean="0">
+                      <a:endParaRPr lang="en-US" altLang="ko-KR" sz="800" b="0" i="0" kern="1200" dirty="0" smtClean="0">
                         <a:solidFill>
                           <a:schemeClr val="tx1"/>
                         </a:solidFill>
@@ -37215,7 +38339,7 @@
                     <a:p>
                       <a:pPr fontAlgn="t" latinLnBrk="0"/>
                       <a:r>
-                        <a:rPr lang="en-US" altLang="ko-KR" sz="800" b="0" i="0" kern="1200" smtClean="0">
+                        <a:rPr lang="en-US" altLang="ko-KR" sz="800" b="0" i="0" kern="1200" dirty="0" smtClean="0">
                           <a:solidFill>
                             <a:schemeClr val="tx1"/>
                           </a:solidFill>
@@ -37227,7 +38351,7 @@
                         <a:t>[QV </a:t>
                       </a:r>
                       <a:r>
-                        <a:rPr lang="ko-KR" altLang="en-US" sz="800" b="0" i="0" kern="1200" smtClean="0">
+                        <a:rPr lang="ko-KR" altLang="en-US" sz="800" b="0" i="0" kern="1200" dirty="0" err="1" smtClean="0">
                           <a:solidFill>
                             <a:schemeClr val="tx1"/>
                           </a:solidFill>
@@ -37239,7 +38363,7 @@
                         <a:t>적용사항</a:t>
                       </a:r>
                       <a:r>
-                        <a:rPr lang="en-US" altLang="ko-KR" sz="800" b="0" i="0" kern="1200" smtClean="0">
+                        <a:rPr lang="en-US" altLang="ko-KR" sz="800" b="0" i="0" kern="1200" dirty="0" smtClean="0">
                           <a:solidFill>
                             <a:schemeClr val="tx1"/>
                           </a:solidFill>
@@ -37254,7 +38378,7 @@
                     <a:p>
                       <a:pPr fontAlgn="t" latinLnBrk="0"/>
                       <a:r>
-                        <a:rPr lang="en-US" altLang="ko-KR" sz="800" b="0" i="0" kern="1200" smtClean="0">
+                        <a:rPr lang="en-US" altLang="ko-KR" sz="800" b="0" i="0" kern="1200" dirty="0" smtClean="0">
                           <a:solidFill>
                             <a:schemeClr val="tx1"/>
                           </a:solidFill>
@@ -37266,7 +38390,7 @@
                         <a:t>   1. Debug Port</a:t>
                       </a:r>
                       <a:r>
-                        <a:rPr lang="ko-KR" altLang="en-US" sz="800" b="0" i="0" kern="1200" smtClean="0">
+                        <a:rPr lang="ko-KR" altLang="en-US" sz="800" b="0" i="0" kern="1200" dirty="0" smtClean="0">
                           <a:solidFill>
                             <a:schemeClr val="tx1"/>
                           </a:solidFill>
@@ -37278,7 +38402,7 @@
                         <a:t>에 대하여</a:t>
                       </a:r>
                       <a:r>
-                        <a:rPr lang="en-US" altLang="ko-KR" sz="800" b="0" i="0" kern="1200" smtClean="0">
+                        <a:rPr lang="en-US" altLang="ko-KR" sz="800" b="0" i="0" kern="1200" dirty="0" smtClean="0">
                           <a:solidFill>
                             <a:schemeClr val="tx1"/>
                           </a:solidFill>
@@ -37290,7 +38414,7 @@
                         <a:t>, </a:t>
                       </a:r>
                       <a:r>
-                        <a:rPr lang="ko-KR" altLang="en-US" sz="800" b="0" i="0" kern="1200" smtClean="0">
+                        <a:rPr lang="ko-KR" altLang="en-US" sz="800" b="0" i="0" kern="1200" dirty="0" smtClean="0">
                           <a:solidFill>
                             <a:schemeClr val="tx1"/>
                           </a:solidFill>
@@ -37299,10 +38423,10 @@
                           <a:ea typeface="+mn-ea"/>
                           <a:cs typeface="+mn-cs"/>
                         </a:rPr>
-                        <a:t>비전으로 납땜이 되지 않은것을 검출 하며</a:t>
-                      </a:r>
-                      <a:r>
-                        <a:rPr lang="en-US" altLang="ko-KR" sz="800" b="0" i="0" kern="1200" smtClean="0">
+                        <a:t>비전으로 납땜이 되지 </a:t>
+                      </a:r>
+                      <a:r>
+                        <a:rPr lang="ko-KR" altLang="en-US" sz="800" b="0" i="0" kern="1200" dirty="0" err="1" smtClean="0">
                           <a:solidFill>
                             <a:schemeClr val="tx1"/>
                           </a:solidFill>
@@ -37311,10 +38435,10 @@
                           <a:ea typeface="+mn-ea"/>
                           <a:cs typeface="+mn-cs"/>
                         </a:rPr>
-                        <a:t>, </a:t>
-                      </a:r>
-                      <a:r>
-                        <a:rPr lang="ko-KR" altLang="en-US" sz="800" b="0" i="0" kern="1200" smtClean="0">
+                        <a:t>않은것을</a:t>
+                      </a:r>
+                      <a:r>
+                        <a:rPr lang="ko-KR" altLang="en-US" sz="800" b="0" i="0" kern="1200" dirty="0" smtClean="0">
                           <a:solidFill>
                             <a:schemeClr val="tx1"/>
                           </a:solidFill>
@@ -37323,9 +38447,33 @@
                           <a:ea typeface="+mn-ea"/>
                           <a:cs typeface="+mn-cs"/>
                         </a:rPr>
+                        <a:t> 검출 하며</a:t>
+                      </a:r>
+                      <a:r>
+                        <a:rPr lang="en-US" altLang="ko-KR" sz="800" b="0" i="0" kern="1200" dirty="0" smtClean="0">
+                          <a:solidFill>
+                            <a:schemeClr val="tx1"/>
+                          </a:solidFill>
+                          <a:effectLst/>
+                          <a:latin typeface="+mn-lt"/>
+                          <a:ea typeface="+mn-ea"/>
+                          <a:cs typeface="+mn-cs"/>
+                        </a:rPr>
+                        <a:t>, </a:t>
+                      </a:r>
+                      <a:r>
+                        <a:rPr lang="ko-KR" altLang="en-US" sz="800" b="0" i="0" kern="1200" dirty="0" smtClean="0">
+                          <a:solidFill>
+                            <a:schemeClr val="tx1"/>
+                          </a:solidFill>
+                          <a:effectLst/>
+                          <a:latin typeface="+mn-lt"/>
+                          <a:ea typeface="+mn-ea"/>
+                          <a:cs typeface="+mn-cs"/>
+                        </a:rPr>
                         <a:t>공정 상    </a:t>
                       </a:r>
-                      <a:endParaRPr lang="en-US" altLang="ko-KR" sz="800" b="0" i="0" kern="1200" smtClean="0">
+                      <a:endParaRPr lang="en-US" altLang="ko-KR" sz="800" b="0" i="0" kern="1200" dirty="0" smtClean="0">
                         <a:solidFill>
                           <a:schemeClr val="tx1"/>
                         </a:solidFill>
@@ -37338,7 +38486,7 @@
                     <a:p>
                       <a:pPr fontAlgn="t" latinLnBrk="0"/>
                       <a:r>
-                        <a:rPr lang="en-US" altLang="ko-KR" sz="800" b="0" i="0" kern="1200" smtClean="0">
+                        <a:rPr lang="en-US" altLang="ko-KR" sz="800" b="0" i="0" kern="1200" dirty="0" smtClean="0">
                           <a:solidFill>
                             <a:schemeClr val="tx1"/>
                           </a:solidFill>
@@ -37350,7 +38498,7 @@
                         <a:t>      </a:t>
                       </a:r>
                       <a:r>
-                        <a:rPr lang="ko-KR" altLang="en-US" sz="800" b="0" i="0" kern="1200" smtClean="0">
+                        <a:rPr lang="ko-KR" altLang="en-US" sz="800" b="0" i="0" kern="1200" dirty="0" smtClean="0">
                           <a:solidFill>
                             <a:schemeClr val="tx1"/>
                           </a:solidFill>
@@ -37362,7 +38510,7 @@
                         <a:t>추가하여 추적 관리 할 수 있어야 한다</a:t>
                       </a:r>
                       <a:r>
-                        <a:rPr lang="en-US" altLang="ko-KR" sz="800" b="0" i="0" kern="1200" smtClean="0">
+                        <a:rPr lang="en-US" altLang="ko-KR" sz="800" b="0" i="0" kern="1200" dirty="0" smtClean="0">
                           <a:solidFill>
                             <a:schemeClr val="tx1"/>
                           </a:solidFill>
@@ -37373,7 +38521,7 @@
                         </a:rPr>
                         <a:t>.</a:t>
                       </a:r>
-                      <a:endParaRPr lang="ko-KR" altLang="en-US" sz="800" b="0" i="0" kern="1200" smtClean="0">
+                      <a:endParaRPr lang="ko-KR" altLang="en-US" sz="800" b="0" i="0" kern="1200" dirty="0" smtClean="0">
                         <a:solidFill>
                           <a:schemeClr val="tx1"/>
                         </a:solidFill>
@@ -37386,7 +38534,7 @@
                     <a:p>
                       <a:pPr fontAlgn="t" latinLnBrk="0"/>
                       <a:r>
-                        <a:rPr lang="ko-KR" altLang="en-US" sz="800" b="0" i="0" kern="1200" smtClean="0">
+                        <a:rPr lang="ko-KR" altLang="en-US" sz="800" b="0" i="0" kern="1200" dirty="0" smtClean="0">
                           <a:solidFill>
                             <a:schemeClr val="tx1"/>
                           </a:solidFill>
@@ -37401,7 +38549,7 @@
                     <a:p>
                       <a:pPr fontAlgn="t" latinLnBrk="0"/>
                       <a:r>
-                        <a:rPr lang="en-US" altLang="ko-KR" sz="800" b="0" i="0" kern="1200" smtClean="0">
+                        <a:rPr lang="en-US" altLang="ko-KR" sz="800" b="0" i="0" kern="1200" dirty="0" smtClean="0">
                           <a:solidFill>
                             <a:schemeClr val="tx1"/>
                           </a:solidFill>
@@ -37413,7 +38561,7 @@
                         <a:t>   2. EOL </a:t>
                       </a:r>
                       <a:r>
-                        <a:rPr lang="ko-KR" altLang="en-US" sz="800" b="0" i="0" kern="1200" smtClean="0">
+                        <a:rPr lang="ko-KR" altLang="en-US" sz="800" b="0" i="0" kern="1200" dirty="0" smtClean="0">
                           <a:solidFill>
                             <a:schemeClr val="tx1"/>
                           </a:solidFill>
@@ -37425,7 +38573,7 @@
                         <a:t>상에서 </a:t>
                       </a:r>
                       <a:r>
-                        <a:rPr lang="en-US" altLang="ko-KR" sz="800" b="0" i="0" kern="1200" smtClean="0">
+                        <a:rPr lang="en-US" altLang="ko-KR" sz="800" b="0" i="0" kern="1200" dirty="0" smtClean="0">
                           <a:solidFill>
                             <a:schemeClr val="tx1"/>
                           </a:solidFill>
@@ -37437,7 +38585,7 @@
                         <a:t>MCU</a:t>
                       </a:r>
                       <a:r>
-                        <a:rPr lang="ko-KR" altLang="en-US" sz="800" b="0" i="0" kern="1200" smtClean="0">
+                        <a:rPr lang="ko-KR" altLang="en-US" sz="800" b="0" i="0" kern="1200" dirty="0" smtClean="0">
                           <a:solidFill>
                             <a:schemeClr val="tx1"/>
                           </a:solidFill>
@@ -37449,7 +38597,7 @@
                         <a:t>의 </a:t>
                       </a:r>
                       <a:r>
-                        <a:rPr lang="en-US" altLang="ko-KR" sz="800" b="0" i="0" kern="1200" smtClean="0">
+                        <a:rPr lang="en-US" altLang="ko-KR" sz="800" b="0" i="0" kern="1200" dirty="0" smtClean="0">
                           <a:solidFill>
                             <a:schemeClr val="tx1"/>
                           </a:solidFill>
@@ -37461,7 +38609,7 @@
                         <a:t>Secure Debug </a:t>
                       </a:r>
                       <a:r>
-                        <a:rPr lang="ko-KR" altLang="en-US" sz="800" b="0" i="0" kern="1200" smtClean="0">
+                        <a:rPr lang="ko-KR" altLang="en-US" sz="800" b="0" i="0" kern="1200" dirty="0" smtClean="0">
                           <a:solidFill>
                             <a:schemeClr val="tx1"/>
                           </a:solidFill>
@@ -37473,7 +38621,7 @@
                         <a:t>가 적용 되었는지 표시 해야만 한다</a:t>
                       </a:r>
                       <a:r>
-                        <a:rPr lang="en-US" altLang="ko-KR" sz="800" b="0" i="0" kern="1200" smtClean="0">
+                        <a:rPr lang="en-US" altLang="ko-KR" sz="800" b="0" i="0" kern="1200" dirty="0" smtClean="0">
                           <a:solidFill>
                             <a:schemeClr val="tx1"/>
                           </a:solidFill>
@@ -37484,7 +38632,7 @@
                         </a:rPr>
                         <a:t>. </a:t>
                       </a:r>
-                      <a:endParaRPr lang="ko-KR" altLang="en-US" sz="800" b="0" i="0" kern="1200" smtClean="0">
+                      <a:endParaRPr lang="ko-KR" altLang="en-US" sz="800" b="0" i="0" kern="1200" dirty="0" smtClean="0">
                         <a:solidFill>
                           <a:schemeClr val="tx1"/>
                         </a:solidFill>
@@ -37497,7 +38645,7 @@
                     <a:p>
                       <a:pPr fontAlgn="t" latinLnBrk="0"/>
                       <a:r>
-                        <a:rPr lang="ko-KR" altLang="en-US" sz="800" b="0" i="0" kern="1200" smtClean="0">
+                        <a:rPr lang="ko-KR" altLang="en-US" sz="800" b="0" i="0" kern="1200" dirty="0" smtClean="0">
                           <a:solidFill>
                             <a:schemeClr val="tx1"/>
                           </a:solidFill>
@@ -37512,7 +38660,7 @@
                     <a:p>
                       <a:pPr fontAlgn="t" latinLnBrk="0"/>
                       <a:r>
-                        <a:rPr lang="en-US" altLang="ko-KR" sz="800" b="0" i="0" kern="1200" smtClean="0">
+                        <a:rPr lang="en-US" altLang="ko-KR" sz="800" b="0" i="0" kern="1200" dirty="0" smtClean="0">
                           <a:solidFill>
                             <a:schemeClr val="tx1"/>
                           </a:solidFill>
@@ -37524,7 +38672,7 @@
                         <a:t>   3. </a:t>
                       </a:r>
                       <a:r>
-                        <a:rPr lang="ko-KR" altLang="en-US" sz="800" b="0" i="0" kern="1200" smtClean="0">
+                        <a:rPr lang="ko-KR" altLang="en-US" sz="800" b="0" i="0" kern="1200" dirty="0" err="1" smtClean="0">
                           <a:solidFill>
                             <a:schemeClr val="tx1"/>
                           </a:solidFill>
@@ -37533,10 +38681,10 @@
                           <a:ea typeface="+mn-ea"/>
                           <a:cs typeface="+mn-cs"/>
                         </a:rPr>
-                        <a:t>양산이후 </a:t>
-                      </a:r>
-                      <a:r>
-                        <a:rPr lang="en-US" altLang="ko-KR" sz="800" b="0" i="0" kern="1200" smtClean="0">
+                        <a:t>양산이후</a:t>
+                      </a:r>
+                      <a:r>
+                        <a:rPr lang="ko-KR" altLang="en-US" sz="800" b="0" i="0" kern="1200" dirty="0" smtClean="0">
                           <a:solidFill>
                             <a:schemeClr val="tx1"/>
                           </a:solidFill>
@@ -37545,10 +38693,10 @@
                           <a:ea typeface="+mn-ea"/>
                           <a:cs typeface="+mn-cs"/>
                         </a:rPr>
-                        <a:t>ReWriting </a:t>
-                      </a:r>
-                      <a:r>
-                        <a:rPr lang="ko-KR" altLang="en-US" sz="800" b="0" i="0" kern="1200" smtClean="0">
+                        <a:t> </a:t>
+                      </a:r>
+                      <a:r>
+                        <a:rPr lang="en-US" altLang="ko-KR" sz="800" b="0" i="0" kern="1200" dirty="0" err="1" smtClean="0">
                           <a:solidFill>
                             <a:schemeClr val="tx1"/>
                           </a:solidFill>
@@ -37557,10 +38705,10 @@
                           <a:ea typeface="+mn-ea"/>
                           <a:cs typeface="+mn-cs"/>
                         </a:rPr>
-                        <a:t>할 수 없도록 </a:t>
-                      </a:r>
-                      <a:r>
-                        <a:rPr lang="en-US" altLang="ko-KR" sz="800" b="0" i="0" kern="1200" smtClean="0">
+                        <a:t>ReWriting</a:t>
+                      </a:r>
+                      <a:r>
+                        <a:rPr lang="en-US" altLang="ko-KR" sz="800" b="0" i="0" kern="1200" dirty="0" smtClean="0">
                           <a:solidFill>
                             <a:schemeClr val="tx1"/>
                           </a:solidFill>
@@ -37569,10 +38717,10 @@
                           <a:ea typeface="+mn-ea"/>
                           <a:cs typeface="+mn-cs"/>
                         </a:rPr>
-                        <a:t>Bootloader </a:t>
-                      </a:r>
-                      <a:r>
-                        <a:rPr lang="ko-KR" altLang="en-US" sz="800" b="0" i="0" kern="1200" smtClean="0">
+                        <a:t> </a:t>
+                      </a:r>
+                      <a:r>
+                        <a:rPr lang="ko-KR" altLang="en-US" sz="800" b="0" i="0" kern="1200" dirty="0" smtClean="0">
                           <a:solidFill>
                             <a:schemeClr val="tx1"/>
                           </a:solidFill>
@@ -37581,10 +38729,10 @@
                           <a:ea typeface="+mn-ea"/>
                           <a:cs typeface="+mn-cs"/>
                         </a:rPr>
-                        <a:t>를 제거해야한다</a:t>
-                      </a:r>
-                      <a:r>
-                        <a:rPr lang="en-US" altLang="ko-KR" sz="800" b="0" i="0" kern="1200" smtClean="0">
+                        <a:t>할 수 없도록 </a:t>
+                      </a:r>
+                      <a:r>
+                        <a:rPr lang="en-US" altLang="ko-KR" sz="800" b="0" i="0" kern="1200" dirty="0" smtClean="0">
                           <a:solidFill>
                             <a:schemeClr val="tx1"/>
                           </a:solidFill>
@@ -37593,9 +38741,33 @@
                           <a:ea typeface="+mn-ea"/>
                           <a:cs typeface="+mn-cs"/>
                         </a:rPr>
+                        <a:t>Bootloader </a:t>
+                      </a:r>
+                      <a:r>
+                        <a:rPr lang="ko-KR" altLang="en-US" sz="800" b="0" i="0" kern="1200" dirty="0" smtClean="0">
+                          <a:solidFill>
+                            <a:schemeClr val="tx1"/>
+                          </a:solidFill>
+                          <a:effectLst/>
+                          <a:latin typeface="+mn-lt"/>
+                          <a:ea typeface="+mn-ea"/>
+                          <a:cs typeface="+mn-cs"/>
+                        </a:rPr>
+                        <a:t>를 제거해야한다</a:t>
+                      </a:r>
+                      <a:r>
+                        <a:rPr lang="en-US" altLang="ko-KR" sz="800" b="0" i="0" kern="1200" dirty="0" smtClean="0">
+                          <a:solidFill>
+                            <a:schemeClr val="tx1"/>
+                          </a:solidFill>
+                          <a:effectLst/>
+                          <a:latin typeface="+mn-lt"/>
+                          <a:ea typeface="+mn-ea"/>
+                          <a:cs typeface="+mn-cs"/>
+                        </a:rPr>
                         <a:t>. </a:t>
                       </a:r>
-                      <a:endParaRPr lang="ko-KR" altLang="en-US" sz="800" b="0" i="0" kern="1200" smtClean="0">
+                      <a:endParaRPr lang="ko-KR" altLang="en-US" sz="800" b="0" i="0" kern="1200" dirty="0" smtClean="0">
                         <a:solidFill>
                           <a:schemeClr val="tx1"/>
                         </a:solidFill>
@@ -37608,7 +38780,7 @@
                     <a:p>
                       <a:pPr fontAlgn="t" latinLnBrk="0"/>
                       <a:r>
-                        <a:rPr lang="ko-KR" altLang="en-US" sz="800" b="0" i="0" kern="1200" smtClean="0">
+                        <a:rPr lang="ko-KR" altLang="en-US" sz="800" b="0" i="0" kern="1200" dirty="0" smtClean="0">
                           <a:solidFill>
                             <a:schemeClr val="tx1"/>
                           </a:solidFill>
@@ -37623,7 +38795,7 @@
                     <a:p>
                       <a:pPr fontAlgn="t" latinLnBrk="0"/>
                       <a:r>
-                        <a:rPr lang="en-US" altLang="ko-KR" sz="800" b="0" i="0" kern="1200" smtClean="0">
+                        <a:rPr lang="en-US" altLang="ko-KR" sz="800" b="0" i="0" kern="1200" dirty="0" smtClean="0">
                           <a:solidFill>
                             <a:schemeClr val="tx1"/>
                           </a:solidFill>
@@ -37635,7 +38807,7 @@
                         <a:t>   4. LP2 </a:t>
                       </a:r>
                       <a:r>
-                        <a:rPr lang="ko-KR" altLang="en-US" sz="800" b="0" i="0" kern="1200" smtClean="0">
+                        <a:rPr lang="ko-KR" altLang="en-US" sz="800" b="0" i="0" kern="1200" dirty="0" smtClean="0">
                           <a:solidFill>
                             <a:schemeClr val="tx1"/>
                           </a:solidFill>
@@ -37647,7 +38819,7 @@
                         <a:t>납품 시 </a:t>
                       </a:r>
                       <a:r>
-                        <a:rPr lang="en-US" altLang="ko-KR" sz="800" b="0" i="0" kern="1200" smtClean="0">
+                        <a:rPr lang="en-US" altLang="ko-KR" sz="800" b="0" i="0" kern="1200" dirty="0" smtClean="0">
                           <a:solidFill>
                             <a:schemeClr val="tx1"/>
                           </a:solidFill>
@@ -37659,7 +38831,7 @@
                         <a:t>5EA</a:t>
                       </a:r>
                       <a:r>
-                        <a:rPr lang="ko-KR" altLang="en-US" sz="800" b="0" i="0" kern="1200" smtClean="0">
+                        <a:rPr lang="ko-KR" altLang="en-US" sz="800" b="0" i="0" kern="1200" dirty="0" smtClean="0">
                           <a:solidFill>
                             <a:schemeClr val="tx1"/>
                           </a:solidFill>
@@ -37671,7 +38843,7 @@
                         <a:t>에 한하여 사이버 보안 적용 품 납품</a:t>
                       </a:r>
                       <a:r>
-                        <a:rPr lang="en-US" altLang="ko-KR" sz="800" b="0" i="0" kern="1200" smtClean="0">
+                        <a:rPr lang="en-US" altLang="ko-KR" sz="800" b="0" i="0" kern="1200" dirty="0" smtClean="0">
                           <a:solidFill>
                             <a:schemeClr val="tx1"/>
                           </a:solidFill>
@@ -37682,7 +38854,7 @@
                         </a:rPr>
                         <a:t>.</a:t>
                       </a:r>
-                      <a:endParaRPr lang="ko-KR" altLang="en-US" sz="800" b="0" i="0" kern="1200" smtClean="0">
+                      <a:endParaRPr lang="ko-KR" altLang="en-US" sz="800" b="0" i="0" kern="1200" dirty="0" smtClean="0">
                         <a:solidFill>
                           <a:schemeClr val="tx1"/>
                         </a:solidFill>
@@ -37695,7 +38867,7 @@
                     <a:p>
                       <a:pPr fontAlgn="t" latinLnBrk="0"/>
                       <a:r>
-                        <a:rPr lang="ko-KR" altLang="en-US" sz="800" b="0" i="0" kern="1200" smtClean="0">
+                        <a:rPr lang="ko-KR" altLang="en-US" sz="800" b="0" i="0" kern="1200" dirty="0" smtClean="0">
                           <a:solidFill>
                             <a:schemeClr val="tx1"/>
                           </a:solidFill>
@@ -37707,7 +38879,7 @@
                         <a:t>      </a:t>
                       </a:r>
                       <a:r>
-                        <a:rPr lang="en-US" altLang="ko-KR" sz="800" b="0" i="0" kern="1200" smtClean="0">
+                        <a:rPr lang="en-US" altLang="ko-KR" sz="800" b="0" i="0" kern="1200" dirty="0" smtClean="0">
                           <a:solidFill>
                             <a:schemeClr val="tx1"/>
                           </a:solidFill>
@@ -37719,7 +38891,7 @@
                         <a:t>M </a:t>
                       </a:r>
                       <a:r>
-                        <a:rPr lang="ko-KR" altLang="en-US" sz="800" b="0" i="0" kern="1200" smtClean="0">
+                        <a:rPr lang="ko-KR" altLang="en-US" sz="800" b="0" i="0" kern="1200" dirty="0" smtClean="0">
                           <a:solidFill>
                             <a:schemeClr val="tx1"/>
                           </a:solidFill>
@@ -37731,7 +38903,7 @@
                         <a:t>단계부터 전량에 대하여 사이버 보안 적용 품 납품</a:t>
                       </a:r>
                       <a:r>
-                        <a:rPr lang="en-US" altLang="ko-KR" sz="800" b="0" i="0" kern="1200" smtClean="0">
+                        <a:rPr lang="en-US" altLang="ko-KR" sz="800" b="0" i="0" kern="1200" dirty="0" smtClean="0">
                           <a:solidFill>
                             <a:schemeClr val="tx1"/>
                           </a:solidFill>
@@ -37742,7 +38914,7 @@
                         </a:rPr>
                         <a:t>.</a:t>
                       </a:r>
-                      <a:endParaRPr lang="ko-KR" altLang="en-US" sz="800" b="0" i="0" kern="1200" smtClean="0">
+                      <a:endParaRPr lang="ko-KR" altLang="en-US" sz="800" b="0" i="0" kern="1200" dirty="0" smtClean="0">
                         <a:solidFill>
                           <a:schemeClr val="tx1"/>
                         </a:solidFill>
